--- a/doc/comms/M2-06_Labs_WiFi_11_a_13.pptx
+++ b/doc/comms/M2-06_Labs_WiFi_11_a_13.pptx
@@ -27,6 +27,7 @@
     <p:sldId id="275" r:id="rId26"/>
     <p:sldId id="276" r:id="rId27"/>
     <p:sldId id="277" r:id="rId28"/>
+    <p:sldId id="278" r:id="rId29"/>
   </p:sldIdLst>
   <p:sldSz cx="12191695" cy="6858000" type="screen4x3"/>
   <p:notesSz cx="6858000" cy="9144000"/>
@@ -543,7 +544,7 @@
           </a:p>
           <a:p>
             <a:r>
-              <a:t>GPS — Global Positioning System.</a:t>
+              <a:t>GPS — Global Positioning System: a constelação americana; o nRF9151 recebe só o sinal L1 C/A dela.</a:t>
             </a:r>
           </a:p>
           <a:p>
@@ -746,6 +747,11 @@
               <a:t>ONT — Optical Network Terminal: o modem/roteador da fibra, o AP da bancada.</a:t>
             </a:r>
           </a:p>
+          <a:p>
+            <a:r>
+              <a:t>PPK2 — Power Profiler Kit II: o medidor de corrente da Nordic (200 nA a 1 A, 100 kSa/s).</a:t>
+            </a:r>
+          </a:p>
         </p:txBody>
       </p:sp>
       <p:sp>
@@ -818,27 +824,37 @@
           </a:p>
           <a:p>
             <a:r>
+              <a:t>TWT — Target Wake Time (Wi-Fi 6): a estação negocia com o AP o próprio horário de acordar. Opcional no AP.</a:t>
+            </a:r>
+          </a:p>
+          <a:p>
+            <a:r>
+              <a:t>AP — Access Point, ponto de acesso: quem anuncia a rede e dá acesso a ela (o roteador).</a:t>
+            </a:r>
+          </a:p>
+          <a:p>
+            <a:r>
+              <a:t>SP — Service Period: a janela em que a estação TWT está acordada e o AP a atende.</a:t>
+            </a:r>
+          </a:p>
+          <a:p>
+            <a:r>
               <a:t>DTIM — Delivery TIM: o TIM especial que aparece a cada N beacons e anuncia tráfego broadcast/multicast. Não é outro mecanismo: é um TIM privilegiado.</a:t>
             </a:r>
           </a:p>
           <a:p>
             <a:r>
-              <a:t>TWT — Target Wake Time (Wi-Fi 6): a estação negocia com o AP o próprio horário de acordar. Opcional no AP.</a:t>
-            </a:r>
-          </a:p>
-          <a:p>
-            <a:r>
-              <a:t>ONT — Optical Network Terminal: o modem/roteador da fibra, o AP da bancada.</a:t>
-            </a:r>
-          </a:p>
-          <a:p>
-            <a:r>
-              <a:t>ISLEEP — Corrente do nRF7002 dormindo, só com o RTC ligado (15 µA no datasheet).</a:t>
-            </a:r>
-          </a:p>
-          <a:p>
-            <a:r>
-              <a:t>RTC — Real-Time Counter: o único relógio que fica ligado com o rádio dormindo.</a:t>
+              <a:t>PS-Poll — Quadro que a estação manda ao AP para buscar um quadro unicast guardado (Legacy Power Save).</a:t>
+            </a:r>
+          </a:p>
+          <a:p>
+            <a:r>
+              <a:t>EDCA — Enhanced Distributed Channel Access: o acesso ao meio por contenção do Wi-Fi (CSMA/CA com prioridades). Num TWT non-trigger, é assim que a estação transmite dentro da service period.</a:t>
+            </a:r>
+          </a:p>
+          <a:p>
+            <a:r>
+              <a:t>STA — Station, estação: o dispositivo que entra na rede de um AP. O kit é STA.</a:t>
             </a:r>
           </a:p>
         </p:txBody>
@@ -913,7 +929,27 @@
           </a:p>
           <a:p>
             <a:r>
-              <a:t>BLE — Bluetooth Low Energy: o rádio de 2,4 GHz do próprio nRF54LM20.</a:t>
+              <a:t>DTIM — Delivery TIM: o TIM especial que aparece a cada N beacons e anuncia tráfego broadcast/multicast. Não é outro mecanismo: é um TIM privilegiado.</a:t>
+            </a:r>
+          </a:p>
+          <a:p>
+            <a:r>
+              <a:t>TWT — Target Wake Time (Wi-Fi 6): a estação negocia com o AP o próprio horário de acordar. Opcional no AP.</a:t>
+            </a:r>
+          </a:p>
+          <a:p>
+            <a:r>
+              <a:t>ONT — Optical Network Terminal: o modem/roteador da fibra, o AP da bancada.</a:t>
+            </a:r>
+          </a:p>
+          <a:p>
+            <a:r>
+              <a:t>ISLEEP — Corrente do nRF7002 dormindo, só com o RTC ligado (15 µA no datasheet).</a:t>
+            </a:r>
+          </a:p>
+          <a:p>
+            <a:r>
+              <a:t>RTC — Real-Time Counter: o único relógio que fica ligado com o rádio dormindo.</a:t>
             </a:r>
           </a:p>
         </p:txBody>
@@ -991,61 +1027,6 @@
               <a:t>BLE — Bluetooth Low Energy: o rádio de 2,4 GHz do próprio nRF54LM20.</a:t>
             </a:r>
           </a:p>
-          <a:p>
-            <a:r>
-              <a:t>PTA — Packet Traffic Arbitration: o árbitro de coexistência em hardware dentro do nRF70.</a:t>
-            </a:r>
-          </a:p>
-          <a:p>
-            <a:r>
-              <a:t>MPSL — Multiprotocol Service Layer: a camada da Nordic que arbitra o rádio entre protocolos; MPSL CX é a interface de coexistência.</a:t>
-            </a:r>
-          </a:p>
-          <a:p>
-            <a:r>
-              <a:t>CX — Coexistence: a interface de coexistência entre o rádio BLE e o Wi-Fi.</a:t>
-            </a:r>
-          </a:p>
-          <a:p>
-            <a:r>
-              <a:t>SDC — SoftDevice Controller: o controlador Bluetooth da Nordic.</a:t>
-            </a:r>
-          </a:p>
-          <a:p>
-            <a:r>
-              <a:t>RF — Radiofrequência; chave de RF é o switch de antena entre BLE e Wi-Fi (ausente na EB II desta placa).</a:t>
-            </a:r>
-          </a:p>
-          <a:p>
-            <a:r>
-              <a:t>UDP — User Datagram Protocol: datagramas sem conexão nem garantia de entrega.</a:t>
-            </a:r>
-          </a:p>
-          <a:p>
-            <a:r>
-              <a:t>iperf — Ferramenta de medir vazão de rede; a versão 2 fala com o zperf do Zephyr.</a:t>
-            </a:r>
-          </a:p>
-          <a:p>
-            <a:r>
-              <a:t>zperf — O gerador de tráfego do Zephyr, compatível com o iperf 2.</a:t>
-            </a:r>
-          </a:p>
-          <a:p>
-            <a:r>
-              <a:t>MAC — Medium Access Control: a camada que decide quem transmite e quando; também o endereço de hardware da interface.</a:t>
-            </a:r>
-          </a:p>
-          <a:p>
-            <a:r>
-              <a:t>FLASH — Memória não volátil de programa (2 MB no nRF54LM20).</a:t>
-            </a:r>
-          </a:p>
-          <a:p>
-            <a:r>
-              <a:t>P17 — Conector de expansão da LM20-DK onde a EB II encaixa.</a:t>
-            </a:r>
-          </a:p>
         </p:txBody>
       </p:sp>
       <p:sp>
@@ -1123,12 +1104,32 @@
           </a:p>
           <a:p>
             <a:r>
-              <a:t>DK — Development Kit: a placa de desenvolvimento (nRF54LM20-DK).</a:t>
-            </a:r>
-          </a:p>
-          <a:p>
-            <a:r>
-              <a:t>PC — Personal Computer.</a:t>
+              <a:t>PTA — Packet Traffic Arbitration: o árbitro de coexistência em hardware dentro do nRF70.</a:t>
+            </a:r>
+          </a:p>
+          <a:p>
+            <a:r>
+              <a:t>MPSL — Multiprotocol Service Layer: a camada da Nordic que arbitra o rádio entre protocolos; MPSL CX é a interface de coexistência.</a:t>
+            </a:r>
+          </a:p>
+          <a:p>
+            <a:r>
+              <a:t>CX — Coexistence: a interface de coexistência entre o rádio BLE e o Wi-Fi.</a:t>
+            </a:r>
+          </a:p>
+          <a:p>
+            <a:r>
+              <a:t>SDC — SoftDevice Controller: o controlador Bluetooth da Nordic.</a:t>
+            </a:r>
+          </a:p>
+          <a:p>
+            <a:r>
+              <a:t>RF — Radiofrequência; chave de RF é o switch de antena entre BLE e Wi-Fi (ausente na EB II desta placa).</a:t>
+            </a:r>
+          </a:p>
+          <a:p>
+            <a:r>
+              <a:t>UDP — User Datagram Protocol: datagramas sem conexão nem garantia de entrega.</a:t>
             </a:r>
           </a:p>
           <a:p>
@@ -1143,17 +1144,7 @@
           </a:p>
           <a:p>
             <a:r>
-              <a:t>EB II — nRF7002 Expansion Board II: o shield com o nRF7002 que encaixa na DK.</a:t>
-            </a:r>
-          </a:p>
-          <a:p>
-            <a:r>
-              <a:t>RF — Radiofrequência; chave de RF é o switch de antena entre BLE e Wi-Fi (ausente na EB II desta placa).</a:t>
-            </a:r>
-          </a:p>
-          <a:p>
-            <a:r>
-              <a:t>IP — Internet Protocol: o endereçamento e o roteamento entre redes.</a:t>
+              <a:t>MAC — Medium Access Control: a camada que decide quem transmite e quando; também o endereço de hardware da interface.</a:t>
             </a:r>
           </a:p>
           <a:p>
@@ -1163,7 +1154,7 @@
           </a:p>
           <a:p>
             <a:r>
-              <a:t>RAM — Random Access Memory: a memória de trabalho (511 KB no nRF54LM20).</a:t>
+              <a:t>P17 — Conector de expansão da LM20-DK onde a EB II encaixa.</a:t>
             </a:r>
           </a:p>
         </p:txBody>
@@ -1238,17 +1229,52 @@
           </a:p>
           <a:p>
             <a:r>
-              <a:t>UDP — User Datagram Protocol: datagramas sem conexão nem garantia de entrega.</a:t>
-            </a:r>
-          </a:p>
-          <a:p>
-            <a:r>
               <a:t>BLE — Bluetooth Low Energy: o rádio de 2,4 GHz do próprio nRF54LM20.</a:t>
             </a:r>
           </a:p>
           <a:p>
             <a:r>
+              <a:t>DK — Development Kit: a placa de desenvolvimento (nRF54LM20-DK).</a:t>
+            </a:r>
+          </a:p>
+          <a:p>
+            <a:r>
+              <a:t>PC — Personal Computer.</a:t>
+            </a:r>
+          </a:p>
+          <a:p>
+            <a:r>
+              <a:t>iperf — Ferramenta de medir vazão de rede; a versão 2 fala com o zperf do Zephyr.</a:t>
+            </a:r>
+          </a:p>
+          <a:p>
+            <a:r>
+              <a:t>zperf — O gerador de tráfego do Zephyr, compatível com o iperf 2.</a:t>
+            </a:r>
+          </a:p>
+          <a:p>
+            <a:r>
+              <a:t>EB II — nRF7002 Expansion Board II: o shield com o nRF7002 que encaixa na DK.</a:t>
+            </a:r>
+          </a:p>
+          <a:p>
+            <a:r>
               <a:t>RF — Radiofrequência; chave de RF é o switch de antena entre BLE e Wi-Fi (ausente na EB II desta placa).</a:t>
+            </a:r>
+          </a:p>
+          <a:p>
+            <a:r>
+              <a:t>IP — Internet Protocol: o endereçamento e o roteamento entre redes.</a:t>
+            </a:r>
+          </a:p>
+          <a:p>
+            <a:r>
+              <a:t>FLASH — Memória não volátil de programa (2 MB no nRF54LM20).</a:t>
+            </a:r>
+          </a:p>
+          <a:p>
+            <a:r>
+              <a:t>RAM — Random Access Memory: a memória de trabalho (511 KB no nRF54LM20).</a:t>
             </a:r>
           </a:p>
         </p:txBody>
@@ -1323,22 +1349,17 @@
           </a:p>
           <a:p>
             <a:r>
-              <a:t>SDK — Software Development Kit.</a:t>
-            </a:r>
-          </a:p>
-          <a:p>
-            <a:r>
               <a:t>UDP — User Datagram Protocol: datagramas sem conexão nem garantia de entrega.</a:t>
             </a:r>
           </a:p>
           <a:p>
             <a:r>
-              <a:t>SPI — Serial Peripheral Interface: barramento serial de 4 fios entre o host e o nRF7002 (8 MHz na EB II).</a:t>
-            </a:r>
-          </a:p>
-          <a:p>
-            <a:r>
               <a:t>BLE — Bluetooth Low Energy: o rádio de 2,4 GHz do próprio nRF54LM20.</a:t>
+            </a:r>
+          </a:p>
+          <a:p>
+            <a:r>
+              <a:t>RF — Radiofrequência; chave de RF é o switch de antena entre BLE e Wi-Fi (ausente na EB II desta placa).</a:t>
             </a:r>
           </a:p>
         </p:txBody>
@@ -1413,12 +1434,22 @@
           </a:p>
           <a:p>
             <a:r>
-              <a:t>GPS — Global Positioning System.</a:t>
-            </a:r>
-          </a:p>
-          <a:p>
-            <a:r>
-              <a:t>GNSS — Global Navigation Satellite System: GPS e similares.</a:t>
+              <a:t>SDK — Software Development Kit.</a:t>
+            </a:r>
+          </a:p>
+          <a:p>
+            <a:r>
+              <a:t>UDP — User Datagram Protocol: datagramas sem conexão nem garantia de entrega.</a:t>
+            </a:r>
+          </a:p>
+          <a:p>
+            <a:r>
+              <a:t>SPI — Serial Peripheral Interface: barramento serial de 4 fios entre o host e o nRF7002 (8 MHz na EB II).</a:t>
+            </a:r>
+          </a:p>
+          <a:p>
+            <a:r>
+              <a:t>BLE — Bluetooth Low Energy: o rádio de 2,4 GHz do próprio nRF54LM20.</a:t>
             </a:r>
           </a:p>
         </p:txBody>
@@ -1493,57 +1524,12 @@
           </a:p>
           <a:p>
             <a:r>
-              <a:t>BSSID — Basic Service Set Identifier: o endereço MAC do rádio do AP.</a:t>
-            </a:r>
-          </a:p>
-          <a:p>
-            <a:r>
-              <a:t>GPS — Global Positioning System.</a:t>
-            </a:r>
-          </a:p>
-          <a:p>
-            <a:r>
-              <a:t>DK — Development Kit: a placa de desenvolvimento (nRF54LM20-DK).</a:t>
-            </a:r>
-          </a:p>
-          <a:p>
-            <a:r>
-              <a:t>RSSI — Received Signal Strength Indication: potência do sinal recebido, em dBm (negativo).</a:t>
-            </a:r>
-          </a:p>
-          <a:p>
-            <a:r>
-              <a:t>SSID — Service Set Identifier: o nome da rede Wi-Fi.</a:t>
-            </a:r>
-          </a:p>
-          <a:p>
-            <a:r>
-              <a:t>TCP — Transmission Control Protocol: conexão confiável, em ordem.</a:t>
-            </a:r>
-          </a:p>
-          <a:p>
-            <a:r>
-              <a:t>PC — Personal Computer.</a:t>
-            </a:r>
-          </a:p>
-          <a:p>
-            <a:r>
-              <a:t>AP — Access Point, ponto de acesso: quem anuncia a rede e dá acesso a ela (o roteador).</a:t>
-            </a:r>
-          </a:p>
-          <a:p>
-            <a:r>
-              <a:t>HTTPS — HTTP sobre TLS.</a:t>
-            </a:r>
-          </a:p>
-          <a:p>
-            <a:r>
-              <a:t>OAT — Organization Auth Token do nRF Cloud: a chave que autoriza chamadas ao Location Services.</a:t>
-            </a:r>
-          </a:p>
-          <a:p>
-            <a:r>
-              <a:t>TF-M — Trusted Firmware-M: o firmware seguro (TrustZone) dos alvos /ns.</a:t>
+              <a:t>GPS — Global Positioning System: a constelação americana; o nRF9151 recebe só o sinal L1 C/A dela.</a:t>
+            </a:r>
+          </a:p>
+          <a:p>
+            <a:r>
+              <a:t>GNSS — Global Navigation Satellite System: o termo genérico; GPS, Galileo, GLONASS e BeiDou são constelações GNSS.</a:t>
             </a:r>
           </a:p>
         </p:txBody>
@@ -1698,6 +1684,36 @@
           </a:p>
           <a:p>
             <a:r>
+              <a:t>BSSID — Basic Service Set Identifier: o endereço MAC do rádio do AP.</a:t>
+            </a:r>
+          </a:p>
+          <a:p>
+            <a:r>
+              <a:t>GPS — Global Positioning System: a constelação americana; o nRF9151 recebe só o sinal L1 C/A dela.</a:t>
+            </a:r>
+          </a:p>
+          <a:p>
+            <a:r>
+              <a:t>DK — Development Kit: a placa de desenvolvimento (nRF54LM20-DK).</a:t>
+            </a:r>
+          </a:p>
+          <a:p>
+            <a:r>
+              <a:t>RSSI — Received Signal Strength Indication: potência do sinal recebido, em dBm (negativo).</a:t>
+            </a:r>
+          </a:p>
+          <a:p>
+            <a:r>
+              <a:t>SSID — Service Set Identifier: o nome da rede Wi-Fi.</a:t>
+            </a:r>
+          </a:p>
+          <a:p>
+            <a:r>
+              <a:t>TCP — Transmission Control Protocol: conexão confiável, em ordem.</a:t>
+            </a:r>
+          </a:p>
+          <a:p>
+            <a:r>
               <a:t>PC — Personal Computer.</a:t>
             </a:r>
           </a:p>
@@ -1708,12 +1724,17 @@
           </a:p>
           <a:p>
             <a:r>
+              <a:t>HTTPS — HTTP sobre TLS.</a:t>
+            </a:r>
+          </a:p>
+          <a:p>
+            <a:r>
               <a:t>OAT — Organization Auth Token do nRF Cloud: a chave que autoriza chamadas ao Location Services.</a:t>
             </a:r>
           </a:p>
           <a:p>
             <a:r>
-              <a:t>API — Application Programming Interface.</a:t>
+              <a:t>TF-M — Trusted Firmware-M: o firmware seguro (TrustZone) dos alvos /ns.</a:t>
             </a:r>
           </a:p>
         </p:txBody>
@@ -1793,7 +1814,7 @@
           </a:p>
           <a:p>
             <a:r>
-              <a:t>TF-M — Trusted Firmware-M: o firmware seguro (TrustZone) dos alvos /ns.</a:t>
+              <a:t>AP — Access Point, ponto de acesso: quem anuncia a rede e dá acesso a ela (o roteador).</a:t>
             </a:r>
           </a:p>
           <a:p>
@@ -1803,22 +1824,7 @@
           </a:p>
           <a:p>
             <a:r>
-              <a:t>FLASH — Memória não volátil de programa (2 MB no nRF54LM20).</a:t>
-            </a:r>
-          </a:p>
-          <a:p>
-            <a:r>
-              <a:t>RAM — Random Access Memory: a memória de trabalho (511 KB no nRF54LM20).</a:t>
-            </a:r>
-          </a:p>
-          <a:p>
-            <a:r>
-              <a:t>CoAP — Constrained Application Protocol: um HTTP leve sobre UDP, para dispositivos pequenos.</a:t>
-            </a:r>
-          </a:p>
-          <a:p>
-            <a:r>
-              <a:t>MQTT — Message Queuing Telemetry Transport: publish/subscribe por meio de um broker.</a:t>
+              <a:t>API — Application Programming Interface.</a:t>
             </a:r>
           </a:p>
         </p:txBody>
@@ -1844,6 +1850,111 @@
 </file>
 
 <file path=ppt/notesSlides/notesSlide22.xml><?xml version="1.0" encoding="utf-8"?>
+<p:notes xmlns:a="http://schemas.openxmlformats.org/drawingml/2006/main" xmlns:p="http://schemas.openxmlformats.org/presentationml/2006/main" xmlns:r="http://schemas.openxmlformats.org/officeDocument/2006/relationships">
+  <p:cSld>
+    <p:spTree>
+      <p:nvGrpSpPr>
+        <p:cNvPr id="1" name=""/>
+        <p:cNvGrpSpPr/>
+        <p:nvPr/>
+      </p:nvGrpSpPr>
+      <p:grpSpPr>
+        <a:xfrm>
+          <a:off x="0" y="0"/>
+          <a:ext cx="0" cy="0"/>
+          <a:chOff x="0" y="0"/>
+          <a:chExt cx="0" cy="0"/>
+        </a:xfrm>
+      </p:grpSpPr>
+      <p:sp>
+        <p:nvSpPr>
+          <p:cNvPr id="2" name="Slide Image Placeholder 1"/>
+          <p:cNvSpPr>
+            <a:spLocks noGrp="1"/>
+          </p:cNvSpPr>
+          <p:nvPr>
+            <p:ph type="sldImg" idx="2"/>
+          </p:nvPr>
+        </p:nvSpPr>
+        <p:spPr/>
+      </p:sp>
+      <p:sp>
+        <p:nvSpPr>
+          <p:cNvPr id="3" name="Notes Placeholder 2"/>
+          <p:cNvSpPr>
+            <a:spLocks noGrp="1"/>
+          </p:cNvSpPr>
+          <p:nvPr>
+            <p:ph type="body" idx="3" sz="quarter"/>
+          </p:nvPr>
+        </p:nvSpPr>
+        <p:spPr/>
+        <p:txBody>
+          <a:bodyPr/>
+          <a:lstStyle/>
+          <a:p>
+            <a:r>
+              <a:t>Glossário deste slide:</a:t>
+            </a:r>
+          </a:p>
+          <a:p>
+            <a:r>
+              <a:t>PC — Personal Computer.</a:t>
+            </a:r>
+          </a:p>
+          <a:p>
+            <a:r>
+              <a:t>TF-M — Trusted Firmware-M: o firmware seguro (TrustZone) dos alvos /ns.</a:t>
+            </a:r>
+          </a:p>
+          <a:p>
+            <a:r>
+              <a:t>OAT — Organization Auth Token do nRF Cloud: a chave que autoriza chamadas ao Location Services.</a:t>
+            </a:r>
+          </a:p>
+          <a:p>
+            <a:r>
+              <a:t>FLASH — Memória não volátil de programa (2 MB no nRF54LM20).</a:t>
+            </a:r>
+          </a:p>
+          <a:p>
+            <a:r>
+              <a:t>RAM — Random Access Memory: a memória de trabalho (511 KB no nRF54LM20).</a:t>
+            </a:r>
+          </a:p>
+          <a:p>
+            <a:r>
+              <a:t>CoAP — Constrained Application Protocol: um HTTP leve sobre UDP, para dispositivos pequenos.</a:t>
+            </a:r>
+          </a:p>
+          <a:p>
+            <a:r>
+              <a:t>MQTT — Message Queuing Telemetry Transport: publish/subscribe por meio de um broker.</a:t>
+            </a:r>
+          </a:p>
+        </p:txBody>
+      </p:sp>
+      <p:sp>
+        <p:nvSpPr>
+          <p:cNvPr id="4" name="Slide Number Placeholder 3"/>
+          <p:cNvSpPr>
+            <a:spLocks noGrp="1"/>
+          </p:cNvSpPr>
+          <p:nvPr>
+            <p:ph type="sldNum" idx="5" sz="quarter"/>
+          </p:nvPr>
+        </p:nvSpPr>
+        <p:spPr/>
+      </p:sp>
+    </p:spTree>
+  </p:cSld>
+  <p:clrMapOvr>
+    <a:masterClrMapping/>
+  </p:clrMapOvr>
+</p:notes>
+</file>
+
+<file path=ppt/notesSlides/notesSlide23.xml><?xml version="1.0" encoding="utf-8"?>
 <p:notes xmlns:a="http://schemas.openxmlformats.org/drawingml/2006/main" xmlns:p="http://schemas.openxmlformats.org/presentationml/2006/main" xmlns:r="http://schemas.openxmlformats.org/officeDocument/2006/relationships">
   <p:cSld>
     <p:spTree>
@@ -7019,7 +7130,16 @@
                 </a:solidFill>
                 <a:latin typeface="Segoe UI"/>
               </a:rPr>
-              <a:t>; o EX3000 foi descartado</a:t>
+              <a:t>; o AP da sala, também ax, responde </a:t>
+            </a:r>
+            <a:r>
+              <a:rPr sz="1300" b="0" i="0">
+                <a:solidFill>
+                  <a:srgbClr val="566577"/>
+                </a:solidFill>
+                <a:latin typeface="Consolas"/>
+              </a:rPr>
+              <a:t>TWT accept</a:t>
             </a:r>
           </a:p>
         </p:txBody>
@@ -7207,7 +7327,7 @@
                 </a:solidFill>
                 <a:latin typeface="Segoe UI"/>
               </a:rPr>
-              <a:t>; o AP reserva a service period, manda trigger frames, aloca Resource Units</a:t>
+              <a:t>; o AP reserva a service period (num flow trigger-enabled, manda trigger frames e aloca Resource Units)</a:t>
             </a:r>
           </a:p>
           <a:p>
@@ -7410,7 +7530,7 @@
                 </a:solidFill>
                 <a:latin typeface="Segoe UI"/>
               </a:rPr>
-              <a:t>Receita pronta no README, não testada: </a:t>
+              <a:t>Demonstrado no AP da sala, no firmware do lab 6: </a:t>
             </a:r>
             <a:r>
               <a:rPr sz="1300" b="1" i="0">
@@ -7419,7 +7539,7 @@
                 </a:solidFill>
                 <a:latin typeface="Consolas"/>
               </a:rPr>
-              <a:t>wifi twt quick_setup 8192 60000000</a:t>
+              <a:t>wifi twt quick_setup 65024 524288</a:t>
             </a:r>
             <a:r>
               <a:rPr sz="1300" b="1" i="0">
@@ -7428,7 +7548,25 @@
                 </a:solidFill>
                 <a:latin typeface="Segoe UI"/>
               </a:rPr>
-              <a:t> no firmware do lab 6 — e dizer à turma que não foi verificado.</a:t>
+              <a:t> devolve </a:t>
+            </a:r>
+            <a:r>
+              <a:rPr sz="1300" b="1" i="0">
+                <a:solidFill>
+                  <a:srgbClr val="0B1B2B"/>
+                </a:solidFill>
+                <a:latin typeface="Consolas"/>
+              </a:rPr>
+              <a:t>TWT accept</a:t>
+            </a:r>
+            <a:r>
+              <a:rPr sz="1300" b="1" i="0">
+                <a:solidFill>
+                  <a:srgbClr val="0B1B2B"/>
+                </a:solidFill>
+                <a:latin typeface="Segoe UI"/>
+              </a:rPr>
+              <a:t>. A corrente com TWT ainda não foi medida com o PPK2.</a:t>
             </a:r>
           </a:p>
         </p:txBody>
@@ -7568,7 +7706,7 @@
                 </a:solidFill>
                 <a:latin typeface="Segoe UI"/>
               </a:rPr>
-              <a:t>Os números do datasheet</a:t>
+              <a:t>O acordo de TWT, campo a campo</a:t>
             </a:r>
           </a:p>
         </p:txBody>
@@ -7700,6 +7838,358 @@
                 <a:latin typeface="Segoe UI"/>
               </a:rPr>
               <a:t>12</a:t>
+            </a:r>
+          </a:p>
+        </p:txBody>
+      </p:sp>
+      <p:sp>
+        <p:nvSpPr>
+          <p:cNvPr id="8" name="TextBox 7"/>
+          <p:cNvSpPr txBox="1"/>
+          <p:nvPr/>
+        </p:nvSpPr>
+        <p:spPr>
+          <a:xfrm>
+            <a:off x="713232" y="1225296"/>
+            <a:ext cx="10765231" cy="548640"/>
+          </a:xfrm>
+          <a:prstGeom prst="rect">
+            <a:avLst/>
+          </a:prstGeom>
+          <a:noFill/>
+        </p:spPr>
+        <p:txBody>
+          <a:bodyPr wrap="square" anchor="t" lIns="0" rIns="0" tIns="0" bIns="0">
+            <a:spAutoFit/>
+          </a:bodyPr>
+          <a:lstStyle/>
+          <a:p>
+            <a:pPr algn="l">
+              <a:lnSpc>
+                <a:spcPct val="125000"/>
+              </a:lnSpc>
+            </a:pPr>
+            <a:r>
+              <a:rPr sz="1400" b="0" i="0">
+                <a:solidFill>
+                  <a:srgbClr val="566577"/>
+                </a:solidFill>
+                <a:latin typeface="Segoe UI"/>
+              </a:rPr>
+              <a:t>Log real do AP da sala. O primeiro número do </a:t>
+            </a:r>
+            <a:r>
+              <a:rPr sz="1400" b="0" i="0">
+                <a:solidFill>
+                  <a:srgbClr val="566577"/>
+                </a:solidFill>
+                <a:latin typeface="Consolas"/>
+              </a:rPr>
+              <a:t>quick_setup</a:t>
+            </a:r>
+            <a:r>
+              <a:rPr sz="1400" b="0" i="0">
+                <a:solidFill>
+                  <a:srgbClr val="566577"/>
+                </a:solidFill>
+                <a:latin typeface="Segoe UI"/>
+              </a:rPr>
+              <a:t> é quanto tempo a estação fica acordada por service period; o segundo, de quanto em quanto ela se repete: 65 ÷ 524 = 12,4 % do tempo com o rádio ligado.</a:t>
+            </a:r>
+          </a:p>
+        </p:txBody>
+      </p:sp>
+      <p:pic>
+        <p:nvPicPr>
+          <p:cNvPr id="9" name="Picture 8" descr="wifi_twt_sp_deck.png"/>
+          <p:cNvPicPr>
+            <a:picLocks noChangeAspect="1"/>
+          </p:cNvPicPr>
+          <p:nvPr/>
+        </p:nvPicPr>
+        <p:blipFill>
+          <a:blip r:embed="rId2"/>
+          <a:stretch>
+            <a:fillRect/>
+          </a:stretch>
+        </p:blipFill>
+        <p:spPr>
+          <a:xfrm>
+            <a:off x="713232" y="1810512"/>
+            <a:ext cx="10765231" cy="4306092"/>
+          </a:xfrm>
+          <a:prstGeom prst="rect">
+            <a:avLst/>
+          </a:prstGeom>
+        </p:spPr>
+      </p:pic>
+    </p:spTree>
+  </p:cSld>
+  <p:clrMapOvr>
+    <a:masterClrMapping/>
+  </p:clrMapOvr>
+</p:sld>
+</file>
+
+<file path=ppt/slides/slide13.xml><?xml version="1.0" encoding="utf-8"?>
+<p:sld xmlns:a="http://schemas.openxmlformats.org/drawingml/2006/main" xmlns:p="http://schemas.openxmlformats.org/presentationml/2006/main" xmlns:r="http://schemas.openxmlformats.org/officeDocument/2006/relationships">
+  <p:cSld>
+    <p:spTree>
+      <p:nvGrpSpPr>
+        <p:cNvPr id="1" name=""/>
+        <p:cNvGrpSpPr/>
+        <p:nvPr/>
+      </p:nvGrpSpPr>
+      <p:grpSpPr/>
+      <p:sp>
+        <p:nvSpPr>
+          <p:cNvPr id="2" name="Rectangle 1"/>
+          <p:cNvSpPr/>
+          <p:nvPr/>
+        </p:nvSpPr>
+        <p:spPr>
+          <a:xfrm>
+            <a:off x="0" y="0"/>
+            <a:ext cx="12191695" cy="6858000"/>
+          </a:xfrm>
+          <a:prstGeom prst="rect">
+            <a:avLst/>
+          </a:prstGeom>
+          <a:solidFill>
+            <a:srgbClr val="FFFFFF"/>
+          </a:solidFill>
+          <a:ln>
+            <a:noFill/>
+          </a:ln>
+          <a:effectLst/>
+        </p:spPr>
+        <p:style>
+          <a:lnRef idx="1">
+            <a:schemeClr val="accent1"/>
+          </a:lnRef>
+          <a:fillRef idx="3">
+            <a:schemeClr val="accent1"/>
+          </a:fillRef>
+          <a:effectRef idx="2">
+            <a:schemeClr val="accent1"/>
+          </a:effectRef>
+          <a:fontRef idx="minor">
+            <a:schemeClr val="lt1"/>
+          </a:fontRef>
+        </p:style>
+        <p:txBody>
+          <a:bodyPr rtlCol="0" anchor="ctr"/>
+          <a:lstStyle/>
+          <a:p>
+            <a:pPr algn="ctr"/>
+          </a:p>
+        </p:txBody>
+      </p:sp>
+      <p:sp>
+        <p:nvSpPr>
+          <p:cNvPr id="3" name="TextBox 2"/>
+          <p:cNvSpPr txBox="1"/>
+          <p:nvPr/>
+        </p:nvSpPr>
+        <p:spPr>
+          <a:xfrm>
+            <a:off x="713232" y="274320"/>
+            <a:ext cx="10765231" cy="274320"/>
+          </a:xfrm>
+          <a:prstGeom prst="rect">
+            <a:avLst/>
+          </a:prstGeom>
+          <a:noFill/>
+        </p:spPr>
+        <p:txBody>
+          <a:bodyPr wrap="square" anchor="t" lIns="0" rIns="0" tIns="0" bIns="0">
+            <a:spAutoFit/>
+          </a:bodyPr>
+          <a:lstStyle/>
+          <a:p>
+            <a:pPr algn="l">
+              <a:lnSpc>
+                <a:spcPct val="100000"/>
+              </a:lnSpc>
+            </a:pPr>
+            <a:r>
+              <a:rPr sz="1200" b="1" i="0" spc="140">
+                <a:solidFill>
+                  <a:srgbClr val="0093D0"/>
+                </a:solidFill>
+                <a:latin typeface="Segoe UI"/>
+              </a:rPr>
+              <a:t>LAB 11 · ENERGIA</a:t>
+            </a:r>
+          </a:p>
+        </p:txBody>
+      </p:sp>
+      <p:sp>
+        <p:nvSpPr>
+          <p:cNvPr id="4" name="TextBox 3"/>
+          <p:cNvSpPr txBox="1"/>
+          <p:nvPr/>
+        </p:nvSpPr>
+        <p:spPr>
+          <a:xfrm>
+            <a:off x="713232" y="585216"/>
+            <a:ext cx="10765231" cy="566928"/>
+          </a:xfrm>
+          <a:prstGeom prst="rect">
+            <a:avLst/>
+          </a:prstGeom>
+          <a:noFill/>
+        </p:spPr>
+        <p:txBody>
+          <a:bodyPr wrap="square" anchor="t" lIns="0" rIns="0" tIns="0" bIns="0">
+            <a:spAutoFit/>
+          </a:bodyPr>
+          <a:lstStyle/>
+          <a:p>
+            <a:pPr algn="l">
+              <a:lnSpc>
+                <a:spcPct val="100000"/>
+              </a:lnSpc>
+            </a:pPr>
+            <a:r>
+              <a:rPr sz="3200" b="1" i="0">
+                <a:solidFill>
+                  <a:srgbClr val="0B1B2B"/>
+                </a:solidFill>
+                <a:latin typeface="Segoe UI"/>
+              </a:rPr>
+              <a:t>Os números do datasheet</a:t>
+            </a:r>
+          </a:p>
+        </p:txBody>
+      </p:sp>
+      <p:sp>
+        <p:nvSpPr>
+          <p:cNvPr id="5" name="Oval 4"/>
+          <p:cNvSpPr/>
+          <p:nvPr/>
+        </p:nvSpPr>
+        <p:spPr>
+          <a:xfrm>
+            <a:off x="713232" y="6492240"/>
+            <a:ext cx="82296" cy="82296"/>
+          </a:xfrm>
+          <a:prstGeom prst="ellipse">
+            <a:avLst/>
+          </a:prstGeom>
+          <a:solidFill>
+            <a:srgbClr val="22C3E6"/>
+          </a:solidFill>
+          <a:ln>
+            <a:noFill/>
+          </a:ln>
+          <a:effectLst/>
+        </p:spPr>
+        <p:style>
+          <a:lnRef idx="1">
+            <a:schemeClr val="accent1"/>
+          </a:lnRef>
+          <a:fillRef idx="3">
+            <a:schemeClr val="accent1"/>
+          </a:fillRef>
+          <a:effectRef idx="2">
+            <a:schemeClr val="accent1"/>
+          </a:effectRef>
+          <a:fontRef idx="minor">
+            <a:schemeClr val="lt1"/>
+          </a:fontRef>
+        </p:style>
+        <p:txBody>
+          <a:bodyPr rtlCol="0" anchor="ctr"/>
+          <a:lstStyle/>
+          <a:p>
+            <a:pPr algn="ctr"/>
+          </a:p>
+        </p:txBody>
+      </p:sp>
+      <p:sp>
+        <p:nvSpPr>
+          <p:cNvPr id="6" name="TextBox 5"/>
+          <p:cNvSpPr txBox="1"/>
+          <p:nvPr/>
+        </p:nvSpPr>
+        <p:spPr>
+          <a:xfrm>
+            <a:off x="877824" y="6400800"/>
+            <a:ext cx="8229600" cy="274320"/>
+          </a:xfrm>
+          <a:prstGeom prst="rect">
+            <a:avLst/>
+          </a:prstGeom>
+          <a:noFill/>
+        </p:spPr>
+        <p:txBody>
+          <a:bodyPr wrap="square" anchor="t" lIns="0" rIns="0" tIns="0" bIns="0">
+            <a:spAutoFit/>
+          </a:bodyPr>
+          <a:lstStyle/>
+          <a:p>
+            <a:pPr algn="l">
+              <a:lnSpc>
+                <a:spcPct val="100000"/>
+              </a:lnSpc>
+            </a:pPr>
+            <a:r>
+              <a:rPr sz="1000" b="1" i="0">
+                <a:solidFill>
+                  <a:srgbClr val="0B1B2B"/>
+                </a:solidFill>
+                <a:latin typeface="Segoe UI"/>
+              </a:rPr>
+              <a:t>M2</a:t>
+            </a:r>
+            <a:r>
+              <a:rPr sz="1000" b="0" i="0">
+                <a:solidFill>
+                  <a:srgbClr val="566577"/>
+                </a:solidFill>
+                <a:latin typeface="Segoe UI"/>
+              </a:rPr>
+              <a:t> · IA EMBARCADA &amp; CONECTIVIDADE</a:t>
+            </a:r>
+          </a:p>
+        </p:txBody>
+      </p:sp>
+      <p:sp>
+        <p:nvSpPr>
+          <p:cNvPr id="7" name="TextBox 6"/>
+          <p:cNvSpPr txBox="1"/>
+          <p:nvPr/>
+        </p:nvSpPr>
+        <p:spPr>
+          <a:xfrm>
+            <a:off x="10972800" y="6400800"/>
+            <a:ext cx="502920" cy="274320"/>
+          </a:xfrm>
+          <a:prstGeom prst="rect">
+            <a:avLst/>
+          </a:prstGeom>
+          <a:noFill/>
+        </p:spPr>
+        <p:txBody>
+          <a:bodyPr wrap="square" anchor="t" lIns="0" rIns="0" tIns="0" bIns="0">
+            <a:spAutoFit/>
+          </a:bodyPr>
+          <a:lstStyle/>
+          <a:p>
+            <a:pPr algn="r">
+              <a:lnSpc>
+                <a:spcPct val="100000"/>
+              </a:lnSpc>
+            </a:pPr>
+            <a:r>
+              <a:rPr sz="1000" b="0" i="0">
+                <a:solidFill>
+                  <a:srgbClr val="566577"/>
+                </a:solidFill>
+                <a:latin typeface="Segoe UI"/>
+              </a:rPr>
+              <a:t>13</a:t>
             </a:r>
           </a:p>
         </p:txBody>
@@ -8400,7 +8890,7 @@
 </p:sld>
 </file>
 
-<file path=ppt/slides/slide13.xml><?xml version="1.0" encoding="utf-8"?>
+<file path=ppt/slides/slide14.xml><?xml version="1.0" encoding="utf-8"?>
 <p:sld xmlns:a="http://schemas.openxmlformats.org/drawingml/2006/main" xmlns:p="http://schemas.openxmlformats.org/presentationml/2006/main" xmlns:r="http://schemas.openxmlformats.org/officeDocument/2006/relationships">
   <p:cSld>
     <p:spTree>
@@ -8749,381 +9239,11 @@
                 </a:solidFill>
                 <a:latin typeface="Segoe UI"/>
               </a:rPr>
-              <a:t>13</a:t>
-            </a:r>
-          </a:p>
-        </p:txBody>
-      </p:sp>
-    </p:spTree>
-  </p:cSld>
-  <p:clrMapOvr>
-    <a:masterClrMapping/>
-  </p:clrMapOvr>
-</p:sld>
-</file>
-
-<file path=ppt/slides/slide14.xml><?xml version="1.0" encoding="utf-8"?>
-<p:sld xmlns:a="http://schemas.openxmlformats.org/drawingml/2006/main" xmlns:p="http://schemas.openxmlformats.org/presentationml/2006/main" xmlns:r="http://schemas.openxmlformats.org/officeDocument/2006/relationships">
-  <p:cSld>
-    <p:spTree>
-      <p:nvGrpSpPr>
-        <p:cNvPr id="1" name=""/>
-        <p:cNvGrpSpPr/>
-        <p:nvPr/>
-      </p:nvGrpSpPr>
-      <p:grpSpPr/>
-      <p:sp>
-        <p:nvSpPr>
-          <p:cNvPr id="2" name="Rectangle 1"/>
-          <p:cNvSpPr/>
-          <p:nvPr/>
-        </p:nvSpPr>
-        <p:spPr>
-          <a:xfrm>
-            <a:off x="0" y="0"/>
-            <a:ext cx="12191695" cy="6858000"/>
-          </a:xfrm>
-          <a:prstGeom prst="rect">
-            <a:avLst/>
-          </a:prstGeom>
-          <a:solidFill>
-            <a:srgbClr val="FFFFFF"/>
-          </a:solidFill>
-          <a:ln>
-            <a:noFill/>
-          </a:ln>
-          <a:effectLst/>
-        </p:spPr>
-        <p:style>
-          <a:lnRef idx="1">
-            <a:schemeClr val="accent1"/>
-          </a:lnRef>
-          <a:fillRef idx="3">
-            <a:schemeClr val="accent1"/>
-          </a:fillRef>
-          <a:effectRef idx="2">
-            <a:schemeClr val="accent1"/>
-          </a:effectRef>
-          <a:fontRef idx="minor">
-            <a:schemeClr val="lt1"/>
-          </a:fontRef>
-        </p:style>
-        <p:txBody>
-          <a:bodyPr rtlCol="0" anchor="ctr"/>
-          <a:lstStyle/>
-          <a:p>
-            <a:pPr algn="ctr"/>
-          </a:p>
-        </p:txBody>
-      </p:sp>
-      <p:sp>
-        <p:nvSpPr>
-          <p:cNvPr id="3" name="TextBox 2"/>
-          <p:cNvSpPr txBox="1"/>
-          <p:nvPr/>
-        </p:nvSpPr>
-        <p:spPr>
-          <a:xfrm>
-            <a:off x="713232" y="274320"/>
-            <a:ext cx="10765231" cy="274320"/>
-          </a:xfrm>
-          <a:prstGeom prst="rect">
-            <a:avLst/>
-          </a:prstGeom>
-          <a:noFill/>
-        </p:spPr>
-        <p:txBody>
-          <a:bodyPr wrap="square" anchor="t" lIns="0" rIns="0" tIns="0" bIns="0">
-            <a:spAutoFit/>
-          </a:bodyPr>
-          <a:lstStyle/>
-          <a:p>
-            <a:pPr algn="l">
-              <a:lnSpc>
-                <a:spcPct val="100000"/>
-              </a:lnSpc>
-            </a:pPr>
-            <a:r>
-              <a:rPr sz="1200" b="1" i="0" spc="140">
-                <a:solidFill>
-                  <a:srgbClr val="0093D0"/>
-                </a:solidFill>
-                <a:latin typeface="Segoe UI"/>
-              </a:rPr>
-              <a:t>LAB 12 · COEXISTÊNCIA</a:t>
-            </a:r>
-          </a:p>
-        </p:txBody>
-      </p:sp>
-      <p:sp>
-        <p:nvSpPr>
-          <p:cNvPr id="4" name="TextBox 3"/>
-          <p:cNvSpPr txBox="1"/>
-          <p:nvPr/>
-        </p:nvSpPr>
-        <p:spPr>
-          <a:xfrm>
-            <a:off x="713232" y="585216"/>
-            <a:ext cx="10765231" cy="566928"/>
-          </a:xfrm>
-          <a:prstGeom prst="rect">
-            <a:avLst/>
-          </a:prstGeom>
-          <a:noFill/>
-        </p:spPr>
-        <p:txBody>
-          <a:bodyPr wrap="square" anchor="t" lIns="0" rIns="0" tIns="0" bIns="0">
-            <a:spAutoFit/>
-          </a:bodyPr>
-          <a:lstStyle/>
-          <a:p>
-            <a:pPr algn="l">
-              <a:lnSpc>
-                <a:spcPct val="100000"/>
-              </a:lnSpc>
-            </a:pPr>
-            <a:r>
-              <a:rPr sz="3200" b="1" i="0">
-                <a:solidFill>
-                  <a:srgbClr val="0B1B2B"/>
-                </a:solidFill>
-                <a:latin typeface="Segoe UI"/>
-              </a:rPr>
-              <a:t>BLE e Wi-Fi no mesmo kit</a:t>
-            </a:r>
-          </a:p>
-        </p:txBody>
-      </p:sp>
-      <p:sp>
-        <p:nvSpPr>
-          <p:cNvPr id="5" name="Oval 4"/>
-          <p:cNvSpPr/>
-          <p:nvPr/>
-        </p:nvSpPr>
-        <p:spPr>
-          <a:xfrm>
-            <a:off x="713232" y="6492240"/>
-            <a:ext cx="82296" cy="82296"/>
-          </a:xfrm>
-          <a:prstGeom prst="ellipse">
-            <a:avLst/>
-          </a:prstGeom>
-          <a:solidFill>
-            <a:srgbClr val="22C3E6"/>
-          </a:solidFill>
-          <a:ln>
-            <a:noFill/>
-          </a:ln>
-          <a:effectLst/>
-        </p:spPr>
-        <p:style>
-          <a:lnRef idx="1">
-            <a:schemeClr val="accent1"/>
-          </a:lnRef>
-          <a:fillRef idx="3">
-            <a:schemeClr val="accent1"/>
-          </a:fillRef>
-          <a:effectRef idx="2">
-            <a:schemeClr val="accent1"/>
-          </a:effectRef>
-          <a:fontRef idx="minor">
-            <a:schemeClr val="lt1"/>
-          </a:fontRef>
-        </p:style>
-        <p:txBody>
-          <a:bodyPr rtlCol="0" anchor="ctr"/>
-          <a:lstStyle/>
-          <a:p>
-            <a:pPr algn="ctr"/>
-          </a:p>
-        </p:txBody>
-      </p:sp>
-      <p:sp>
-        <p:nvSpPr>
-          <p:cNvPr id="6" name="TextBox 5"/>
-          <p:cNvSpPr txBox="1"/>
-          <p:nvPr/>
-        </p:nvSpPr>
-        <p:spPr>
-          <a:xfrm>
-            <a:off x="877824" y="6400800"/>
-            <a:ext cx="8229600" cy="274320"/>
-          </a:xfrm>
-          <a:prstGeom prst="rect">
-            <a:avLst/>
-          </a:prstGeom>
-          <a:noFill/>
-        </p:spPr>
-        <p:txBody>
-          <a:bodyPr wrap="square" anchor="t" lIns="0" rIns="0" tIns="0" bIns="0">
-            <a:spAutoFit/>
-          </a:bodyPr>
-          <a:lstStyle/>
-          <a:p>
-            <a:pPr algn="l">
-              <a:lnSpc>
-                <a:spcPct val="100000"/>
-              </a:lnSpc>
-            </a:pPr>
-            <a:r>
-              <a:rPr sz="1000" b="1" i="0">
-                <a:solidFill>
-                  <a:srgbClr val="0B1B2B"/>
-                </a:solidFill>
-                <a:latin typeface="Segoe UI"/>
-              </a:rPr>
-              <a:t>M2</a:t>
-            </a:r>
-            <a:r>
-              <a:rPr sz="1000" b="0" i="0">
-                <a:solidFill>
-                  <a:srgbClr val="566577"/>
-                </a:solidFill>
-                <a:latin typeface="Segoe UI"/>
-              </a:rPr>
-              <a:t> · IA EMBARCADA &amp; CONECTIVIDADE</a:t>
-            </a:r>
-          </a:p>
-        </p:txBody>
-      </p:sp>
-      <p:sp>
-        <p:nvSpPr>
-          <p:cNvPr id="7" name="TextBox 6"/>
-          <p:cNvSpPr txBox="1"/>
-          <p:nvPr/>
-        </p:nvSpPr>
-        <p:spPr>
-          <a:xfrm>
-            <a:off x="10972800" y="6400800"/>
-            <a:ext cx="502920" cy="274320"/>
-          </a:xfrm>
-          <a:prstGeom prst="rect">
-            <a:avLst/>
-          </a:prstGeom>
-          <a:noFill/>
-        </p:spPr>
-        <p:txBody>
-          <a:bodyPr wrap="square" anchor="t" lIns="0" rIns="0" tIns="0" bIns="0">
-            <a:spAutoFit/>
-          </a:bodyPr>
-          <a:lstStyle/>
-          <a:p>
-            <a:pPr algn="r">
-              <a:lnSpc>
-                <a:spcPct val="100000"/>
-              </a:lnSpc>
-            </a:pPr>
-            <a:r>
-              <a:rPr sz="1000" b="0" i="0">
-                <a:solidFill>
-                  <a:srgbClr val="566577"/>
-                </a:solidFill>
-                <a:latin typeface="Segoe UI"/>
-              </a:rPr>
               <a:t>14</a:t>
             </a:r>
           </a:p>
         </p:txBody>
       </p:sp>
-      <p:sp>
-        <p:nvSpPr>
-          <p:cNvPr id="8" name="TextBox 7"/>
-          <p:cNvSpPr txBox="1"/>
-          <p:nvPr/>
-        </p:nvSpPr>
-        <p:spPr>
-          <a:xfrm>
-            <a:off x="713232" y="1225296"/>
-            <a:ext cx="10765231" cy="548640"/>
-          </a:xfrm>
-          <a:prstGeom prst="rect">
-            <a:avLst/>
-          </a:prstGeom>
-          <a:noFill/>
-        </p:spPr>
-        <p:txBody>
-          <a:bodyPr wrap="square" anchor="t" lIns="0" rIns="0" tIns="0" bIns="0">
-            <a:spAutoFit/>
-          </a:bodyPr>
-          <a:lstStyle/>
-          <a:p>
-            <a:pPr algn="l">
-              <a:lnSpc>
-                <a:spcPct val="125000"/>
-              </a:lnSpc>
-            </a:pPr>
-            <a:r>
-              <a:rPr sz="1400" b="0" i="0">
-                <a:solidFill>
-                  <a:srgbClr val="566577"/>
-                </a:solidFill>
-                <a:latin typeface="Segoe UI"/>
-              </a:rPr>
-              <a:t>O nRF7002 tem um </a:t>
-            </a:r>
-            <a:r>
-              <a:rPr sz="1400" b="1" i="0">
-                <a:solidFill>
-                  <a:srgbClr val="0B1B2B"/>
-                </a:solidFill>
-                <a:latin typeface="Segoe UI"/>
-              </a:rPr>
-              <a:t>PTA</a:t>
-            </a:r>
-            <a:r>
-              <a:rPr sz="1400" b="0" i="0">
-                <a:solidFill>
-                  <a:srgbClr val="566577"/>
-                </a:solidFill>
-                <a:latin typeface="Segoe UI"/>
-              </a:rPr>
-              <a:t> (Packet Traffic Arbitration) em hardware; o lado BLE é o </a:t>
-            </a:r>
-            <a:r>
-              <a:rPr sz="1400" b="1" i="0">
-                <a:solidFill>
-                  <a:srgbClr val="0B1B2B"/>
-                </a:solidFill>
-                <a:latin typeface="Segoe UI"/>
-              </a:rPr>
-              <a:t>MPSL CX</a:t>
-            </a:r>
-            <a:r>
-              <a:rPr sz="1400" b="0" i="0">
-                <a:solidFill>
-                  <a:srgbClr val="566577"/>
-                </a:solidFill>
-                <a:latin typeface="Segoe UI"/>
-              </a:rPr>
-              <a:t> no nRF54LM20. Três linhas no header de expansão: BLE pede (REQ), diz se é TX ou RX (STATUS0), o PTA responde GRANT.</a:t>
-            </a:r>
-          </a:p>
-        </p:txBody>
-      </p:sp>
-      <p:pic>
-        <p:nvPicPr>
-          <p:cNvPr id="9" name="Picture 8" descr="wifi_coex_deck.png"/>
-          <p:cNvPicPr>
-            <a:picLocks noChangeAspect="1"/>
-          </p:cNvPicPr>
-          <p:nvPr/>
-        </p:nvPicPr>
-        <p:blipFill>
-          <a:blip r:embed="rId2"/>
-          <a:stretch>
-            <a:fillRect/>
-          </a:stretch>
-        </p:blipFill>
-        <p:spPr>
-          <a:xfrm>
-            <a:off x="1074530" y="1810512"/>
-            <a:ext cx="10042634" cy="4480560"/>
-          </a:xfrm>
-          <a:prstGeom prst="rect">
-            <a:avLst/>
-          </a:prstGeom>
-        </p:spPr>
-      </p:pic>
     </p:spTree>
   </p:cSld>
   <p:clrMapOvr>
@@ -9259,7 +9379,7 @@
                 </a:solidFill>
                 <a:latin typeface="Segoe UI"/>
               </a:rPr>
-              <a:t>O build de coexistência</a:t>
+              <a:t>BLE e Wi-Fi no mesmo kit</a:t>
             </a:r>
           </a:p>
         </p:txBody>
@@ -9391,6 +9511,376 @@
                 <a:latin typeface="Segoe UI"/>
               </a:rPr>
               <a:t>15</a:t>
+            </a:r>
+          </a:p>
+        </p:txBody>
+      </p:sp>
+      <p:sp>
+        <p:nvSpPr>
+          <p:cNvPr id="8" name="TextBox 7"/>
+          <p:cNvSpPr txBox="1"/>
+          <p:nvPr/>
+        </p:nvSpPr>
+        <p:spPr>
+          <a:xfrm>
+            <a:off x="713232" y="1225296"/>
+            <a:ext cx="10765231" cy="548640"/>
+          </a:xfrm>
+          <a:prstGeom prst="rect">
+            <a:avLst/>
+          </a:prstGeom>
+          <a:noFill/>
+        </p:spPr>
+        <p:txBody>
+          <a:bodyPr wrap="square" anchor="t" lIns="0" rIns="0" tIns="0" bIns="0">
+            <a:spAutoFit/>
+          </a:bodyPr>
+          <a:lstStyle/>
+          <a:p>
+            <a:pPr algn="l">
+              <a:lnSpc>
+                <a:spcPct val="125000"/>
+              </a:lnSpc>
+            </a:pPr>
+            <a:r>
+              <a:rPr sz="1400" b="0" i="0">
+                <a:solidFill>
+                  <a:srgbClr val="566577"/>
+                </a:solidFill>
+                <a:latin typeface="Segoe UI"/>
+              </a:rPr>
+              <a:t>O nRF7002 tem um </a:t>
+            </a:r>
+            <a:r>
+              <a:rPr sz="1400" b="1" i="0">
+                <a:solidFill>
+                  <a:srgbClr val="0B1B2B"/>
+                </a:solidFill>
+                <a:latin typeface="Segoe UI"/>
+              </a:rPr>
+              <a:t>PTA</a:t>
+            </a:r>
+            <a:r>
+              <a:rPr sz="1400" b="0" i="0">
+                <a:solidFill>
+                  <a:srgbClr val="566577"/>
+                </a:solidFill>
+                <a:latin typeface="Segoe UI"/>
+              </a:rPr>
+              <a:t> (Packet Traffic Arbitration) em hardware; o lado BLE é o </a:t>
+            </a:r>
+            <a:r>
+              <a:rPr sz="1400" b="1" i="0">
+                <a:solidFill>
+                  <a:srgbClr val="0B1B2B"/>
+                </a:solidFill>
+                <a:latin typeface="Segoe UI"/>
+              </a:rPr>
+              <a:t>MPSL CX</a:t>
+            </a:r>
+            <a:r>
+              <a:rPr sz="1400" b="0" i="0">
+                <a:solidFill>
+                  <a:srgbClr val="566577"/>
+                </a:solidFill>
+                <a:latin typeface="Segoe UI"/>
+              </a:rPr>
+              <a:t> no nRF54LM20. Três linhas no header de expansão: BLE pede (REQ), diz se é TX ou RX (STATUS0), o PTA responde GRANT.</a:t>
+            </a:r>
+          </a:p>
+        </p:txBody>
+      </p:sp>
+      <p:pic>
+        <p:nvPicPr>
+          <p:cNvPr id="9" name="Picture 8" descr="wifi_coex_deck.png"/>
+          <p:cNvPicPr>
+            <a:picLocks noChangeAspect="1"/>
+          </p:cNvPicPr>
+          <p:nvPr/>
+        </p:nvPicPr>
+        <p:blipFill>
+          <a:blip r:embed="rId2"/>
+          <a:stretch>
+            <a:fillRect/>
+          </a:stretch>
+        </p:blipFill>
+        <p:spPr>
+          <a:xfrm>
+            <a:off x="1074530" y="1810512"/>
+            <a:ext cx="10042634" cy="4480560"/>
+          </a:xfrm>
+          <a:prstGeom prst="rect">
+            <a:avLst/>
+          </a:prstGeom>
+        </p:spPr>
+      </p:pic>
+    </p:spTree>
+  </p:cSld>
+  <p:clrMapOvr>
+    <a:masterClrMapping/>
+  </p:clrMapOvr>
+</p:sld>
+</file>
+
+<file path=ppt/slides/slide16.xml><?xml version="1.0" encoding="utf-8"?>
+<p:sld xmlns:a="http://schemas.openxmlformats.org/drawingml/2006/main" xmlns:p="http://schemas.openxmlformats.org/presentationml/2006/main" xmlns:r="http://schemas.openxmlformats.org/officeDocument/2006/relationships">
+  <p:cSld>
+    <p:spTree>
+      <p:nvGrpSpPr>
+        <p:cNvPr id="1" name=""/>
+        <p:cNvGrpSpPr/>
+        <p:nvPr/>
+      </p:nvGrpSpPr>
+      <p:grpSpPr/>
+      <p:sp>
+        <p:nvSpPr>
+          <p:cNvPr id="2" name="Rectangle 1"/>
+          <p:cNvSpPr/>
+          <p:nvPr/>
+        </p:nvSpPr>
+        <p:spPr>
+          <a:xfrm>
+            <a:off x="0" y="0"/>
+            <a:ext cx="12191695" cy="6858000"/>
+          </a:xfrm>
+          <a:prstGeom prst="rect">
+            <a:avLst/>
+          </a:prstGeom>
+          <a:solidFill>
+            <a:srgbClr val="FFFFFF"/>
+          </a:solidFill>
+          <a:ln>
+            <a:noFill/>
+          </a:ln>
+          <a:effectLst/>
+        </p:spPr>
+        <p:style>
+          <a:lnRef idx="1">
+            <a:schemeClr val="accent1"/>
+          </a:lnRef>
+          <a:fillRef idx="3">
+            <a:schemeClr val="accent1"/>
+          </a:fillRef>
+          <a:effectRef idx="2">
+            <a:schemeClr val="accent1"/>
+          </a:effectRef>
+          <a:fontRef idx="minor">
+            <a:schemeClr val="lt1"/>
+          </a:fontRef>
+        </p:style>
+        <p:txBody>
+          <a:bodyPr rtlCol="0" anchor="ctr"/>
+          <a:lstStyle/>
+          <a:p>
+            <a:pPr algn="ctr"/>
+          </a:p>
+        </p:txBody>
+      </p:sp>
+      <p:sp>
+        <p:nvSpPr>
+          <p:cNvPr id="3" name="TextBox 2"/>
+          <p:cNvSpPr txBox="1"/>
+          <p:nvPr/>
+        </p:nvSpPr>
+        <p:spPr>
+          <a:xfrm>
+            <a:off x="713232" y="274320"/>
+            <a:ext cx="10765231" cy="274320"/>
+          </a:xfrm>
+          <a:prstGeom prst="rect">
+            <a:avLst/>
+          </a:prstGeom>
+          <a:noFill/>
+        </p:spPr>
+        <p:txBody>
+          <a:bodyPr wrap="square" anchor="t" lIns="0" rIns="0" tIns="0" bIns="0">
+            <a:spAutoFit/>
+          </a:bodyPr>
+          <a:lstStyle/>
+          <a:p>
+            <a:pPr algn="l">
+              <a:lnSpc>
+                <a:spcPct val="100000"/>
+              </a:lnSpc>
+            </a:pPr>
+            <a:r>
+              <a:rPr sz="1200" b="1" i="0" spc="140">
+                <a:solidFill>
+                  <a:srgbClr val="0093D0"/>
+                </a:solidFill>
+                <a:latin typeface="Segoe UI"/>
+              </a:rPr>
+              <a:t>LAB 12 · COEXISTÊNCIA</a:t>
+            </a:r>
+          </a:p>
+        </p:txBody>
+      </p:sp>
+      <p:sp>
+        <p:nvSpPr>
+          <p:cNvPr id="4" name="TextBox 3"/>
+          <p:cNvSpPr txBox="1"/>
+          <p:nvPr/>
+        </p:nvSpPr>
+        <p:spPr>
+          <a:xfrm>
+            <a:off x="713232" y="585216"/>
+            <a:ext cx="10765231" cy="566928"/>
+          </a:xfrm>
+          <a:prstGeom prst="rect">
+            <a:avLst/>
+          </a:prstGeom>
+          <a:noFill/>
+        </p:spPr>
+        <p:txBody>
+          <a:bodyPr wrap="square" anchor="t" lIns="0" rIns="0" tIns="0" bIns="0">
+            <a:spAutoFit/>
+          </a:bodyPr>
+          <a:lstStyle/>
+          <a:p>
+            <a:pPr algn="l">
+              <a:lnSpc>
+                <a:spcPct val="100000"/>
+              </a:lnSpc>
+            </a:pPr>
+            <a:r>
+              <a:rPr sz="3200" b="1" i="0">
+                <a:solidFill>
+                  <a:srgbClr val="0B1B2B"/>
+                </a:solidFill>
+                <a:latin typeface="Segoe UI"/>
+              </a:rPr>
+              <a:t>O build de coexistência</a:t>
+            </a:r>
+          </a:p>
+        </p:txBody>
+      </p:sp>
+      <p:sp>
+        <p:nvSpPr>
+          <p:cNvPr id="5" name="Oval 4"/>
+          <p:cNvSpPr/>
+          <p:nvPr/>
+        </p:nvSpPr>
+        <p:spPr>
+          <a:xfrm>
+            <a:off x="713232" y="6492240"/>
+            <a:ext cx="82296" cy="82296"/>
+          </a:xfrm>
+          <a:prstGeom prst="ellipse">
+            <a:avLst/>
+          </a:prstGeom>
+          <a:solidFill>
+            <a:srgbClr val="22C3E6"/>
+          </a:solidFill>
+          <a:ln>
+            <a:noFill/>
+          </a:ln>
+          <a:effectLst/>
+        </p:spPr>
+        <p:style>
+          <a:lnRef idx="1">
+            <a:schemeClr val="accent1"/>
+          </a:lnRef>
+          <a:fillRef idx="3">
+            <a:schemeClr val="accent1"/>
+          </a:fillRef>
+          <a:effectRef idx="2">
+            <a:schemeClr val="accent1"/>
+          </a:effectRef>
+          <a:fontRef idx="minor">
+            <a:schemeClr val="lt1"/>
+          </a:fontRef>
+        </p:style>
+        <p:txBody>
+          <a:bodyPr rtlCol="0" anchor="ctr"/>
+          <a:lstStyle/>
+          <a:p>
+            <a:pPr algn="ctr"/>
+          </a:p>
+        </p:txBody>
+      </p:sp>
+      <p:sp>
+        <p:nvSpPr>
+          <p:cNvPr id="6" name="TextBox 5"/>
+          <p:cNvSpPr txBox="1"/>
+          <p:nvPr/>
+        </p:nvSpPr>
+        <p:spPr>
+          <a:xfrm>
+            <a:off x="877824" y="6400800"/>
+            <a:ext cx="8229600" cy="274320"/>
+          </a:xfrm>
+          <a:prstGeom prst="rect">
+            <a:avLst/>
+          </a:prstGeom>
+          <a:noFill/>
+        </p:spPr>
+        <p:txBody>
+          <a:bodyPr wrap="square" anchor="t" lIns="0" rIns="0" tIns="0" bIns="0">
+            <a:spAutoFit/>
+          </a:bodyPr>
+          <a:lstStyle/>
+          <a:p>
+            <a:pPr algn="l">
+              <a:lnSpc>
+                <a:spcPct val="100000"/>
+              </a:lnSpc>
+            </a:pPr>
+            <a:r>
+              <a:rPr sz="1000" b="1" i="0">
+                <a:solidFill>
+                  <a:srgbClr val="0B1B2B"/>
+                </a:solidFill>
+                <a:latin typeface="Segoe UI"/>
+              </a:rPr>
+              <a:t>M2</a:t>
+            </a:r>
+            <a:r>
+              <a:rPr sz="1000" b="0" i="0">
+                <a:solidFill>
+                  <a:srgbClr val="566577"/>
+                </a:solidFill>
+                <a:latin typeface="Segoe UI"/>
+              </a:rPr>
+              <a:t> · IA EMBARCADA &amp; CONECTIVIDADE</a:t>
+            </a:r>
+          </a:p>
+        </p:txBody>
+      </p:sp>
+      <p:sp>
+        <p:nvSpPr>
+          <p:cNvPr id="7" name="TextBox 6"/>
+          <p:cNvSpPr txBox="1"/>
+          <p:nvPr/>
+        </p:nvSpPr>
+        <p:spPr>
+          <a:xfrm>
+            <a:off x="10972800" y="6400800"/>
+            <a:ext cx="502920" cy="274320"/>
+          </a:xfrm>
+          <a:prstGeom prst="rect">
+            <a:avLst/>
+          </a:prstGeom>
+          <a:noFill/>
+        </p:spPr>
+        <p:txBody>
+          <a:bodyPr wrap="square" anchor="t" lIns="0" rIns="0" tIns="0" bIns="0">
+            <a:spAutoFit/>
+          </a:bodyPr>
+          <a:lstStyle/>
+          <a:p>
+            <a:pPr algn="r">
+              <a:lnSpc>
+                <a:spcPct val="100000"/>
+              </a:lnSpc>
+            </a:pPr>
+            <a:r>
+              <a:rPr sz="1000" b="0" i="0">
+                <a:solidFill>
+                  <a:srgbClr val="566577"/>
+                </a:solidFill>
+                <a:latin typeface="Segoe UI"/>
+              </a:rPr>
+              <a:t>16</a:t>
             </a:r>
           </a:p>
         </p:txBody>
@@ -10215,7 +10705,7 @@
 </p:sld>
 </file>
 
-<file path=ppt/slides/slide16.xml><?xml version="1.0" encoding="utf-8"?>
+<file path=ppt/slides/slide17.xml><?xml version="1.0" encoding="utf-8"?>
 <p:sld xmlns:a="http://schemas.openxmlformats.org/drawingml/2006/main" xmlns:p="http://schemas.openxmlformats.org/presentationml/2006/main" xmlns:r="http://schemas.openxmlformats.org/officeDocument/2006/relationships">
   <p:cSld>
     <p:spTree>
@@ -10473,7 +10963,7 @@
                 </a:solidFill>
                 <a:latin typeface="Segoe UI"/>
               </a:rPr>
-              <a:t>16</a:t>
+              <a:t>17</a:t>
             </a:r>
           </a:p>
         </p:txBody>
@@ -11083,7 +11573,7 @@
 </p:sld>
 </file>
 
-<file path=ppt/slides/slide17.xml><?xml version="1.0" encoding="utf-8"?>
+<file path=ppt/slides/slide18.xml><?xml version="1.0" encoding="utf-8"?>
 <p:sld xmlns:a="http://schemas.openxmlformats.org/drawingml/2006/main" xmlns:p="http://schemas.openxmlformats.org/presentationml/2006/main" xmlns:r="http://schemas.openxmlformats.org/officeDocument/2006/relationships">
   <p:cSld>
     <p:spTree>
@@ -11341,7 +11831,7 @@
                 </a:solidFill>
                 <a:latin typeface="Segoe UI"/>
               </a:rPr>
-              <a:t>17</a:t>
+              <a:t>18</a:t>
             </a:r>
           </a:p>
         </p:txBody>
@@ -12062,7 +12552,7 @@
 </p:sld>
 </file>
 
-<file path=ppt/slides/slide18.xml><?xml version="1.0" encoding="utf-8"?>
+<file path=ppt/slides/slide19.xml><?xml version="1.0" encoding="utf-8"?>
 <p:sld xmlns:a="http://schemas.openxmlformats.org/drawingml/2006/main" xmlns:p="http://schemas.openxmlformats.org/presentationml/2006/main" xmlns:r="http://schemas.openxmlformats.org/officeDocument/2006/relationships">
   <p:cSld>
     <p:spTree>
@@ -12411,1444 +12901,7 @@
                 </a:solidFill>
                 <a:latin typeface="Segoe UI"/>
               </a:rPr>
-              <a:t>18</a:t>
-            </a:r>
-          </a:p>
-        </p:txBody>
-      </p:sp>
-    </p:spTree>
-  </p:cSld>
-  <p:clrMapOvr>
-    <a:masterClrMapping/>
-  </p:clrMapOvr>
-</p:sld>
-</file>
-
-<file path=ppt/slides/slide19.xml><?xml version="1.0" encoding="utf-8"?>
-<p:sld xmlns:a="http://schemas.openxmlformats.org/drawingml/2006/main" xmlns:p="http://schemas.openxmlformats.org/presentationml/2006/main" xmlns:r="http://schemas.openxmlformats.org/officeDocument/2006/relationships">
-  <p:cSld>
-    <p:spTree>
-      <p:nvGrpSpPr>
-        <p:cNvPr id="1" name=""/>
-        <p:cNvGrpSpPr/>
-        <p:nvPr/>
-      </p:nvGrpSpPr>
-      <p:grpSpPr/>
-      <p:sp>
-        <p:nvSpPr>
-          <p:cNvPr id="2" name="Rectangle 1"/>
-          <p:cNvSpPr/>
-          <p:nvPr/>
-        </p:nvSpPr>
-        <p:spPr>
-          <a:xfrm>
-            <a:off x="0" y="0"/>
-            <a:ext cx="12191695" cy="6858000"/>
-          </a:xfrm>
-          <a:prstGeom prst="rect">
-            <a:avLst/>
-          </a:prstGeom>
-          <a:solidFill>
-            <a:srgbClr val="FFFFFF"/>
-          </a:solidFill>
-          <a:ln>
-            <a:noFill/>
-          </a:ln>
-          <a:effectLst/>
-        </p:spPr>
-        <p:style>
-          <a:lnRef idx="1">
-            <a:schemeClr val="accent1"/>
-          </a:lnRef>
-          <a:fillRef idx="3">
-            <a:schemeClr val="accent1"/>
-          </a:fillRef>
-          <a:effectRef idx="2">
-            <a:schemeClr val="accent1"/>
-          </a:effectRef>
-          <a:fontRef idx="minor">
-            <a:schemeClr val="lt1"/>
-          </a:fontRef>
-        </p:style>
-        <p:txBody>
-          <a:bodyPr rtlCol="0" anchor="ctr"/>
-          <a:lstStyle/>
-          <a:p>
-            <a:pPr algn="ctr"/>
-          </a:p>
-        </p:txBody>
-      </p:sp>
-      <p:sp>
-        <p:nvSpPr>
-          <p:cNvPr id="3" name="TextBox 2"/>
-          <p:cNvSpPr txBox="1"/>
-          <p:nvPr/>
-        </p:nvSpPr>
-        <p:spPr>
-          <a:xfrm>
-            <a:off x="713232" y="274320"/>
-            <a:ext cx="10765231" cy="274320"/>
-          </a:xfrm>
-          <a:prstGeom prst="rect">
-            <a:avLst/>
-          </a:prstGeom>
-          <a:noFill/>
-        </p:spPr>
-        <p:txBody>
-          <a:bodyPr wrap="square" anchor="t" lIns="0" rIns="0" tIns="0" bIns="0">
-            <a:spAutoFit/>
-          </a:bodyPr>
-          <a:lstStyle/>
-          <a:p>
-            <a:pPr algn="l">
-              <a:lnSpc>
-                <a:spcPct val="100000"/>
-              </a:lnSpc>
-            </a:pPr>
-            <a:r>
-              <a:rPr sz="1200" b="1" i="0" spc="140">
-                <a:solidFill>
-                  <a:srgbClr val="0093D0"/>
-                </a:solidFill>
-                <a:latin typeface="Segoe UI"/>
-              </a:rPr>
-              <a:t>LAB 13 · LOCATIONING</a:t>
-            </a:r>
-          </a:p>
-        </p:txBody>
-      </p:sp>
-      <p:sp>
-        <p:nvSpPr>
-          <p:cNvPr id="4" name="TextBox 3"/>
-          <p:cNvSpPr txBox="1"/>
-          <p:nvPr/>
-        </p:nvSpPr>
-        <p:spPr>
-          <a:xfrm>
-            <a:off x="713232" y="585216"/>
-            <a:ext cx="10765231" cy="566928"/>
-          </a:xfrm>
-          <a:prstGeom prst="rect">
-            <a:avLst/>
-          </a:prstGeom>
-          <a:noFill/>
-        </p:spPr>
-        <p:txBody>
-          <a:bodyPr wrap="square" anchor="t" lIns="0" rIns="0" tIns="0" bIns="0">
-            <a:spAutoFit/>
-          </a:bodyPr>
-          <a:lstStyle/>
-          <a:p>
-            <a:pPr algn="l">
-              <a:lnSpc>
-                <a:spcPct val="100000"/>
-              </a:lnSpc>
-            </a:pPr>
-            <a:r>
-              <a:rPr sz="3200" b="1" i="0">
-                <a:solidFill>
-                  <a:srgbClr val="0B1B2B"/>
-                </a:solidFill>
-                <a:latin typeface="Segoe UI"/>
-              </a:rPr>
-              <a:t>A posição não está no kit</a:t>
-            </a:r>
-          </a:p>
-        </p:txBody>
-      </p:sp>
-      <p:sp>
-        <p:nvSpPr>
-          <p:cNvPr id="5" name="Oval 4"/>
-          <p:cNvSpPr/>
-          <p:nvPr/>
-        </p:nvSpPr>
-        <p:spPr>
-          <a:xfrm>
-            <a:off x="713232" y="6492240"/>
-            <a:ext cx="82296" cy="82296"/>
-          </a:xfrm>
-          <a:prstGeom prst="ellipse">
-            <a:avLst/>
-          </a:prstGeom>
-          <a:solidFill>
-            <a:srgbClr val="22C3E6"/>
-          </a:solidFill>
-          <a:ln>
-            <a:noFill/>
-          </a:ln>
-          <a:effectLst/>
-        </p:spPr>
-        <p:style>
-          <a:lnRef idx="1">
-            <a:schemeClr val="accent1"/>
-          </a:lnRef>
-          <a:fillRef idx="3">
-            <a:schemeClr val="accent1"/>
-          </a:fillRef>
-          <a:effectRef idx="2">
-            <a:schemeClr val="accent1"/>
-          </a:effectRef>
-          <a:fontRef idx="minor">
-            <a:schemeClr val="lt1"/>
-          </a:fontRef>
-        </p:style>
-        <p:txBody>
-          <a:bodyPr rtlCol="0" anchor="ctr"/>
-          <a:lstStyle/>
-          <a:p>
-            <a:pPr algn="ctr"/>
-          </a:p>
-        </p:txBody>
-      </p:sp>
-      <p:sp>
-        <p:nvSpPr>
-          <p:cNvPr id="6" name="TextBox 5"/>
-          <p:cNvSpPr txBox="1"/>
-          <p:nvPr/>
-        </p:nvSpPr>
-        <p:spPr>
-          <a:xfrm>
-            <a:off x="877824" y="6400800"/>
-            <a:ext cx="8229600" cy="274320"/>
-          </a:xfrm>
-          <a:prstGeom prst="rect">
-            <a:avLst/>
-          </a:prstGeom>
-          <a:noFill/>
-        </p:spPr>
-        <p:txBody>
-          <a:bodyPr wrap="square" anchor="t" lIns="0" rIns="0" tIns="0" bIns="0">
-            <a:spAutoFit/>
-          </a:bodyPr>
-          <a:lstStyle/>
-          <a:p>
-            <a:pPr algn="l">
-              <a:lnSpc>
-                <a:spcPct val="100000"/>
-              </a:lnSpc>
-            </a:pPr>
-            <a:r>
-              <a:rPr sz="1000" b="1" i="0">
-                <a:solidFill>
-                  <a:srgbClr val="0B1B2B"/>
-                </a:solidFill>
-                <a:latin typeface="Segoe UI"/>
-              </a:rPr>
-              <a:t>M2</a:t>
-            </a:r>
-            <a:r>
-              <a:rPr sz="1000" b="0" i="0">
-                <a:solidFill>
-                  <a:srgbClr val="566577"/>
-                </a:solidFill>
-                <a:latin typeface="Segoe UI"/>
-              </a:rPr>
-              <a:t> · IA EMBARCADA &amp; CONECTIVIDADE</a:t>
-            </a:r>
-          </a:p>
-        </p:txBody>
-      </p:sp>
-      <p:sp>
-        <p:nvSpPr>
-          <p:cNvPr id="7" name="TextBox 6"/>
-          <p:cNvSpPr txBox="1"/>
-          <p:nvPr/>
-        </p:nvSpPr>
-        <p:spPr>
-          <a:xfrm>
-            <a:off x="10972800" y="6400800"/>
-            <a:ext cx="502920" cy="274320"/>
-          </a:xfrm>
-          <a:prstGeom prst="rect">
-            <a:avLst/>
-          </a:prstGeom>
-          <a:noFill/>
-        </p:spPr>
-        <p:txBody>
-          <a:bodyPr wrap="square" anchor="t" lIns="0" rIns="0" tIns="0" bIns="0">
-            <a:spAutoFit/>
-          </a:bodyPr>
-          <a:lstStyle/>
-          <a:p>
-            <a:pPr algn="r">
-              <a:lnSpc>
-                <a:spcPct val="100000"/>
-              </a:lnSpc>
-            </a:pPr>
-            <a:r>
-              <a:rPr sz="1000" b="0" i="0">
-                <a:solidFill>
-                  <a:srgbClr val="566577"/>
-                </a:solidFill>
-                <a:latin typeface="Segoe UI"/>
-              </a:rPr>
               <a:t>19</a:t>
-            </a:r>
-          </a:p>
-        </p:txBody>
-      </p:sp>
-      <p:sp>
-        <p:nvSpPr>
-          <p:cNvPr id="8" name="TextBox 7"/>
-          <p:cNvSpPr txBox="1"/>
-          <p:nvPr/>
-        </p:nvSpPr>
-        <p:spPr>
-          <a:xfrm>
-            <a:off x="713232" y="1225296"/>
-            <a:ext cx="10765231" cy="548640"/>
-          </a:xfrm>
-          <a:prstGeom prst="rect">
-            <a:avLst/>
-          </a:prstGeom>
-          <a:noFill/>
-        </p:spPr>
-        <p:txBody>
-          <a:bodyPr wrap="square" anchor="t" lIns="0" rIns="0" tIns="0" bIns="0">
-            <a:spAutoFit/>
-          </a:bodyPr>
-          <a:lstStyle/>
-          <a:p>
-            <a:pPr algn="l">
-              <a:lnSpc>
-                <a:spcPct val="125000"/>
-              </a:lnSpc>
-            </a:pPr>
-            <a:r>
-              <a:rPr sz="1400" b="0" i="0">
-                <a:solidFill>
-                  <a:srgbClr val="566577"/>
-                </a:solidFill>
-                <a:latin typeface="Segoe UI"/>
-              </a:rPr>
-              <a:t>O kit </a:t>
-            </a:r>
-            <a:r>
-              <a:rPr sz="1400" b="1" i="0">
-                <a:solidFill>
-                  <a:srgbClr val="0B1B2B"/>
-                </a:solidFill>
-                <a:latin typeface="Segoe UI"/>
-              </a:rPr>
-              <a:t>nunca sabe onde está</a:t>
-            </a:r>
-            <a:r>
-              <a:rPr sz="1400" b="0" i="0">
-                <a:solidFill>
-                  <a:srgbClr val="566577"/>
-                </a:solidFill>
-                <a:latin typeface="Segoe UI"/>
-              </a:rPr>
-              <a:t> — só enxerga os vizinhos. Quem resolve é o banco de dados de quem já percorreu o mundo registrando “este BSSID fica nesta coordenada”. É o “Localizar” de qualquer smartphone sem GPS, feito à mão para o mecanismo ficar visível.</a:t>
-            </a:r>
-          </a:p>
-        </p:txBody>
-      </p:sp>
-      <p:sp>
-        <p:nvSpPr>
-          <p:cNvPr id="9" name="Rounded Rectangle 8"/>
-          <p:cNvSpPr/>
-          <p:nvPr/>
-        </p:nvSpPr>
-        <p:spPr>
-          <a:xfrm>
-            <a:off x="713232" y="3250692"/>
-            <a:ext cx="1750710" cy="1417320"/>
-          </a:xfrm>
-          <a:prstGeom prst="roundRect">
-            <a:avLst>
-              <a:gd name="adj" fmla="val 7000"/>
-            </a:avLst>
-          </a:prstGeom>
-          <a:solidFill>
-            <a:srgbClr val="EDF3F8"/>
-          </a:solidFill>
-          <a:ln>
-            <a:noFill/>
-          </a:ln>
-          <a:effectLst/>
-        </p:spPr>
-        <p:style>
-          <a:lnRef idx="1">
-            <a:schemeClr val="accent1"/>
-          </a:lnRef>
-          <a:fillRef idx="3">
-            <a:schemeClr val="accent1"/>
-          </a:fillRef>
-          <a:effectRef idx="2">
-            <a:schemeClr val="accent1"/>
-          </a:effectRef>
-          <a:fontRef idx="minor">
-            <a:schemeClr val="lt1"/>
-          </a:fontRef>
-        </p:style>
-        <p:txBody>
-          <a:bodyPr rtlCol="0" anchor="ctr"/>
-          <a:lstStyle/>
-          <a:p>
-            <a:pPr algn="ctr"/>
-          </a:p>
-        </p:txBody>
-      </p:sp>
-      <p:sp>
-        <p:nvSpPr>
-          <p:cNvPr id="10" name="TextBox 9"/>
-          <p:cNvSpPr txBox="1"/>
-          <p:nvPr/>
-        </p:nvSpPr>
-        <p:spPr>
-          <a:xfrm>
-            <a:off x="850392" y="3451860"/>
-            <a:ext cx="1476390" cy="365760"/>
-          </a:xfrm>
-          <a:prstGeom prst="rect">
-            <a:avLst/>
-          </a:prstGeom>
-          <a:noFill/>
-        </p:spPr>
-        <p:txBody>
-          <a:bodyPr wrap="square" anchor="t" lIns="0" rIns="0" tIns="0" bIns="0">
-            <a:spAutoFit/>
-          </a:bodyPr>
-          <a:lstStyle/>
-          <a:p>
-            <a:pPr algn="ctr">
-              <a:lnSpc>
-                <a:spcPct val="100000"/>
-              </a:lnSpc>
-            </a:pPr>
-            <a:r>
-              <a:rPr sz="1400" b="1" i="0">
-                <a:solidFill>
-                  <a:srgbClr val="0B1B2B"/>
-                </a:solidFill>
-                <a:latin typeface="Segoe UI"/>
-              </a:rPr>
-              <a:t>DK varre</a:t>
-            </a:r>
-          </a:p>
-        </p:txBody>
-      </p:sp>
-      <p:sp>
-        <p:nvSpPr>
-          <p:cNvPr id="11" name="TextBox 10"/>
-          <p:cNvSpPr txBox="1"/>
-          <p:nvPr/>
-        </p:nvSpPr>
-        <p:spPr>
-          <a:xfrm>
-            <a:off x="850392" y="3872484"/>
-            <a:ext cx="1476390" cy="685800"/>
-          </a:xfrm>
-          <a:prstGeom prst="rect">
-            <a:avLst/>
-          </a:prstGeom>
-          <a:noFill/>
-        </p:spPr>
-        <p:txBody>
-          <a:bodyPr wrap="square" anchor="t" lIns="0" rIns="0" tIns="0" bIns="0">
-            <a:spAutoFit/>
-          </a:bodyPr>
-          <a:lstStyle/>
-          <a:p>
-            <a:pPr algn="ctr">
-              <a:lnSpc>
-                <a:spcPct val="110000"/>
-              </a:lnSpc>
-            </a:pPr>
-            <a:r>
-              <a:rPr sz="1100" b="0" i="0">
-                <a:solidFill>
-                  <a:srgbClr val="566577"/>
-                </a:solidFill>
-                <a:latin typeface="Consolas"/>
-              </a:rPr>
-              <a:t>net_mgmt</a:t>
-            </a:r>
-            <a:r>
-              <a:rPr sz="1100" b="0" i="0">
-                <a:solidFill>
-                  <a:srgbClr val="566577"/>
-                </a:solidFill>
-                <a:latin typeface="Segoe UI"/>
-              </a:rPr>
-              <a:t> SCAN;</a:t>
-            </a:r>
-          </a:p>
-          <a:p>
-            <a:pPr algn="ctr">
-              <a:lnSpc>
-                <a:spcPct val="110000"/>
-              </a:lnSpc>
-            </a:pPr>
-            <a:r>
-              <a:rPr sz="1100" b="0" i="0">
-                <a:solidFill>
-                  <a:srgbClr val="566577"/>
-                </a:solidFill>
-                <a:latin typeface="Segoe UI"/>
-              </a:rPr>
-              <a:t>acumula BSSID, RSSI,</a:t>
-            </a:r>
-          </a:p>
-          <a:p>
-            <a:pPr algn="ctr">
-              <a:lnSpc>
-                <a:spcPct val="110000"/>
-              </a:lnSpc>
-            </a:pPr>
-            <a:r>
-              <a:rPr sz="1100" b="0" i="0">
-                <a:solidFill>
-                  <a:srgbClr val="566577"/>
-                </a:solidFill>
-                <a:latin typeface="Segoe UI"/>
-              </a:rPr>
-              <a:t>frequência, SSID</a:t>
-            </a:r>
-          </a:p>
-        </p:txBody>
-      </p:sp>
-      <p:sp>
-        <p:nvSpPr>
-          <p:cNvPr id="12" name="Right Arrow 11"/>
-          <p:cNvSpPr/>
-          <p:nvPr/>
-        </p:nvSpPr>
-        <p:spPr>
-          <a:xfrm>
-            <a:off x="2537094" y="3886200"/>
-            <a:ext cx="356616" cy="146304"/>
-          </a:xfrm>
-          <a:prstGeom prst="rightArrow">
-            <a:avLst/>
-          </a:prstGeom>
-          <a:solidFill>
-            <a:srgbClr val="0093D0"/>
-          </a:solidFill>
-          <a:ln>
-            <a:noFill/>
-          </a:ln>
-          <a:effectLst/>
-        </p:spPr>
-        <p:style>
-          <a:lnRef idx="1">
-            <a:schemeClr val="accent1"/>
-          </a:lnRef>
-          <a:fillRef idx="3">
-            <a:schemeClr val="accent1"/>
-          </a:fillRef>
-          <a:effectRef idx="2">
-            <a:schemeClr val="accent1"/>
-          </a:effectRef>
-          <a:fontRef idx="minor">
-            <a:schemeClr val="lt1"/>
-          </a:fontRef>
-        </p:style>
-        <p:txBody>
-          <a:bodyPr rtlCol="0" anchor="ctr"/>
-          <a:lstStyle/>
-          <a:p>
-            <a:pPr algn="ctr"/>
-          </a:p>
-        </p:txBody>
-      </p:sp>
-      <p:sp>
-        <p:nvSpPr>
-          <p:cNvPr id="13" name="Rounded Rectangle 12"/>
-          <p:cNvSpPr/>
-          <p:nvPr/>
-        </p:nvSpPr>
-        <p:spPr>
-          <a:xfrm>
-            <a:off x="2966862" y="3250692"/>
-            <a:ext cx="1750710" cy="1417320"/>
-          </a:xfrm>
-          <a:prstGeom prst="roundRect">
-            <a:avLst>
-              <a:gd name="adj" fmla="val 7000"/>
-            </a:avLst>
-          </a:prstGeom>
-          <a:solidFill>
-            <a:srgbClr val="EDF3F8"/>
-          </a:solidFill>
-          <a:ln>
-            <a:noFill/>
-          </a:ln>
-          <a:effectLst/>
-        </p:spPr>
-        <p:style>
-          <a:lnRef idx="1">
-            <a:schemeClr val="accent1"/>
-          </a:lnRef>
-          <a:fillRef idx="3">
-            <a:schemeClr val="accent1"/>
-          </a:fillRef>
-          <a:effectRef idx="2">
-            <a:schemeClr val="accent1"/>
-          </a:effectRef>
-          <a:fontRef idx="minor">
-            <a:schemeClr val="lt1"/>
-          </a:fontRef>
-        </p:style>
-        <p:txBody>
-          <a:bodyPr rtlCol="0" anchor="ctr"/>
-          <a:lstStyle/>
-          <a:p>
-            <a:pPr algn="ctr"/>
-          </a:p>
-        </p:txBody>
-      </p:sp>
-      <p:sp>
-        <p:nvSpPr>
-          <p:cNvPr id="14" name="TextBox 13"/>
-          <p:cNvSpPr txBox="1"/>
-          <p:nvPr/>
-        </p:nvSpPr>
-        <p:spPr>
-          <a:xfrm>
-            <a:off x="3104022" y="3451860"/>
-            <a:ext cx="1476390" cy="365760"/>
-          </a:xfrm>
-          <a:prstGeom prst="rect">
-            <a:avLst/>
-          </a:prstGeom>
-          <a:noFill/>
-        </p:spPr>
-        <p:txBody>
-          <a:bodyPr wrap="square" anchor="t" lIns="0" rIns="0" tIns="0" bIns="0">
-            <a:spAutoFit/>
-          </a:bodyPr>
-          <a:lstStyle/>
-          <a:p>
-            <a:pPr algn="ctr">
-              <a:lnSpc>
-                <a:spcPct val="100000"/>
-              </a:lnSpc>
-            </a:pPr>
-            <a:r>
-              <a:rPr sz="1400" b="1" i="0">
-                <a:solidFill>
-                  <a:srgbClr val="0B1B2B"/>
-                </a:solidFill>
-                <a:latin typeface="Segoe UI"/>
-              </a:rPr>
-              <a:t>TCP para o PC</a:t>
-            </a:r>
-          </a:p>
-        </p:txBody>
-      </p:sp>
-      <p:sp>
-        <p:nvSpPr>
-          <p:cNvPr id="15" name="TextBox 14"/>
-          <p:cNvSpPr txBox="1"/>
-          <p:nvPr/>
-        </p:nvSpPr>
-        <p:spPr>
-          <a:xfrm>
-            <a:off x="3104022" y="3872484"/>
-            <a:ext cx="1476390" cy="685800"/>
-          </a:xfrm>
-          <a:prstGeom prst="rect">
-            <a:avLst/>
-          </a:prstGeom>
-          <a:noFill/>
-        </p:spPr>
-        <p:txBody>
-          <a:bodyPr wrap="square" anchor="t" lIns="0" rIns="0" tIns="0" bIns="0">
-            <a:spAutoFit/>
-          </a:bodyPr>
-          <a:lstStyle/>
-          <a:p>
-            <a:pPr algn="ctr">
-              <a:lnSpc>
-                <a:spcPct val="110000"/>
-              </a:lnSpc>
-            </a:pPr>
-            <a:r>
-              <a:rPr sz="1100" b="0" i="0">
-                <a:solidFill>
-                  <a:srgbClr val="566577"/>
-                </a:solidFill>
-                <a:latin typeface="Segoe UI"/>
-              </a:rPr>
-              <a:t>uma linha por AP:</a:t>
-            </a:r>
-          </a:p>
-          <a:p>
-            <a:pPr algn="ctr">
-              <a:lnSpc>
-                <a:spcPct val="110000"/>
-              </a:lnSpc>
-            </a:pPr>
-            <a:r>
-              <a:rPr sz="1100" b="0" i="0">
-                <a:solidFill>
-                  <a:srgbClr val="566577"/>
-                </a:solidFill>
-                <a:latin typeface="Consolas"/>
-              </a:rPr>
-              <a:t>AP,&lt;bssid&gt;,&lt;rssi&gt;,</a:t>
-            </a:r>
-          </a:p>
-          <a:p>
-            <a:pPr algn="ctr">
-              <a:lnSpc>
-                <a:spcPct val="110000"/>
-              </a:lnSpc>
-            </a:pPr>
-            <a:r>
-              <a:rPr sz="1100" b="0" i="0">
-                <a:solidFill>
-                  <a:srgbClr val="566577"/>
-                </a:solidFill>
-                <a:latin typeface="Consolas"/>
-              </a:rPr>
-              <a:t>&lt;freq&gt;,&lt;ssid&gt;</a:t>
-            </a:r>
-            <a:r>
-              <a:rPr sz="1100" b="0" i="0">
-                <a:solidFill>
-                  <a:srgbClr val="566577"/>
-                </a:solidFill>
-                <a:latin typeface="Segoe UI"/>
-              </a:rPr>
-              <a:t> + </a:t>
-            </a:r>
-            <a:r>
-              <a:rPr sz="1100" b="0" i="0">
-                <a:solidFill>
-                  <a:srgbClr val="566577"/>
-                </a:solidFill>
-                <a:latin typeface="Consolas"/>
-              </a:rPr>
-              <a:t>FIM</a:t>
-            </a:r>
-          </a:p>
-        </p:txBody>
-      </p:sp>
-      <p:sp>
-        <p:nvSpPr>
-          <p:cNvPr id="16" name="Right Arrow 15"/>
-          <p:cNvSpPr/>
-          <p:nvPr/>
-        </p:nvSpPr>
-        <p:spPr>
-          <a:xfrm>
-            <a:off x="4790724" y="3886200"/>
-            <a:ext cx="356616" cy="146304"/>
-          </a:xfrm>
-          <a:prstGeom prst="rightArrow">
-            <a:avLst/>
-          </a:prstGeom>
-          <a:solidFill>
-            <a:srgbClr val="0093D0"/>
-          </a:solidFill>
-          <a:ln>
-            <a:noFill/>
-          </a:ln>
-          <a:effectLst/>
-        </p:spPr>
-        <p:style>
-          <a:lnRef idx="1">
-            <a:schemeClr val="accent1"/>
-          </a:lnRef>
-          <a:fillRef idx="3">
-            <a:schemeClr val="accent1"/>
-          </a:fillRef>
-          <a:effectRef idx="2">
-            <a:schemeClr val="accent1"/>
-          </a:effectRef>
-          <a:fontRef idx="minor">
-            <a:schemeClr val="lt1"/>
-          </a:fontRef>
-        </p:style>
-        <p:txBody>
-          <a:bodyPr rtlCol="0" anchor="ctr"/>
-          <a:lstStyle/>
-          <a:p>
-            <a:pPr algn="ctr"/>
-          </a:p>
-        </p:txBody>
-      </p:sp>
-      <p:sp>
-        <p:nvSpPr>
-          <p:cNvPr id="17" name="Rounded Rectangle 16"/>
-          <p:cNvSpPr/>
-          <p:nvPr/>
-        </p:nvSpPr>
-        <p:spPr>
-          <a:xfrm>
-            <a:off x="5220492" y="3250692"/>
-            <a:ext cx="1750710" cy="1417320"/>
-          </a:xfrm>
-          <a:prstGeom prst="roundRect">
-            <a:avLst>
-              <a:gd name="adj" fmla="val 7000"/>
-            </a:avLst>
-          </a:prstGeom>
-          <a:solidFill>
-            <a:srgbClr val="00224E"/>
-          </a:solidFill>
-          <a:ln>
-            <a:noFill/>
-          </a:ln>
-          <a:effectLst/>
-        </p:spPr>
-        <p:style>
-          <a:lnRef idx="1">
-            <a:schemeClr val="accent1"/>
-          </a:lnRef>
-          <a:fillRef idx="3">
-            <a:schemeClr val="accent1"/>
-          </a:fillRef>
-          <a:effectRef idx="2">
-            <a:schemeClr val="accent1"/>
-          </a:effectRef>
-          <a:fontRef idx="minor">
-            <a:schemeClr val="lt1"/>
-          </a:fontRef>
-        </p:style>
-        <p:txBody>
-          <a:bodyPr rtlCol="0" anchor="ctr"/>
-          <a:lstStyle/>
-          <a:p>
-            <a:pPr algn="ctr"/>
-          </a:p>
-        </p:txBody>
-      </p:sp>
-      <p:sp>
-        <p:nvSpPr>
-          <p:cNvPr id="18" name="TextBox 17"/>
-          <p:cNvSpPr txBox="1"/>
-          <p:nvPr/>
-        </p:nvSpPr>
-        <p:spPr>
-          <a:xfrm>
-            <a:off x="5357652" y="3451860"/>
-            <a:ext cx="1476390" cy="365760"/>
-          </a:xfrm>
-          <a:prstGeom prst="rect">
-            <a:avLst/>
-          </a:prstGeom>
-          <a:noFill/>
-        </p:spPr>
-        <p:txBody>
-          <a:bodyPr wrap="square" anchor="t" lIns="0" rIns="0" tIns="0" bIns="0">
-            <a:spAutoFit/>
-          </a:bodyPr>
-          <a:lstStyle/>
-          <a:p>
-            <a:pPr algn="ctr">
-              <a:lnSpc>
-                <a:spcPct val="100000"/>
-              </a:lnSpc>
-            </a:pPr>
-            <a:r>
-              <a:rPr sz="1400" b="1" i="0">
-                <a:solidFill>
-                  <a:srgbClr val="E8F1F8"/>
-                </a:solidFill>
-                <a:latin typeface="Segoe UI"/>
-              </a:rPr>
-              <a:t>wifi_locate.py</a:t>
-            </a:r>
-          </a:p>
-        </p:txBody>
-      </p:sp>
-      <p:sp>
-        <p:nvSpPr>
-          <p:cNvPr id="19" name="TextBox 18"/>
-          <p:cNvSpPr txBox="1"/>
-          <p:nvPr/>
-        </p:nvSpPr>
-        <p:spPr>
-          <a:xfrm>
-            <a:off x="5357652" y="3872484"/>
-            <a:ext cx="1476390" cy="685800"/>
-          </a:xfrm>
-          <a:prstGeom prst="rect">
-            <a:avLst/>
-          </a:prstGeom>
-          <a:noFill/>
-        </p:spPr>
-        <p:txBody>
-          <a:bodyPr wrap="square" anchor="t" lIns="0" rIns="0" tIns="0" bIns="0">
-            <a:spAutoFit/>
-          </a:bodyPr>
-          <a:lstStyle/>
-          <a:p>
-            <a:pPr algn="ctr">
-              <a:lnSpc>
-                <a:spcPct val="110000"/>
-              </a:lnSpc>
-            </a:pPr>
-            <a:r>
-              <a:rPr sz="1100" b="0" i="0">
-                <a:solidFill>
-                  <a:srgbClr val="93A6B8"/>
-                </a:solidFill>
-                <a:latin typeface="Segoe UI"/>
-              </a:rPr>
-              <a:t>descarta MACs locais</a:t>
-            </a:r>
-          </a:p>
-          <a:p>
-            <a:pPr algn="ctr">
-              <a:lnSpc>
-                <a:spcPct val="110000"/>
-              </a:lnSpc>
-            </a:pPr>
-            <a:r>
-              <a:rPr sz="1100" b="0" i="0">
-                <a:solidFill>
-                  <a:srgbClr val="93A6B8"/>
-                </a:solidFill>
-                <a:latin typeface="Segoe UI"/>
-              </a:rPr>
-              <a:t>(bit 0x02) e exige</a:t>
-            </a:r>
-          </a:p>
-          <a:p>
-            <a:pPr algn="ctr">
-              <a:lnSpc>
-                <a:spcPct val="110000"/>
-              </a:lnSpc>
-            </a:pPr>
-            <a:r>
-              <a:rPr sz="1100" b="0" i="0">
-                <a:solidFill>
-                  <a:srgbClr val="93A6B8"/>
-                </a:solidFill>
-                <a:latin typeface="Segoe UI"/>
-              </a:rPr>
-              <a:t>≥ 2 APs válidos</a:t>
-            </a:r>
-          </a:p>
-        </p:txBody>
-      </p:sp>
-      <p:sp>
-        <p:nvSpPr>
-          <p:cNvPr id="20" name="Right Arrow 19"/>
-          <p:cNvSpPr/>
-          <p:nvPr/>
-        </p:nvSpPr>
-        <p:spPr>
-          <a:xfrm>
-            <a:off x="7044354" y="3886200"/>
-            <a:ext cx="356616" cy="146304"/>
-          </a:xfrm>
-          <a:prstGeom prst="rightArrow">
-            <a:avLst/>
-          </a:prstGeom>
-          <a:solidFill>
-            <a:srgbClr val="0093D0"/>
-          </a:solidFill>
-          <a:ln>
-            <a:noFill/>
-          </a:ln>
-          <a:effectLst/>
-        </p:spPr>
-        <p:style>
-          <a:lnRef idx="1">
-            <a:schemeClr val="accent1"/>
-          </a:lnRef>
-          <a:fillRef idx="3">
-            <a:schemeClr val="accent1"/>
-          </a:fillRef>
-          <a:effectRef idx="2">
-            <a:schemeClr val="accent1"/>
-          </a:effectRef>
-          <a:fontRef idx="minor">
-            <a:schemeClr val="lt1"/>
-          </a:fontRef>
-        </p:style>
-        <p:txBody>
-          <a:bodyPr rtlCol="0" anchor="ctr"/>
-          <a:lstStyle/>
-          <a:p>
-            <a:pPr algn="ctr"/>
-          </a:p>
-        </p:txBody>
-      </p:sp>
-      <p:sp>
-        <p:nvSpPr>
-          <p:cNvPr id="21" name="Rounded Rectangle 20"/>
-          <p:cNvSpPr/>
-          <p:nvPr/>
-        </p:nvSpPr>
-        <p:spPr>
-          <a:xfrm>
-            <a:off x="7474122" y="3250692"/>
-            <a:ext cx="1750710" cy="1417320"/>
-          </a:xfrm>
-          <a:prstGeom prst="roundRect">
-            <a:avLst>
-              <a:gd name="adj" fmla="val 7000"/>
-            </a:avLst>
-          </a:prstGeom>
-          <a:solidFill>
-            <a:srgbClr val="EDF3F8"/>
-          </a:solidFill>
-          <a:ln>
-            <a:noFill/>
-          </a:ln>
-          <a:effectLst/>
-        </p:spPr>
-        <p:style>
-          <a:lnRef idx="1">
-            <a:schemeClr val="accent1"/>
-          </a:lnRef>
-          <a:fillRef idx="3">
-            <a:schemeClr val="accent1"/>
-          </a:fillRef>
-          <a:effectRef idx="2">
-            <a:schemeClr val="accent1"/>
-          </a:effectRef>
-          <a:fontRef idx="minor">
-            <a:schemeClr val="lt1"/>
-          </a:fontRef>
-        </p:style>
-        <p:txBody>
-          <a:bodyPr rtlCol="0" anchor="ctr"/>
-          <a:lstStyle/>
-          <a:p>
-            <a:pPr algn="ctr"/>
-          </a:p>
-        </p:txBody>
-      </p:sp>
-      <p:sp>
-        <p:nvSpPr>
-          <p:cNvPr id="22" name="TextBox 21"/>
-          <p:cNvSpPr txBox="1"/>
-          <p:nvPr/>
-        </p:nvSpPr>
-        <p:spPr>
-          <a:xfrm>
-            <a:off x="7611282" y="3451860"/>
-            <a:ext cx="1476390" cy="365760"/>
-          </a:xfrm>
-          <a:prstGeom prst="rect">
-            <a:avLst/>
-          </a:prstGeom>
-          <a:noFill/>
-        </p:spPr>
-        <p:txBody>
-          <a:bodyPr wrap="square" anchor="t" lIns="0" rIns="0" tIns="0" bIns="0">
-            <a:spAutoFit/>
-          </a:bodyPr>
-          <a:lstStyle/>
-          <a:p>
-            <a:pPr algn="ctr">
-              <a:lnSpc>
-                <a:spcPct val="100000"/>
-              </a:lnSpc>
-            </a:pPr>
-            <a:r>
-              <a:rPr sz="1400" b="1" i="0">
-                <a:solidFill>
-                  <a:srgbClr val="0B1B2B"/>
-                </a:solidFill>
-                <a:latin typeface="Segoe UI"/>
-              </a:rPr>
-              <a:t>nRF Cloud</a:t>
-            </a:r>
-          </a:p>
-        </p:txBody>
-      </p:sp>
-      <p:sp>
-        <p:nvSpPr>
-          <p:cNvPr id="23" name="TextBox 22"/>
-          <p:cNvSpPr txBox="1"/>
-          <p:nvPr/>
-        </p:nvSpPr>
-        <p:spPr>
-          <a:xfrm>
-            <a:off x="7611282" y="3872484"/>
-            <a:ext cx="1476390" cy="685800"/>
-          </a:xfrm>
-          <a:prstGeom prst="rect">
-            <a:avLst/>
-          </a:prstGeom>
-          <a:noFill/>
-        </p:spPr>
-        <p:txBody>
-          <a:bodyPr wrap="square" anchor="t" lIns="0" rIns="0" tIns="0" bIns="0">
-            <a:spAutoFit/>
-          </a:bodyPr>
-          <a:lstStyle/>
-          <a:p>
-            <a:pPr algn="ctr">
-              <a:lnSpc>
-                <a:spcPct val="110000"/>
-              </a:lnSpc>
-            </a:pPr>
-            <a:r>
-              <a:rPr sz="1100" b="0" i="0">
-                <a:solidFill>
-                  <a:srgbClr val="566577"/>
-                </a:solidFill>
-                <a:latin typeface="Segoe UI"/>
-              </a:rPr>
-              <a:t>Location Services</a:t>
-            </a:r>
-          </a:p>
-          <a:p>
-            <a:pPr algn="ctr">
-              <a:lnSpc>
-                <a:spcPct val="110000"/>
-              </a:lnSpc>
-            </a:pPr>
-            <a:r>
-              <a:rPr sz="1100" b="0" i="0">
-                <a:solidFill>
-                  <a:srgbClr val="566577"/>
-                </a:solidFill>
-                <a:latin typeface="Segoe UI"/>
-              </a:rPr>
-              <a:t>HTTPS + OAT</a:t>
-            </a:r>
-          </a:p>
-          <a:p>
-            <a:pPr algn="ctr">
-              <a:lnSpc>
-                <a:spcPct val="110000"/>
-              </a:lnSpc>
-            </a:pPr>
-            <a:r>
-              <a:rPr sz="1100" b="0" i="0">
-                <a:solidFill>
-                  <a:srgbClr val="566577"/>
-                </a:solidFill>
-                <a:latin typeface="Segoe UI"/>
-              </a:rPr>
-              <a:t>banco de quem mapeou</a:t>
-            </a:r>
-          </a:p>
-        </p:txBody>
-      </p:sp>
-      <p:sp>
-        <p:nvSpPr>
-          <p:cNvPr id="24" name="Right Arrow 23"/>
-          <p:cNvSpPr/>
-          <p:nvPr/>
-        </p:nvSpPr>
-        <p:spPr>
-          <a:xfrm>
-            <a:off x="9297984" y="3886200"/>
-            <a:ext cx="356616" cy="146304"/>
-          </a:xfrm>
-          <a:prstGeom prst="rightArrow">
-            <a:avLst/>
-          </a:prstGeom>
-          <a:solidFill>
-            <a:srgbClr val="0093D0"/>
-          </a:solidFill>
-          <a:ln>
-            <a:noFill/>
-          </a:ln>
-          <a:effectLst/>
-        </p:spPr>
-        <p:style>
-          <a:lnRef idx="1">
-            <a:schemeClr val="accent1"/>
-          </a:lnRef>
-          <a:fillRef idx="3">
-            <a:schemeClr val="accent1"/>
-          </a:fillRef>
-          <a:effectRef idx="2">
-            <a:schemeClr val="accent1"/>
-          </a:effectRef>
-          <a:fontRef idx="minor">
-            <a:schemeClr val="lt1"/>
-          </a:fontRef>
-        </p:style>
-        <p:txBody>
-          <a:bodyPr rtlCol="0" anchor="ctr"/>
-          <a:lstStyle/>
-          <a:p>
-            <a:pPr algn="ctr"/>
-          </a:p>
-        </p:txBody>
-      </p:sp>
-      <p:sp>
-        <p:nvSpPr>
-          <p:cNvPr id="25" name="Rounded Rectangle 24"/>
-          <p:cNvSpPr/>
-          <p:nvPr/>
-        </p:nvSpPr>
-        <p:spPr>
-          <a:xfrm>
-            <a:off x="9727752" y="3250692"/>
-            <a:ext cx="1750710" cy="1417320"/>
-          </a:xfrm>
-          <a:prstGeom prst="roundRect">
-            <a:avLst>
-              <a:gd name="adj" fmla="val 7000"/>
-            </a:avLst>
-          </a:prstGeom>
-          <a:solidFill>
-            <a:srgbClr val="EDF3F8"/>
-          </a:solidFill>
-          <a:ln>
-            <a:noFill/>
-          </a:ln>
-          <a:effectLst/>
-        </p:spPr>
-        <p:style>
-          <a:lnRef idx="1">
-            <a:schemeClr val="accent1"/>
-          </a:lnRef>
-          <a:fillRef idx="3">
-            <a:schemeClr val="accent1"/>
-          </a:fillRef>
-          <a:effectRef idx="2">
-            <a:schemeClr val="accent1"/>
-          </a:effectRef>
-          <a:fontRef idx="minor">
-            <a:schemeClr val="lt1"/>
-          </a:fontRef>
-        </p:style>
-        <p:txBody>
-          <a:bodyPr rtlCol="0" anchor="ctr"/>
-          <a:lstStyle/>
-          <a:p>
-            <a:pPr algn="ctr"/>
-          </a:p>
-        </p:txBody>
-      </p:sp>
-      <p:sp>
-        <p:nvSpPr>
-          <p:cNvPr id="26" name="TextBox 25"/>
-          <p:cNvSpPr txBox="1"/>
-          <p:nvPr/>
-        </p:nvSpPr>
-        <p:spPr>
-          <a:xfrm>
-            <a:off x="9864912" y="3451860"/>
-            <a:ext cx="1476390" cy="365760"/>
-          </a:xfrm>
-          <a:prstGeom prst="rect">
-            <a:avLst/>
-          </a:prstGeom>
-          <a:noFill/>
-        </p:spPr>
-        <p:txBody>
-          <a:bodyPr wrap="square" anchor="t" lIns="0" rIns="0" tIns="0" bIns="0">
-            <a:spAutoFit/>
-          </a:bodyPr>
-          <a:lstStyle/>
-          <a:p>
-            <a:pPr algn="ctr">
-              <a:lnSpc>
-                <a:spcPct val="100000"/>
-              </a:lnSpc>
-            </a:pPr>
-            <a:r>
-              <a:rPr sz="1400" b="1" i="0">
-                <a:solidFill>
-                  <a:srgbClr val="0B1B2B"/>
-                </a:solidFill>
-                <a:latin typeface="Segoe UI"/>
-              </a:rPr>
-              <a:t>lat · lon · raio</a:t>
-            </a:r>
-          </a:p>
-        </p:txBody>
-      </p:sp>
-      <p:sp>
-        <p:nvSpPr>
-          <p:cNvPr id="27" name="TextBox 26"/>
-          <p:cNvSpPr txBox="1"/>
-          <p:nvPr/>
-        </p:nvSpPr>
-        <p:spPr>
-          <a:xfrm>
-            <a:off x="9864912" y="3872484"/>
-            <a:ext cx="1476390" cy="685800"/>
-          </a:xfrm>
-          <a:prstGeom prst="rect">
-            <a:avLst/>
-          </a:prstGeom>
-          <a:noFill/>
-        </p:spPr>
-        <p:txBody>
-          <a:bodyPr wrap="square" anchor="t" lIns="0" rIns="0" tIns="0" bIns="0">
-            <a:spAutoFit/>
-          </a:bodyPr>
-          <a:lstStyle/>
-          <a:p>
-            <a:pPr algn="ctr">
-              <a:lnSpc>
-                <a:spcPct val="110000"/>
-              </a:lnSpc>
-            </a:pPr>
-            <a:r>
-              <a:rPr sz="1100" b="0" i="0">
-                <a:solidFill>
-                  <a:srgbClr val="566577"/>
-                </a:solidFill>
-                <a:latin typeface="Segoe UI"/>
-              </a:rPr>
-              <a:t>a coordenada e a</a:t>
-            </a:r>
-          </a:p>
-          <a:p>
-            <a:pPr algn="ctr">
-              <a:lnSpc>
-                <a:spcPct val="110000"/>
-              </a:lnSpc>
-            </a:pPr>
-            <a:r>
-              <a:rPr sz="1100" b="0" i="0">
-                <a:solidFill>
-                  <a:srgbClr val="566577"/>
-                </a:solidFill>
-                <a:latin typeface="Segoe UI"/>
-              </a:rPr>
-              <a:t>incerteza em metros:</a:t>
-            </a:r>
-          </a:p>
-          <a:p>
-            <a:pPr algn="ctr">
-              <a:lnSpc>
-                <a:spcPct val="110000"/>
-              </a:lnSpc>
-            </a:pPr>
-            <a:r>
-              <a:rPr sz="1100" b="1" i="0">
-                <a:solidFill>
-                  <a:srgbClr val="566577"/>
-                </a:solidFill>
-                <a:latin typeface="Segoe UI"/>
-              </a:rPr>
-              <a:t>13,4 m</a:t>
-            </a:r>
-            <a:r>
-              <a:rPr sz="1100" b="0" i="0">
-                <a:solidFill>
-                  <a:srgbClr val="566577"/>
-                </a:solidFill>
-                <a:latin typeface="Segoe UI"/>
-              </a:rPr>
-              <a:t> na bancada</a:t>
-            </a:r>
-          </a:p>
-        </p:txBody>
-      </p:sp>
-      <p:sp>
-        <p:nvSpPr>
-          <p:cNvPr id="28" name="TextBox 27"/>
-          <p:cNvSpPr txBox="1"/>
-          <p:nvPr/>
-        </p:nvSpPr>
-        <p:spPr>
-          <a:xfrm>
-            <a:off x="4150644" y="2939796"/>
-            <a:ext cx="1636776" cy="274320"/>
-          </a:xfrm>
-          <a:prstGeom prst="rect">
-            <a:avLst/>
-          </a:prstGeom>
-          <a:noFill/>
-        </p:spPr>
-        <p:txBody>
-          <a:bodyPr wrap="square" anchor="t" lIns="0" rIns="0" tIns="0" bIns="0">
-            <a:spAutoFit/>
-          </a:bodyPr>
-          <a:lstStyle/>
-          <a:p>
-            <a:pPr algn="ctr">
-              <a:lnSpc>
-                <a:spcPct val="100000"/>
-              </a:lnSpc>
-            </a:pPr>
-            <a:r>
-              <a:rPr sz="1000" b="1" i="0">
-                <a:solidFill>
-                  <a:srgbClr val="0093D0"/>
-                </a:solidFill>
-                <a:latin typeface="Segoe UI"/>
-              </a:rPr>
-              <a:t>sw0 = nova varredura</a:t>
-            </a:r>
-          </a:p>
-        </p:txBody>
-      </p:sp>
-      <p:sp>
-        <p:nvSpPr>
-          <p:cNvPr id="29" name="TextBox 28"/>
-          <p:cNvSpPr txBox="1"/>
-          <p:nvPr/>
-        </p:nvSpPr>
-        <p:spPr>
-          <a:xfrm>
-            <a:off x="6404274" y="2939796"/>
-            <a:ext cx="1636776" cy="274320"/>
-          </a:xfrm>
-          <a:prstGeom prst="rect">
-            <a:avLst/>
-          </a:prstGeom>
-          <a:noFill/>
-        </p:spPr>
-        <p:txBody>
-          <a:bodyPr wrap="square" anchor="t" lIns="0" rIns="0" tIns="0" bIns="0">
-            <a:spAutoFit/>
-          </a:bodyPr>
-          <a:lstStyle/>
-          <a:p>
-            <a:pPr algn="ctr">
-              <a:lnSpc>
-                <a:spcPct val="100000"/>
-              </a:lnSpc>
-            </a:pPr>
-            <a:r>
-              <a:rPr sz="1000" b="1" i="0">
-                <a:solidFill>
-                  <a:srgbClr val="0093D0"/>
-                </a:solidFill>
-                <a:latin typeface="Segoe UI"/>
-              </a:rPr>
-              <a:t>internet só aqui</a:t>
-            </a:r>
-          </a:p>
-        </p:txBody>
-      </p:sp>
-      <p:sp>
-        <p:nvSpPr>
-          <p:cNvPr id="30" name="TextBox 29"/>
-          <p:cNvSpPr txBox="1"/>
-          <p:nvPr/>
-        </p:nvSpPr>
-        <p:spPr>
-          <a:xfrm>
-            <a:off x="713232" y="4896612"/>
-            <a:ext cx="10765231" cy="274320"/>
-          </a:xfrm>
-          <a:prstGeom prst="rect">
-            <a:avLst/>
-          </a:prstGeom>
-          <a:noFill/>
-        </p:spPr>
-        <p:txBody>
-          <a:bodyPr wrap="square" anchor="t" lIns="0" rIns="0" tIns="0" bIns="0">
-            <a:spAutoFit/>
-          </a:bodyPr>
-          <a:lstStyle/>
-          <a:p>
-            <a:pPr algn="ctr">
-              <a:lnSpc>
-                <a:spcPct val="100000"/>
-              </a:lnSpc>
-            </a:pPr>
-            <a:r>
-              <a:rPr sz="1200" b="0" i="1">
-                <a:solidFill>
-                  <a:srgbClr val="566577"/>
-                </a:solidFill>
-                <a:latin typeface="Segoe UI"/>
-              </a:rPr>
-              <a:t>Código do curso, reaproveitando o cliente TCP do lab 9. Sem TF-M, sem onboarding: o kit só precisa da rede da sala; a chave nunca sobe para o firmware.</a:t>
             </a:r>
           </a:p>
         </p:txBody>
@@ -14079,7 +13132,7 @@
                 </a:solidFill>
                 <a:latin typeface="Segoe UI"/>
               </a:rPr>
-              <a:t>Economia não é “antigo × moderno”: é uma escada de três degraus, cada um com um dono do intervalo de dormida. Parte A mede os degraus 1 e 2 em qualquer rede; Parte B (TWT) depende do AP.</a:t>
+              <a:t>Economia não é “antigo × moderno”: é uma escada de três degraus, cada um com um dono do intervalo de dormida. Parte A mede os degraus 1 e 2 em qualquer rede; Parte B (TWT) negocia com o AP da sala.</a:t>
             </a:r>
           </a:p>
         </p:txBody>
@@ -14350,7 +13403,7 @@
                 </a:solidFill>
                 <a:latin typeface="Segoe UI"/>
               </a:rPr>
-              <a:t>O ciclo completo, medido</a:t>
+              <a:t>A posição não está no kit</a:t>
             </a:r>
           </a:p>
         </p:txBody>
@@ -14520,7 +13573,7 @@
                 </a:solidFill>
                 <a:latin typeface="Segoe UI"/>
               </a:rPr>
-              <a:t>O aluno vê </a:t>
+              <a:t>O kit </a:t>
             </a:r>
             <a:r>
               <a:rPr sz="1400" b="1" i="0">
@@ -14529,7 +13582,7 @@
                 </a:solidFill>
                 <a:latin typeface="Segoe UI"/>
               </a:rPr>
-              <a:t>as duas metades</a:t>
+              <a:t>nunca sabe onde está</a:t>
             </a:r>
             <a:r>
               <a:rPr sz="1400" b="0" i="0">
@@ -14538,7 +13591,7 @@
                 </a:solidFill>
                 <a:latin typeface="Segoe UI"/>
               </a:rPr>
-              <a:t>: a lista de APs que o kit enxergou (21 na tela do kit) e a coordenada que saiu dela (16 na do PC). A pergunta “por que sumiram cinco” tem resposta técnica, não é bug.</a:t>
+              <a:t> — só enxerga os vizinhos. Quem resolve é o banco de dados de quem já percorreu o mundo registrando “este BSSID fica nesta coordenada”. É o “Localizar” de qualquer smartphone sem GPS, feito à mão para o mecanismo ficar visível.</a:t>
             </a:r>
           </a:p>
         </p:txBody>
@@ -14551,8 +13604,8 @@
         </p:nvSpPr>
         <p:spPr>
           <a:xfrm>
-            <a:off x="713232" y="2839212"/>
-            <a:ext cx="2519857" cy="2468880"/>
+            <a:off x="713232" y="3250692"/>
+            <a:ext cx="1750710" cy="1417320"/>
           </a:xfrm>
           <a:prstGeom prst="roundRect">
             <a:avLst>
@@ -14597,8 +13650,8 @@
         </p:nvSpPr>
         <p:spPr>
           <a:xfrm>
-            <a:off x="804672" y="3095244"/>
-            <a:ext cx="2336977" cy="640080"/>
+            <a:off x="850392" y="3451860"/>
+            <a:ext cx="1476390" cy="365760"/>
           </a:xfrm>
           <a:prstGeom prst="rect">
             <a:avLst/>
@@ -14617,13 +13670,13 @@
               </a:lnSpc>
             </a:pPr>
             <a:r>
-              <a:rPr sz="3000" b="1" i="0">
-                <a:solidFill>
-                  <a:srgbClr val="0093D0"/>
-                </a:solidFill>
-                <a:latin typeface="Consolas"/>
-              </a:rPr>
-              <a:t>15 s</a:t>
+              <a:rPr sz="1400" b="1" i="0">
+                <a:solidFill>
+                  <a:srgbClr val="0B1B2B"/>
+                </a:solidFill>
+                <a:latin typeface="Segoe UI"/>
+              </a:rPr>
+              <a:t>DK varre</a:t>
             </a:r>
           </a:p>
         </p:txBody>
@@ -14636,86 +13689,8 @@
         </p:nvSpPr>
         <p:spPr>
           <a:xfrm>
-            <a:off x="713232" y="3735324"/>
-            <a:ext cx="2519857" cy="274320"/>
-          </a:xfrm>
-          <a:prstGeom prst="rect">
-            <a:avLst/>
-          </a:prstGeom>
-          <a:noFill/>
-        </p:spPr>
-        <p:txBody>
-          <a:bodyPr wrap="square" anchor="t" lIns="0" rIns="0" tIns="0" bIns="0">
-            <a:spAutoFit/>
-          </a:bodyPr>
-          <a:lstStyle/>
-          <a:p>
-            <a:pPr algn="ctr">
-              <a:lnSpc>
-                <a:spcPct val="100000"/>
-              </a:lnSpc>
-            </a:pPr>
-            <a:r>
-              <a:rPr sz="1300" b="0" i="0">
-                <a:solidFill>
-                  <a:srgbClr val="566577"/>
-                </a:solidFill>
-                <a:latin typeface="Consolas"/>
-              </a:rPr>
-              <a:t>reset → coordenada</a:t>
-            </a:r>
-          </a:p>
-        </p:txBody>
-      </p:sp>
-      <p:sp>
-        <p:nvSpPr>
-          <p:cNvPr id="12" name="TextBox 11"/>
-          <p:cNvSpPr txBox="1"/>
-          <p:nvPr/>
-        </p:nvSpPr>
-        <p:spPr>
-          <a:xfrm>
-            <a:off x="850392" y="4119372"/>
-            <a:ext cx="2245537" cy="320040"/>
-          </a:xfrm>
-          <a:prstGeom prst="rect">
-            <a:avLst/>
-          </a:prstGeom>
-          <a:noFill/>
-        </p:spPr>
-        <p:txBody>
-          <a:bodyPr wrap="square" anchor="t" lIns="0" rIns="0" tIns="0" bIns="0">
-            <a:spAutoFit/>
-          </a:bodyPr>
-          <a:lstStyle/>
-          <a:p>
-            <a:pPr algn="ctr">
-              <a:lnSpc>
-                <a:spcPct val="100000"/>
-              </a:lnSpc>
-            </a:pPr>
-            <a:r>
-              <a:rPr sz="1400" b="1" i="0">
-                <a:solidFill>
-                  <a:srgbClr val="0B1B2B"/>
-                </a:solidFill>
-                <a:latin typeface="Segoe UI"/>
-              </a:rPr>
-              <a:t>tempo de máquina</a:t>
-            </a:r>
-          </a:p>
-        </p:txBody>
-      </p:sp>
-      <p:sp>
-        <p:nvSpPr>
-          <p:cNvPr id="13" name="TextBox 12"/>
-          <p:cNvSpPr txBox="1"/>
-          <p:nvPr/>
-        </p:nvSpPr>
-        <p:spPr>
-          <a:xfrm>
-            <a:off x="877824" y="4466844"/>
-            <a:ext cx="2190673" cy="749808"/>
+            <a:off x="850392" y="3872484"/>
+            <a:ext cx="1476390" cy="685800"/>
           </a:xfrm>
           <a:prstGeom prst="rect">
             <a:avLst/>
@@ -14738,23 +13713,108 @@
                 <a:solidFill>
                   <a:srgbClr val="566577"/>
                 </a:solidFill>
-                <a:latin typeface="Segoe UI"/>
-              </a:rPr>
-              <a:t>dos quais ~5,5 s são a varredura. Não é duração de aula: é o intervalo entre ligar o kit e a ferramenta responder</a:t>
-            </a:r>
-          </a:p>
-        </p:txBody>
-      </p:sp>
-      <p:sp>
-        <p:nvSpPr>
-          <p:cNvPr id="14" name="Rounded Rectangle 13"/>
+                <a:latin typeface="Consolas"/>
+              </a:rPr>
+              <a:t>net_mgmt</a:t>
+            </a:r>
+            <a:r>
+              <a:rPr sz="1100" b="0" i="0">
+                <a:solidFill>
+                  <a:srgbClr val="566577"/>
+                </a:solidFill>
+                <a:latin typeface="Segoe UI"/>
+              </a:rPr>
+              <a:t> SCAN;</a:t>
+            </a:r>
+          </a:p>
+          <a:p>
+            <a:pPr algn="ctr">
+              <a:lnSpc>
+                <a:spcPct val="110000"/>
+              </a:lnSpc>
+            </a:pPr>
+            <a:r>
+              <a:rPr sz="1100" b="0" i="0">
+                <a:solidFill>
+                  <a:srgbClr val="566577"/>
+                </a:solidFill>
+                <a:latin typeface="Segoe UI"/>
+              </a:rPr>
+              <a:t>acumula BSSID, RSSI,</a:t>
+            </a:r>
+          </a:p>
+          <a:p>
+            <a:pPr algn="ctr">
+              <a:lnSpc>
+                <a:spcPct val="110000"/>
+              </a:lnSpc>
+            </a:pPr>
+            <a:r>
+              <a:rPr sz="1100" b="0" i="0">
+                <a:solidFill>
+                  <a:srgbClr val="566577"/>
+                </a:solidFill>
+                <a:latin typeface="Segoe UI"/>
+              </a:rPr>
+              <a:t>frequência, SSID</a:t>
+            </a:r>
+          </a:p>
+        </p:txBody>
+      </p:sp>
+      <p:sp>
+        <p:nvSpPr>
+          <p:cNvPr id="12" name="Right Arrow 11"/>
           <p:cNvSpPr/>
           <p:nvPr/>
         </p:nvSpPr>
         <p:spPr>
           <a:xfrm>
-            <a:off x="3461689" y="2839212"/>
-            <a:ext cx="2519857" cy="2468880"/>
+            <a:off x="2537094" y="3886200"/>
+            <a:ext cx="356616" cy="146304"/>
+          </a:xfrm>
+          <a:prstGeom prst="rightArrow">
+            <a:avLst/>
+          </a:prstGeom>
+          <a:solidFill>
+            <a:srgbClr val="0093D0"/>
+          </a:solidFill>
+          <a:ln>
+            <a:noFill/>
+          </a:ln>
+          <a:effectLst/>
+        </p:spPr>
+        <p:style>
+          <a:lnRef idx="1">
+            <a:schemeClr val="accent1"/>
+          </a:lnRef>
+          <a:fillRef idx="3">
+            <a:schemeClr val="accent1"/>
+          </a:fillRef>
+          <a:effectRef idx="2">
+            <a:schemeClr val="accent1"/>
+          </a:effectRef>
+          <a:fontRef idx="minor">
+            <a:schemeClr val="lt1"/>
+          </a:fontRef>
+        </p:style>
+        <p:txBody>
+          <a:bodyPr rtlCol="0" anchor="ctr"/>
+          <a:lstStyle/>
+          <a:p>
+            <a:pPr algn="ctr"/>
+          </a:p>
+        </p:txBody>
+      </p:sp>
+      <p:sp>
+        <p:nvSpPr>
+          <p:cNvPr id="13" name="Rounded Rectangle 12"/>
+          <p:cNvSpPr/>
+          <p:nvPr/>
+        </p:nvSpPr>
+        <p:spPr>
+          <a:xfrm>
+            <a:off x="2966862" y="3250692"/>
+            <a:ext cx="1750710" cy="1417320"/>
           </a:xfrm>
           <a:prstGeom prst="roundRect">
             <a:avLst>
@@ -14793,14 +13853,14 @@
       </p:sp>
       <p:sp>
         <p:nvSpPr>
-          <p:cNvPr id="15" name="TextBox 14"/>
+          <p:cNvPr id="14" name="TextBox 13"/>
           <p:cNvSpPr txBox="1"/>
           <p:nvPr/>
         </p:nvSpPr>
         <p:spPr>
           <a:xfrm>
-            <a:off x="3553129" y="3095244"/>
-            <a:ext cx="2336977" cy="640080"/>
+            <a:off x="3104022" y="3451860"/>
+            <a:ext cx="1476390" cy="365760"/>
           </a:xfrm>
           <a:prstGeom prst="rect">
             <a:avLst/>
@@ -14819,27 +13879,206 @@
               </a:lnSpc>
             </a:pPr>
             <a:r>
-              <a:rPr sz="3000" b="1" i="0">
-                <a:solidFill>
-                  <a:srgbClr val="0093D0"/>
+              <a:rPr sz="1400" b="1" i="0">
+                <a:solidFill>
+                  <a:srgbClr val="0B1B2B"/>
+                </a:solidFill>
+                <a:latin typeface="Segoe UI"/>
+              </a:rPr>
+              <a:t>TCP para o PC</a:t>
+            </a:r>
+          </a:p>
+        </p:txBody>
+      </p:sp>
+      <p:sp>
+        <p:nvSpPr>
+          <p:cNvPr id="15" name="TextBox 14"/>
+          <p:cNvSpPr txBox="1"/>
+          <p:nvPr/>
+        </p:nvSpPr>
+        <p:spPr>
+          <a:xfrm>
+            <a:off x="3104022" y="3872484"/>
+            <a:ext cx="1476390" cy="685800"/>
+          </a:xfrm>
+          <a:prstGeom prst="rect">
+            <a:avLst/>
+          </a:prstGeom>
+          <a:noFill/>
+        </p:spPr>
+        <p:txBody>
+          <a:bodyPr wrap="square" anchor="t" lIns="0" rIns="0" tIns="0" bIns="0">
+            <a:spAutoFit/>
+          </a:bodyPr>
+          <a:lstStyle/>
+          <a:p>
+            <a:pPr algn="ctr">
+              <a:lnSpc>
+                <a:spcPct val="110000"/>
+              </a:lnSpc>
+            </a:pPr>
+            <a:r>
+              <a:rPr sz="1100" b="0" i="0">
+                <a:solidFill>
+                  <a:srgbClr val="566577"/>
+                </a:solidFill>
+                <a:latin typeface="Segoe UI"/>
+              </a:rPr>
+              <a:t>uma linha por AP:</a:t>
+            </a:r>
+          </a:p>
+          <a:p>
+            <a:pPr algn="ctr">
+              <a:lnSpc>
+                <a:spcPct val="110000"/>
+              </a:lnSpc>
+            </a:pPr>
+            <a:r>
+              <a:rPr sz="1100" b="0" i="0">
+                <a:solidFill>
+                  <a:srgbClr val="566577"/>
                 </a:solidFill>
                 <a:latin typeface="Consolas"/>
               </a:rPr>
-              <a:t>21 → 16</a:t>
-            </a:r>
-          </a:p>
-        </p:txBody>
-      </p:sp>
-      <p:sp>
-        <p:nvSpPr>
-          <p:cNvPr id="16" name="TextBox 15"/>
+              <a:t>AP,&lt;bssid&gt;,&lt;rssi&gt;,</a:t>
+            </a:r>
+          </a:p>
+          <a:p>
+            <a:pPr algn="ctr">
+              <a:lnSpc>
+                <a:spcPct val="110000"/>
+              </a:lnSpc>
+            </a:pPr>
+            <a:r>
+              <a:rPr sz="1100" b="0" i="0">
+                <a:solidFill>
+                  <a:srgbClr val="566577"/>
+                </a:solidFill>
+                <a:latin typeface="Consolas"/>
+              </a:rPr>
+              <a:t>&lt;freq&gt;,&lt;ssid&gt;</a:t>
+            </a:r>
+            <a:r>
+              <a:rPr sz="1100" b="0" i="0">
+                <a:solidFill>
+                  <a:srgbClr val="566577"/>
+                </a:solidFill>
+                <a:latin typeface="Segoe UI"/>
+              </a:rPr>
+              <a:t> + </a:t>
+            </a:r>
+            <a:r>
+              <a:rPr sz="1100" b="0" i="0">
+                <a:solidFill>
+                  <a:srgbClr val="566577"/>
+                </a:solidFill>
+                <a:latin typeface="Consolas"/>
+              </a:rPr>
+              <a:t>FIM</a:t>
+            </a:r>
+          </a:p>
+        </p:txBody>
+      </p:sp>
+      <p:sp>
+        <p:nvSpPr>
+          <p:cNvPr id="16" name="Right Arrow 15"/>
+          <p:cNvSpPr/>
+          <p:nvPr/>
+        </p:nvSpPr>
+        <p:spPr>
+          <a:xfrm>
+            <a:off x="4790724" y="3886200"/>
+            <a:ext cx="356616" cy="146304"/>
+          </a:xfrm>
+          <a:prstGeom prst="rightArrow">
+            <a:avLst/>
+          </a:prstGeom>
+          <a:solidFill>
+            <a:srgbClr val="0093D0"/>
+          </a:solidFill>
+          <a:ln>
+            <a:noFill/>
+          </a:ln>
+          <a:effectLst/>
+        </p:spPr>
+        <p:style>
+          <a:lnRef idx="1">
+            <a:schemeClr val="accent1"/>
+          </a:lnRef>
+          <a:fillRef idx="3">
+            <a:schemeClr val="accent1"/>
+          </a:fillRef>
+          <a:effectRef idx="2">
+            <a:schemeClr val="accent1"/>
+          </a:effectRef>
+          <a:fontRef idx="minor">
+            <a:schemeClr val="lt1"/>
+          </a:fontRef>
+        </p:style>
+        <p:txBody>
+          <a:bodyPr rtlCol="0" anchor="ctr"/>
+          <a:lstStyle/>
+          <a:p>
+            <a:pPr algn="ctr"/>
+          </a:p>
+        </p:txBody>
+      </p:sp>
+      <p:sp>
+        <p:nvSpPr>
+          <p:cNvPr id="17" name="Rounded Rectangle 16"/>
+          <p:cNvSpPr/>
+          <p:nvPr/>
+        </p:nvSpPr>
+        <p:spPr>
+          <a:xfrm>
+            <a:off x="5220492" y="3250692"/>
+            <a:ext cx="1750710" cy="1417320"/>
+          </a:xfrm>
+          <a:prstGeom prst="roundRect">
+            <a:avLst>
+              <a:gd name="adj" fmla="val 7000"/>
+            </a:avLst>
+          </a:prstGeom>
+          <a:solidFill>
+            <a:srgbClr val="00224E"/>
+          </a:solidFill>
+          <a:ln>
+            <a:noFill/>
+          </a:ln>
+          <a:effectLst/>
+        </p:spPr>
+        <p:style>
+          <a:lnRef idx="1">
+            <a:schemeClr val="accent1"/>
+          </a:lnRef>
+          <a:fillRef idx="3">
+            <a:schemeClr val="accent1"/>
+          </a:fillRef>
+          <a:effectRef idx="2">
+            <a:schemeClr val="accent1"/>
+          </a:effectRef>
+          <a:fontRef idx="minor">
+            <a:schemeClr val="lt1"/>
+          </a:fontRef>
+        </p:style>
+        <p:txBody>
+          <a:bodyPr rtlCol="0" anchor="ctr"/>
+          <a:lstStyle/>
+          <a:p>
+            <a:pPr algn="ctr"/>
+          </a:p>
+        </p:txBody>
+      </p:sp>
+      <p:sp>
+        <p:nvSpPr>
+          <p:cNvPr id="18" name="TextBox 17"/>
           <p:cNvSpPr txBox="1"/>
           <p:nvPr/>
         </p:nvSpPr>
         <p:spPr>
           <a:xfrm>
-            <a:off x="3461689" y="3735324"/>
-            <a:ext cx="2519857" cy="274320"/>
+            <a:off x="5357652" y="3451860"/>
+            <a:ext cx="1476390" cy="365760"/>
           </a:xfrm>
           <a:prstGeom prst="rect">
             <a:avLst/>
@@ -14858,66 +14097,27 @@
               </a:lnSpc>
             </a:pPr>
             <a:r>
-              <a:rPr sz="1300" b="0" i="0">
-                <a:solidFill>
-                  <a:srgbClr val="566577"/>
-                </a:solidFill>
-                <a:latin typeface="Consolas"/>
-              </a:rPr>
-              <a:t>APs varridos → usados</a:t>
-            </a:r>
-          </a:p>
-        </p:txBody>
-      </p:sp>
-      <p:sp>
-        <p:nvSpPr>
-          <p:cNvPr id="17" name="TextBox 16"/>
+              <a:rPr sz="1400" b="1" i="0">
+                <a:solidFill>
+                  <a:srgbClr val="E8F1F8"/>
+                </a:solidFill>
+                <a:latin typeface="Segoe UI"/>
+              </a:rPr>
+              <a:t>wifi_locate.py</a:t>
+            </a:r>
+          </a:p>
+        </p:txBody>
+      </p:sp>
+      <p:sp>
+        <p:nvSpPr>
+          <p:cNvPr id="19" name="TextBox 18"/>
           <p:cNvSpPr txBox="1"/>
           <p:nvPr/>
         </p:nvSpPr>
         <p:spPr>
           <a:xfrm>
-            <a:off x="3598849" y="4119372"/>
-            <a:ext cx="2245537" cy="320040"/>
-          </a:xfrm>
-          <a:prstGeom prst="rect">
-            <a:avLst/>
-          </a:prstGeom>
-          <a:noFill/>
-        </p:spPr>
-        <p:txBody>
-          <a:bodyPr wrap="square" anchor="t" lIns="0" rIns="0" tIns="0" bIns="0">
-            <a:spAutoFit/>
-          </a:bodyPr>
-          <a:lstStyle/>
-          <a:p>
-            <a:pPr algn="ctr">
-              <a:lnSpc>
-                <a:spcPct val="100000"/>
-              </a:lnSpc>
-            </a:pPr>
-            <a:r>
-              <a:rPr sz="1400" b="1" i="0">
-                <a:solidFill>
-                  <a:srgbClr val="0B1B2B"/>
-                </a:solidFill>
-                <a:latin typeface="Segoe UI"/>
-              </a:rPr>
-              <a:t>por que sumiram cinco</a:t>
-            </a:r>
-          </a:p>
-        </p:txBody>
-      </p:sp>
-      <p:sp>
-        <p:nvSpPr>
-          <p:cNvPr id="18" name="TextBox 17"/>
-          <p:cNvSpPr txBox="1"/>
-          <p:nvPr/>
-        </p:nvSpPr>
-        <p:spPr>
-          <a:xfrm>
-            <a:off x="3626281" y="4466844"/>
-            <a:ext cx="2190673" cy="749808"/>
+            <a:off x="5357652" y="3872484"/>
+            <a:ext cx="1476390" cy="685800"/>
           </a:xfrm>
           <a:prstGeom prst="rect">
             <a:avLst/>
@@ -14938,79 +14138,101 @@
             <a:r>
               <a:rPr sz="1100" b="0" i="0">
                 <a:solidFill>
-                  <a:srgbClr val="566577"/>
-                </a:solidFill>
-                <a:latin typeface="Segoe UI"/>
-              </a:rPr>
-              <a:t>MACs administrados localmente (</a:t>
-            </a:r>
+                  <a:srgbClr val="93A6B8"/>
+                </a:solidFill>
+                <a:latin typeface="Segoe UI"/>
+              </a:rPr>
+              <a:t>descarta MACs locais</a:t>
+            </a:r>
+          </a:p>
+          <a:p>
+            <a:pPr algn="ctr">
+              <a:lnSpc>
+                <a:spcPct val="110000"/>
+              </a:lnSpc>
+            </a:pPr>
             <a:r>
               <a:rPr sz="1100" b="0" i="0">
                 <a:solidFill>
-                  <a:srgbClr val="566577"/>
-                </a:solidFill>
-                <a:latin typeface="Consolas"/>
-              </a:rPr>
-              <a:t>02:</a:t>
-            </a:r>
+                  <a:srgbClr val="93A6B8"/>
+                </a:solidFill>
+                <a:latin typeface="Segoe UI"/>
+              </a:rPr>
+              <a:t>(bit 0x02) e exige</a:t>
+            </a:r>
+          </a:p>
+          <a:p>
+            <a:pPr algn="ctr">
+              <a:lnSpc>
+                <a:spcPct val="110000"/>
+              </a:lnSpc>
+            </a:pPr>
             <a:r>
               <a:rPr sz="1100" b="0" i="0">
                 <a:solidFill>
-                  <a:srgbClr val="566577"/>
-                </a:solidFill>
-                <a:latin typeface="Segoe UI"/>
-              </a:rPr>
-              <a:t>, </a:t>
-            </a:r>
-            <a:r>
-              <a:rPr sz="1100" b="0" i="0">
-                <a:solidFill>
-                  <a:srgbClr val="566577"/>
-                </a:solidFill>
-                <a:latin typeface="Consolas"/>
-              </a:rPr>
-              <a:t>96:</a:t>
-            </a:r>
-            <a:r>
-              <a:rPr sz="1100" b="0" i="0">
-                <a:solidFill>
-                  <a:srgbClr val="566577"/>
-                </a:solidFill>
-                <a:latin typeface="Segoe UI"/>
-              </a:rPr>
-              <a:t>) não identificam um AP físico fixo. Descartados </a:t>
-            </a:r>
-            <a:r>
-              <a:rPr sz="1100" b="1" i="0">
-                <a:solidFill>
-                  <a:srgbClr val="566577"/>
-                </a:solidFill>
-                <a:latin typeface="Segoe UI"/>
-              </a:rPr>
-              <a:t>antes</a:t>
-            </a:r>
-            <a:r>
-              <a:rPr sz="1100" b="0" i="0">
-                <a:solidFill>
-                  <a:srgbClr val="566577"/>
-                </a:solidFill>
-                <a:latin typeface="Segoe UI"/>
-              </a:rPr>
-              <a:t> da chamada, que é paga</a:t>
-            </a:r>
-          </a:p>
-        </p:txBody>
-      </p:sp>
-      <p:sp>
-        <p:nvSpPr>
-          <p:cNvPr id="19" name="Rounded Rectangle 18"/>
+                  <a:srgbClr val="93A6B8"/>
+                </a:solidFill>
+                <a:latin typeface="Segoe UI"/>
+              </a:rPr>
+              <a:t>≥ 2 APs válidos</a:t>
+            </a:r>
+          </a:p>
+        </p:txBody>
+      </p:sp>
+      <p:sp>
+        <p:nvSpPr>
+          <p:cNvPr id="20" name="Right Arrow 19"/>
           <p:cNvSpPr/>
           <p:nvPr/>
         </p:nvSpPr>
         <p:spPr>
           <a:xfrm>
-            <a:off x="6210147" y="2839212"/>
-            <a:ext cx="2519857" cy="2468880"/>
+            <a:off x="7044354" y="3886200"/>
+            <a:ext cx="356616" cy="146304"/>
+          </a:xfrm>
+          <a:prstGeom prst="rightArrow">
+            <a:avLst/>
+          </a:prstGeom>
+          <a:solidFill>
+            <a:srgbClr val="0093D0"/>
+          </a:solidFill>
+          <a:ln>
+            <a:noFill/>
+          </a:ln>
+          <a:effectLst/>
+        </p:spPr>
+        <p:style>
+          <a:lnRef idx="1">
+            <a:schemeClr val="accent1"/>
+          </a:lnRef>
+          <a:fillRef idx="3">
+            <a:schemeClr val="accent1"/>
+          </a:fillRef>
+          <a:effectRef idx="2">
+            <a:schemeClr val="accent1"/>
+          </a:effectRef>
+          <a:fontRef idx="minor">
+            <a:schemeClr val="lt1"/>
+          </a:fontRef>
+        </p:style>
+        <p:txBody>
+          <a:bodyPr rtlCol="0" anchor="ctr"/>
+          <a:lstStyle/>
+          <a:p>
+            <a:pPr algn="ctr"/>
+          </a:p>
+        </p:txBody>
+      </p:sp>
+      <p:sp>
+        <p:nvSpPr>
+          <p:cNvPr id="21" name="Rounded Rectangle 20"/>
+          <p:cNvSpPr/>
+          <p:nvPr/>
+        </p:nvSpPr>
+        <p:spPr>
+          <a:xfrm>
+            <a:off x="7474122" y="3250692"/>
+            <a:ext cx="1750710" cy="1417320"/>
           </a:xfrm>
           <a:prstGeom prst="roundRect">
             <a:avLst>
@@ -15049,14 +14271,14 @@
       </p:sp>
       <p:sp>
         <p:nvSpPr>
-          <p:cNvPr id="20" name="TextBox 19"/>
+          <p:cNvPr id="22" name="TextBox 21"/>
           <p:cNvSpPr txBox="1"/>
           <p:nvPr/>
         </p:nvSpPr>
         <p:spPr>
           <a:xfrm>
-            <a:off x="6301587" y="3095244"/>
-            <a:ext cx="2336977" cy="640080"/>
+            <a:off x="7611282" y="3451860"/>
+            <a:ext cx="1476390" cy="365760"/>
           </a:xfrm>
           <a:prstGeom prst="rect">
             <a:avLst/>
@@ -15075,91 +14297,13 @@
               </a:lnSpc>
             </a:pPr>
             <a:r>
-              <a:rPr sz="3000" b="1" i="0">
-                <a:solidFill>
-                  <a:srgbClr val="0093D0"/>
-                </a:solidFill>
-                <a:latin typeface="Consolas"/>
-              </a:rPr>
-              <a:t>13,4 m</a:t>
-            </a:r>
-          </a:p>
-        </p:txBody>
-      </p:sp>
-      <p:sp>
-        <p:nvSpPr>
-          <p:cNvPr id="21" name="TextBox 20"/>
-          <p:cNvSpPr txBox="1"/>
-          <p:nvPr/>
-        </p:nvSpPr>
-        <p:spPr>
-          <a:xfrm>
-            <a:off x="6210147" y="3735324"/>
-            <a:ext cx="2519857" cy="274320"/>
-          </a:xfrm>
-          <a:prstGeom prst="rect">
-            <a:avLst/>
-          </a:prstGeom>
-          <a:noFill/>
-        </p:spPr>
-        <p:txBody>
-          <a:bodyPr wrap="square" anchor="t" lIns="0" rIns="0" tIns="0" bIns="0">
-            <a:spAutoFit/>
-          </a:bodyPr>
-          <a:lstStyle/>
-          <a:p>
-            <a:pPr algn="ctr">
-              <a:lnSpc>
-                <a:spcPct val="100000"/>
-              </a:lnSpc>
-            </a:pPr>
-            <a:r>
-              <a:rPr sz="1300" b="0" i="0">
-                <a:solidFill>
-                  <a:srgbClr val="566577"/>
-                </a:solidFill>
-                <a:latin typeface="Consolas"/>
-              </a:rPr>
-              <a:t>de incerteza</a:t>
-            </a:r>
-          </a:p>
-        </p:txBody>
-      </p:sp>
-      <p:sp>
-        <p:nvSpPr>
-          <p:cNvPr id="22" name="TextBox 21"/>
-          <p:cNvSpPr txBox="1"/>
-          <p:nvPr/>
-        </p:nvSpPr>
-        <p:spPr>
-          <a:xfrm>
-            <a:off x="6347307" y="4119372"/>
-            <a:ext cx="2245537" cy="320040"/>
-          </a:xfrm>
-          <a:prstGeom prst="rect">
-            <a:avLst/>
-          </a:prstGeom>
-          <a:noFill/>
-        </p:spPr>
-        <p:txBody>
-          <a:bodyPr wrap="square" anchor="t" lIns="0" rIns="0" tIns="0" bIns="0">
-            <a:spAutoFit/>
-          </a:bodyPr>
-          <a:lstStyle/>
-          <a:p>
-            <a:pPr algn="ctr">
-              <a:lnSpc>
-                <a:spcPct val="100000"/>
-              </a:lnSpc>
-            </a:pPr>
-            <a:r>
               <a:rPr sz="1400" b="1" i="0">
                 <a:solidFill>
                   <a:srgbClr val="0B1B2B"/>
                 </a:solidFill>
                 <a:latin typeface="Segoe UI"/>
               </a:rPr>
-              <a:t>com 16 APs</a:t>
+              <a:t>nRF Cloud</a:t>
             </a:r>
           </a:p>
         </p:txBody>
@@ -15172,8 +14316,8 @@
         </p:nvSpPr>
         <p:spPr>
           <a:xfrm>
-            <a:off x="6374739" y="4466844"/>
-            <a:ext cx="2190673" cy="749808"/>
+            <a:off x="7611282" y="3872484"/>
+            <a:ext cx="1476390" cy="685800"/>
           </a:xfrm>
           <a:prstGeom prst="rect">
             <a:avLst/>
@@ -15198,21 +14342,97 @@
                 </a:solidFill>
                 <a:latin typeface="Segoe UI"/>
               </a:rPr>
-              <a:t>contra 14,1 m com só cinco. Mais vizinhos ajudam, mas o ganho satura rápido — dá para medir na hora</a:t>
-            </a:r>
-          </a:p>
-        </p:txBody>
-      </p:sp>
-      <p:sp>
-        <p:nvSpPr>
-          <p:cNvPr id="24" name="Rounded Rectangle 23"/>
+              <a:t>Location Services</a:t>
+            </a:r>
+          </a:p>
+          <a:p>
+            <a:pPr algn="ctr">
+              <a:lnSpc>
+                <a:spcPct val="110000"/>
+              </a:lnSpc>
+            </a:pPr>
+            <a:r>
+              <a:rPr sz="1100" b="0" i="0">
+                <a:solidFill>
+                  <a:srgbClr val="566577"/>
+                </a:solidFill>
+                <a:latin typeface="Segoe UI"/>
+              </a:rPr>
+              <a:t>HTTPS + OAT</a:t>
+            </a:r>
+          </a:p>
+          <a:p>
+            <a:pPr algn="ctr">
+              <a:lnSpc>
+                <a:spcPct val="110000"/>
+              </a:lnSpc>
+            </a:pPr>
+            <a:r>
+              <a:rPr sz="1100" b="0" i="0">
+                <a:solidFill>
+                  <a:srgbClr val="566577"/>
+                </a:solidFill>
+                <a:latin typeface="Segoe UI"/>
+              </a:rPr>
+              <a:t>banco de quem mapeou</a:t>
+            </a:r>
+          </a:p>
+        </p:txBody>
+      </p:sp>
+      <p:sp>
+        <p:nvSpPr>
+          <p:cNvPr id="24" name="Right Arrow 23"/>
           <p:cNvSpPr/>
           <p:nvPr/>
         </p:nvSpPr>
         <p:spPr>
           <a:xfrm>
-            <a:off x="8958605" y="2839212"/>
-            <a:ext cx="2519857" cy="2468880"/>
+            <a:off x="9297984" y="3886200"/>
+            <a:ext cx="356616" cy="146304"/>
+          </a:xfrm>
+          <a:prstGeom prst="rightArrow">
+            <a:avLst/>
+          </a:prstGeom>
+          <a:solidFill>
+            <a:srgbClr val="0093D0"/>
+          </a:solidFill>
+          <a:ln>
+            <a:noFill/>
+          </a:ln>
+          <a:effectLst/>
+        </p:spPr>
+        <p:style>
+          <a:lnRef idx="1">
+            <a:schemeClr val="accent1"/>
+          </a:lnRef>
+          <a:fillRef idx="3">
+            <a:schemeClr val="accent1"/>
+          </a:fillRef>
+          <a:effectRef idx="2">
+            <a:schemeClr val="accent1"/>
+          </a:effectRef>
+          <a:fontRef idx="minor">
+            <a:schemeClr val="lt1"/>
+          </a:fontRef>
+        </p:style>
+        <p:txBody>
+          <a:bodyPr rtlCol="0" anchor="ctr"/>
+          <a:lstStyle/>
+          <a:p>
+            <a:pPr algn="ctr"/>
+          </a:p>
+        </p:txBody>
+      </p:sp>
+      <p:sp>
+        <p:nvSpPr>
+          <p:cNvPr id="25" name="Rounded Rectangle 24"/>
+          <p:cNvSpPr/>
+          <p:nvPr/>
+        </p:nvSpPr>
+        <p:spPr>
+          <a:xfrm>
+            <a:off x="9727752" y="3250692"/>
+            <a:ext cx="1750710" cy="1417320"/>
           </a:xfrm>
           <a:prstGeom prst="roundRect">
             <a:avLst>
@@ -15251,14 +14471,14 @@
       </p:sp>
       <p:sp>
         <p:nvSpPr>
-          <p:cNvPr id="25" name="TextBox 24"/>
+          <p:cNvPr id="26" name="TextBox 25"/>
           <p:cNvSpPr txBox="1"/>
           <p:nvPr/>
         </p:nvSpPr>
         <p:spPr>
           <a:xfrm>
-            <a:off x="9050045" y="3095244"/>
-            <a:ext cx="2336977" cy="640080"/>
+            <a:off x="9864912" y="3451860"/>
+            <a:ext cx="1476390" cy="365760"/>
           </a:xfrm>
           <a:prstGeom prst="rect">
             <a:avLst/>
@@ -15277,27 +14497,107 @@
               </a:lnSpc>
             </a:pPr>
             <a:r>
-              <a:rPr sz="3000" b="1" i="0">
-                <a:solidFill>
-                  <a:srgbClr val="0093D0"/>
-                </a:solidFill>
-                <a:latin typeface="Consolas"/>
-              </a:rPr>
-              <a:t>OAT</a:t>
-            </a:r>
-          </a:p>
-        </p:txBody>
-      </p:sp>
-      <p:sp>
-        <p:nvSpPr>
-          <p:cNvPr id="26" name="TextBox 25"/>
+              <a:rPr sz="1400" b="1" i="0">
+                <a:solidFill>
+                  <a:srgbClr val="0B1B2B"/>
+                </a:solidFill>
+                <a:latin typeface="Segoe UI"/>
+              </a:rPr>
+              <a:t>lat · lon · raio</a:t>
+            </a:r>
+          </a:p>
+        </p:txBody>
+      </p:sp>
+      <p:sp>
+        <p:nvSpPr>
+          <p:cNvPr id="27" name="TextBox 26"/>
           <p:cNvSpPr txBox="1"/>
           <p:nvPr/>
         </p:nvSpPr>
         <p:spPr>
           <a:xfrm>
-            <a:off x="8958605" y="3735324"/>
-            <a:ext cx="2519857" cy="274320"/>
+            <a:off x="9864912" y="3872484"/>
+            <a:ext cx="1476390" cy="685800"/>
+          </a:xfrm>
+          <a:prstGeom prst="rect">
+            <a:avLst/>
+          </a:prstGeom>
+          <a:noFill/>
+        </p:spPr>
+        <p:txBody>
+          <a:bodyPr wrap="square" anchor="t" lIns="0" rIns="0" tIns="0" bIns="0">
+            <a:spAutoFit/>
+          </a:bodyPr>
+          <a:lstStyle/>
+          <a:p>
+            <a:pPr algn="ctr">
+              <a:lnSpc>
+                <a:spcPct val="110000"/>
+              </a:lnSpc>
+            </a:pPr>
+            <a:r>
+              <a:rPr sz="1100" b="0" i="0">
+                <a:solidFill>
+                  <a:srgbClr val="566577"/>
+                </a:solidFill>
+                <a:latin typeface="Segoe UI"/>
+              </a:rPr>
+              <a:t>a coordenada e a</a:t>
+            </a:r>
+          </a:p>
+          <a:p>
+            <a:pPr algn="ctr">
+              <a:lnSpc>
+                <a:spcPct val="110000"/>
+              </a:lnSpc>
+            </a:pPr>
+            <a:r>
+              <a:rPr sz="1100" b="0" i="0">
+                <a:solidFill>
+                  <a:srgbClr val="566577"/>
+                </a:solidFill>
+                <a:latin typeface="Segoe UI"/>
+              </a:rPr>
+              <a:t>incerteza em metros:</a:t>
+            </a:r>
+          </a:p>
+          <a:p>
+            <a:pPr algn="ctr">
+              <a:lnSpc>
+                <a:spcPct val="110000"/>
+              </a:lnSpc>
+            </a:pPr>
+            <a:r>
+              <a:rPr sz="1100" b="1" i="0">
+                <a:solidFill>
+                  <a:srgbClr val="566577"/>
+                </a:solidFill>
+                <a:latin typeface="Segoe UI"/>
+              </a:rPr>
+              <a:t>13,4 m</a:t>
+            </a:r>
+            <a:r>
+              <a:rPr sz="1100" b="0" i="0">
+                <a:solidFill>
+                  <a:srgbClr val="566577"/>
+                </a:solidFill>
+                <a:latin typeface="Segoe UI"/>
+              </a:rPr>
+              <a:t> na bancada</a:t>
+            </a:r>
+          </a:p>
+        </p:txBody>
+      </p:sp>
+      <p:sp>
+        <p:nvSpPr>
+          <p:cNvPr id="28" name="TextBox 27"/>
+          <p:cNvSpPr txBox="1"/>
+          <p:nvPr/>
+        </p:nvSpPr>
+        <p:spPr>
+          <a:xfrm>
+            <a:off x="4150644" y="2939796"/>
+            <a:ext cx="1636776" cy="274320"/>
           </a:xfrm>
           <a:prstGeom prst="rect">
             <a:avLst/>
@@ -15316,27 +14616,27 @@
               </a:lnSpc>
             </a:pPr>
             <a:r>
-              <a:rPr sz="1300" b="0" i="0">
-                <a:solidFill>
-                  <a:srgbClr val="566577"/>
-                </a:solidFill>
-                <a:latin typeface="Consolas"/>
-              </a:rPr>
-              <a:t>não a API key</a:t>
-            </a:r>
-          </a:p>
-        </p:txBody>
-      </p:sp>
-      <p:sp>
-        <p:nvSpPr>
-          <p:cNvPr id="27" name="TextBox 26"/>
+              <a:rPr sz="1000" b="1" i="0">
+                <a:solidFill>
+                  <a:srgbClr val="0093D0"/>
+                </a:solidFill>
+                <a:latin typeface="Segoe UI"/>
+              </a:rPr>
+              <a:t>sw0 = nova varredura</a:t>
+            </a:r>
+          </a:p>
+        </p:txBody>
+      </p:sp>
+      <p:sp>
+        <p:nvSpPr>
+          <p:cNvPr id="29" name="TextBox 28"/>
           <p:cNvSpPr txBox="1"/>
           <p:nvPr/>
         </p:nvSpPr>
         <p:spPr>
           <a:xfrm>
-            <a:off x="9095765" y="4119372"/>
-            <a:ext cx="2245537" cy="320040"/>
+            <a:off x="6404274" y="2939796"/>
+            <a:ext cx="1636776" cy="274320"/>
           </a:xfrm>
           <a:prstGeom prst="rect">
             <a:avLst/>
@@ -15355,27 +14655,27 @@
               </a:lnSpc>
             </a:pPr>
             <a:r>
-              <a:rPr sz="1400" b="1" i="0">
-                <a:solidFill>
-                  <a:srgbClr val="0B1B2B"/>
-                </a:solidFill>
-                <a:latin typeface="Consolas"/>
-              </a:rPr>
-              <a:t>401 malformed</a:t>
-            </a:r>
-          </a:p>
-        </p:txBody>
-      </p:sp>
-      <p:sp>
-        <p:nvSpPr>
-          <p:cNvPr id="28" name="TextBox 27"/>
+              <a:rPr sz="1000" b="1" i="0">
+                <a:solidFill>
+                  <a:srgbClr val="0093D0"/>
+                </a:solidFill>
+                <a:latin typeface="Segoe UI"/>
+              </a:rPr>
+              <a:t>internet só aqui</a:t>
+            </a:r>
+          </a:p>
+        </p:txBody>
+      </p:sp>
+      <p:sp>
+        <p:nvSpPr>
+          <p:cNvPr id="30" name="TextBox 29"/>
           <p:cNvSpPr txBox="1"/>
           <p:nvPr/>
         </p:nvSpPr>
         <p:spPr>
           <a:xfrm>
-            <a:off x="9123197" y="4466844"/>
-            <a:ext cx="2190673" cy="749808"/>
+            <a:off x="713232" y="4896612"/>
+            <a:ext cx="10765231" cy="274320"/>
           </a:xfrm>
           <a:prstGeom prst="rect">
             <a:avLst/>
@@ -15390,17 +14690,17 @@
           <a:p>
             <a:pPr algn="ctr">
               <a:lnSpc>
-                <a:spcPct val="110000"/>
+                <a:spcPct val="100000"/>
               </a:lnSpc>
             </a:pPr>
             <a:r>
-              <a:rPr sz="1100" b="0" i="0">
+              <a:rPr sz="1200" b="0" i="1">
                 <a:solidFill>
                   <a:srgbClr val="566577"/>
                 </a:solidFill>
                 <a:latin typeface="Segoe UI"/>
               </a:rPr>
-              <a:t>só o Organization Auth Token serve para Location Services. Exportado no ambiente do PC, nunca em arquivo</a:t>
+              <a:t>Código do curso, reaproveitando o cliente TCP do lab 9. Sem TF-M, sem onboarding: o kit só precisa da rede da sala; a chave nunca sobe para o firmware.</a:t>
             </a:r>
           </a:p>
         </p:txBody>
@@ -15540,7 +14840,7 @@
                 </a:solidFill>
                 <a:latin typeface="Segoe UI"/>
               </a:rPr>
-              <a:t>Curso × produção</a:t>
+              <a:t>O ciclo completo, medido</a:t>
             </a:r>
           </a:p>
         </p:txBody>
@@ -15678,60 +14978,14 @@
       </p:sp>
       <p:sp>
         <p:nvSpPr>
-          <p:cNvPr id="8" name="Rounded Rectangle 7"/>
-          <p:cNvSpPr/>
-          <p:nvPr/>
-        </p:nvSpPr>
-        <p:spPr>
-          <a:xfrm>
-            <a:off x="713232" y="1554480"/>
-            <a:ext cx="5245455" cy="457200"/>
-          </a:xfrm>
-          <a:prstGeom prst="roundRect">
-            <a:avLst>
-              <a:gd name="adj" fmla="val 30000"/>
-            </a:avLst>
-          </a:prstGeom>
-          <a:solidFill>
-            <a:srgbClr val="00224E"/>
-          </a:solidFill>
-          <a:ln>
-            <a:noFill/>
-          </a:ln>
-          <a:effectLst/>
-        </p:spPr>
-        <p:style>
-          <a:lnRef idx="1">
-            <a:schemeClr val="accent1"/>
-          </a:lnRef>
-          <a:fillRef idx="3">
-            <a:schemeClr val="accent1"/>
-          </a:fillRef>
-          <a:effectRef idx="2">
-            <a:schemeClr val="accent1"/>
-          </a:effectRef>
-          <a:fontRef idx="minor">
-            <a:schemeClr val="lt1"/>
-          </a:fontRef>
-        </p:style>
-        <p:txBody>
-          <a:bodyPr rtlCol="0" anchor="ctr"/>
-          <a:lstStyle/>
-          <a:p>
-            <a:pPr algn="ctr"/>
-          </a:p>
-        </p:txBody>
-      </p:sp>
-      <p:sp>
-        <p:nvSpPr>
-          <p:cNvPr id="9" name="TextBox 8"/>
+          <p:cNvPr id="8" name="TextBox 7"/>
           <p:cNvSpPr txBox="1"/>
           <p:nvPr/>
         </p:nvSpPr>
         <p:spPr>
           <a:xfrm>
-            <a:off x="713232" y="1636776"/>
-            <a:ext cx="5245455" cy="320040"/>
+            <a:off x="713232" y="1225296"/>
+            <a:ext cx="10765231" cy="548640"/>
           </a:xfrm>
           <a:prstGeom prst="rect">
             <a:avLst/>
@@ -15744,33 +14998,51 @@
           </a:bodyPr>
           <a:lstStyle/>
           <a:p>
-            <a:pPr algn="ctr">
+            <a:pPr algn="l">
               <a:lnSpc>
-                <a:spcPct val="100000"/>
+                <a:spcPct val="125000"/>
               </a:lnSpc>
             </a:pPr>
             <a:r>
-              <a:rPr sz="1500" b="1" i="0">
-                <a:solidFill>
-                  <a:srgbClr val="FFFFFF"/>
-                </a:solidFill>
-                <a:latin typeface="Segoe UI"/>
-              </a:rPr>
-              <a:t>o curso: scan no kit, resolução no PC</a:t>
-            </a:r>
-          </a:p>
-        </p:txBody>
-      </p:sp>
-      <p:sp>
-        <p:nvSpPr>
-          <p:cNvPr id="10" name="Rounded Rectangle 9"/>
+              <a:rPr sz="1400" b="0" i="0">
+                <a:solidFill>
+                  <a:srgbClr val="566577"/>
+                </a:solidFill>
+                <a:latin typeface="Segoe UI"/>
+              </a:rPr>
+              <a:t>O aluno vê </a:t>
+            </a:r>
+            <a:r>
+              <a:rPr sz="1400" b="1" i="0">
+                <a:solidFill>
+                  <a:srgbClr val="0B1B2B"/>
+                </a:solidFill>
+                <a:latin typeface="Segoe UI"/>
+              </a:rPr>
+              <a:t>as duas metades</a:t>
+            </a:r>
+            <a:r>
+              <a:rPr sz="1400" b="0" i="0">
+                <a:solidFill>
+                  <a:srgbClr val="566577"/>
+                </a:solidFill>
+                <a:latin typeface="Segoe UI"/>
+              </a:rPr>
+              <a:t>: a lista de APs que o kit enxergou (21 na tela do kit) e a coordenada que saiu dela (16 na do PC). A pergunta “por que sumiram cinco” tem resposta técnica, não é bug.</a:t>
+            </a:r>
+          </a:p>
+        </p:txBody>
+      </p:sp>
+      <p:sp>
+        <p:nvSpPr>
+          <p:cNvPr id="9" name="Rounded Rectangle 8"/>
           <p:cNvSpPr/>
           <p:nvPr/>
         </p:nvSpPr>
         <p:spPr>
           <a:xfrm>
-            <a:off x="713232" y="2103120"/>
-            <a:ext cx="5245455" cy="3429000"/>
+            <a:off x="713232" y="2839212"/>
+            <a:ext cx="2519857" cy="2468880"/>
           </a:xfrm>
           <a:prstGeom prst="roundRect">
             <a:avLst>
@@ -15809,217 +15081,14 @@
       </p:sp>
       <p:sp>
         <p:nvSpPr>
-          <p:cNvPr id="11" name="TextBox 10"/>
+          <p:cNvPr id="10" name="TextBox 9"/>
           <p:cNvSpPr txBox="1"/>
           <p:nvPr/>
         </p:nvSpPr>
         <p:spPr>
           <a:xfrm>
-            <a:off x="987552" y="2304288"/>
-            <a:ext cx="4696815" cy="3063240"/>
-          </a:xfrm>
-          <a:prstGeom prst="rect">
-            <a:avLst/>
-          </a:prstGeom>
-          <a:noFill/>
-        </p:spPr>
-        <p:txBody>
-          <a:bodyPr wrap="square" anchor="t" lIns="0" rIns="0" tIns="0" bIns="0">
-            <a:spAutoFit/>
-          </a:bodyPr>
-          <a:lstStyle/>
-          <a:p>
-            <a:pPr algn="l">
-              <a:lnSpc>
-                <a:spcPct val="135000"/>
-              </a:lnSpc>
-            </a:pPr>
-            <a:r>
-              <a:rPr sz="1300" b="0" i="0">
-                <a:solidFill>
-                  <a:srgbClr val="566577"/>
-                </a:solidFill>
-                <a:latin typeface="Segoe UI"/>
-              </a:rPr>
-              <a:t>▪  </a:t>
-            </a:r>
-            <a:r>
-              <a:rPr sz="1300" b="0" i="0">
-                <a:solidFill>
-                  <a:srgbClr val="566577"/>
-                </a:solidFill>
-                <a:latin typeface="Consolas"/>
-              </a:rPr>
-              <a:t>cpuapp</a:t>
-            </a:r>
-            <a:r>
-              <a:rPr sz="1300" b="0" i="0">
-                <a:solidFill>
-                  <a:srgbClr val="566577"/>
-                </a:solidFill>
-                <a:latin typeface="Segoe UI"/>
-              </a:rPr>
-              <a:t> normal, sem TF-M</a:t>
-            </a:r>
-          </a:p>
-          <a:p>
-            <a:pPr algn="l">
-              <a:lnSpc>
-                <a:spcPct val="135000"/>
-              </a:lnSpc>
-            </a:pPr>
-            <a:r>
-              <a:rPr sz="1300" b="0" i="0">
-                <a:solidFill>
-                  <a:srgbClr val="566577"/>
-                </a:solidFill>
-                <a:latin typeface="Segoe UI"/>
-              </a:rPr>
-              <a:t>▪  uma chave OAT, no PC do instrutor — nenhum onboarding de dispositivo</a:t>
-            </a:r>
-          </a:p>
-          <a:p>
-            <a:pPr algn="l">
-              <a:lnSpc>
-                <a:spcPct val="135000"/>
-              </a:lnSpc>
-            </a:pPr>
-            <a:r>
-              <a:rPr sz="1300" b="0" i="0">
-                <a:solidFill>
-                  <a:srgbClr val="566577"/>
-                </a:solidFill>
-                <a:latin typeface="Segoe UI"/>
-              </a:rPr>
-              <a:t>▪  internet </a:t>
-            </a:r>
-            <a:r>
-              <a:rPr sz="1300" b="1" i="0">
-                <a:solidFill>
-                  <a:srgbClr val="0B1B2B"/>
-                </a:solidFill>
-                <a:latin typeface="Segoe UI"/>
-              </a:rPr>
-              <a:t>só no PC</a:t>
-            </a:r>
-            <a:r>
-              <a:rPr sz="1300" b="0" i="0">
-                <a:solidFill>
-                  <a:srgbClr val="566577"/>
-                </a:solidFill>
-                <a:latin typeface="Segoe UI"/>
-              </a:rPr>
-              <a:t>; o kit só precisa da rede da sala</a:t>
-            </a:r>
-          </a:p>
-          <a:p>
-            <a:pPr algn="l">
-              <a:lnSpc>
-                <a:spcPct val="135000"/>
-              </a:lnSpc>
-            </a:pPr>
-            <a:r>
-              <a:rPr sz="1300" b="0" i="0">
-                <a:solidFill>
-                  <a:srgbClr val="566577"/>
-                </a:solidFill>
-                <a:latin typeface="Segoe UI"/>
-              </a:rPr>
-              <a:t>▪  o aluno vê a lista de BSSIDs </a:t>
-            </a:r>
-            <a:r>
-              <a:rPr sz="1300" b="1" i="0">
-                <a:solidFill>
-                  <a:srgbClr val="0B1B2B"/>
-                </a:solidFill>
-                <a:latin typeface="Segoe UI"/>
-              </a:rPr>
-              <a:t>e</a:t>
-            </a:r>
-            <a:r>
-              <a:rPr sz="1300" b="0" i="0">
-                <a:solidFill>
-                  <a:srgbClr val="566577"/>
-                </a:solidFill>
-                <a:latin typeface="Segoe UI"/>
-              </a:rPr>
-              <a:t> a coordenada: o mecanismo fica visível</a:t>
-            </a:r>
-          </a:p>
-          <a:p>
-            <a:pPr algn="l">
-              <a:lnSpc>
-                <a:spcPct val="135000"/>
-              </a:lnSpc>
-            </a:pPr>
-            <a:r>
-              <a:rPr sz="1300" b="0" i="0">
-                <a:solidFill>
-                  <a:srgbClr val="566577"/>
-                </a:solidFill>
-                <a:latin typeface="Segoe UI"/>
-              </a:rPr>
-              <a:t>▪  reaproveita o lab 9; 553520 B de FLASH, 187256 B de RAM</a:t>
-            </a:r>
-          </a:p>
-        </p:txBody>
-      </p:sp>
-      <p:sp>
-        <p:nvSpPr>
-          <p:cNvPr id="12" name="Rounded Rectangle 11"/>
-          <p:cNvSpPr/>
-          <p:nvPr/>
-        </p:nvSpPr>
-        <p:spPr>
-          <a:xfrm>
-            <a:off x="6233007" y="1554480"/>
-            <a:ext cx="5245455" cy="457200"/>
-          </a:xfrm>
-          <a:prstGeom prst="roundRect">
-            <a:avLst>
-              <a:gd name="adj" fmla="val 30000"/>
-            </a:avLst>
-          </a:prstGeom>
-          <a:solidFill>
-            <a:srgbClr val="0093D0"/>
-          </a:solidFill>
-          <a:ln>
-            <a:noFill/>
-          </a:ln>
-          <a:effectLst/>
-        </p:spPr>
-        <p:style>
-          <a:lnRef idx="1">
-            <a:schemeClr val="accent1"/>
-          </a:lnRef>
-          <a:fillRef idx="3">
-            <a:schemeClr val="accent1"/>
-          </a:fillRef>
-          <a:effectRef idx="2">
-            <a:schemeClr val="accent1"/>
-          </a:effectRef>
-          <a:fontRef idx="minor">
-            <a:schemeClr val="lt1"/>
-          </a:fontRef>
-        </p:style>
-        <p:txBody>
-          <a:bodyPr rtlCol="0" anchor="ctr"/>
-          <a:lstStyle/>
-          <a:p>
-            <a:pPr algn="ctr"/>
-          </a:p>
-        </p:txBody>
-      </p:sp>
-      <p:sp>
-        <p:nvSpPr>
-          <p:cNvPr id="13" name="TextBox 12"/>
-          <p:cNvSpPr txBox="1"/>
-          <p:nvPr/>
-        </p:nvSpPr>
-        <p:spPr>
-          <a:xfrm>
-            <a:off x="6233007" y="1636776"/>
-            <a:ext cx="5245455" cy="320040"/>
+            <a:off x="804672" y="3095244"/>
+            <a:ext cx="2336977" cy="640080"/>
           </a:xfrm>
           <a:prstGeom prst="rect">
             <a:avLst/>
@@ -16038,22 +15107,130 @@
               </a:lnSpc>
             </a:pPr>
             <a:r>
-              <a:rPr sz="1500" b="1" i="0">
-                <a:solidFill>
-                  <a:srgbClr val="FFFFFF"/>
-                </a:solidFill>
-                <a:latin typeface="Segoe UI"/>
-              </a:rPr>
-              <a:t>produção: </a:t>
-            </a:r>
-            <a:r>
-              <a:rPr sz="1500" b="1" i="0">
-                <a:solidFill>
-                  <a:srgbClr val="FFFFFF"/>
+              <a:rPr sz="3000" b="1" i="0">
+                <a:solidFill>
+                  <a:srgbClr val="0093D0"/>
                 </a:solidFill>
                 <a:latin typeface="Consolas"/>
               </a:rPr>
-              <a:t>nrf/samples/wifi/nrf_cloud</a:t>
+              <a:t>15 s</a:t>
+            </a:r>
+          </a:p>
+        </p:txBody>
+      </p:sp>
+      <p:sp>
+        <p:nvSpPr>
+          <p:cNvPr id="11" name="TextBox 10"/>
+          <p:cNvSpPr txBox="1"/>
+          <p:nvPr/>
+        </p:nvSpPr>
+        <p:spPr>
+          <a:xfrm>
+            <a:off x="713232" y="3735324"/>
+            <a:ext cx="2519857" cy="274320"/>
+          </a:xfrm>
+          <a:prstGeom prst="rect">
+            <a:avLst/>
+          </a:prstGeom>
+          <a:noFill/>
+        </p:spPr>
+        <p:txBody>
+          <a:bodyPr wrap="square" anchor="t" lIns="0" rIns="0" tIns="0" bIns="0">
+            <a:spAutoFit/>
+          </a:bodyPr>
+          <a:lstStyle/>
+          <a:p>
+            <a:pPr algn="ctr">
+              <a:lnSpc>
+                <a:spcPct val="100000"/>
+              </a:lnSpc>
+            </a:pPr>
+            <a:r>
+              <a:rPr sz="1300" b="0" i="0">
+                <a:solidFill>
+                  <a:srgbClr val="566577"/>
+                </a:solidFill>
+                <a:latin typeface="Consolas"/>
+              </a:rPr>
+              <a:t>reset → coordenada</a:t>
+            </a:r>
+          </a:p>
+        </p:txBody>
+      </p:sp>
+      <p:sp>
+        <p:nvSpPr>
+          <p:cNvPr id="12" name="TextBox 11"/>
+          <p:cNvSpPr txBox="1"/>
+          <p:nvPr/>
+        </p:nvSpPr>
+        <p:spPr>
+          <a:xfrm>
+            <a:off x="850392" y="4119372"/>
+            <a:ext cx="2245537" cy="320040"/>
+          </a:xfrm>
+          <a:prstGeom prst="rect">
+            <a:avLst/>
+          </a:prstGeom>
+          <a:noFill/>
+        </p:spPr>
+        <p:txBody>
+          <a:bodyPr wrap="square" anchor="t" lIns="0" rIns="0" tIns="0" bIns="0">
+            <a:spAutoFit/>
+          </a:bodyPr>
+          <a:lstStyle/>
+          <a:p>
+            <a:pPr algn="ctr">
+              <a:lnSpc>
+                <a:spcPct val="100000"/>
+              </a:lnSpc>
+            </a:pPr>
+            <a:r>
+              <a:rPr sz="1400" b="1" i="0">
+                <a:solidFill>
+                  <a:srgbClr val="0B1B2B"/>
+                </a:solidFill>
+                <a:latin typeface="Segoe UI"/>
+              </a:rPr>
+              <a:t>tempo de máquina</a:t>
+            </a:r>
+          </a:p>
+        </p:txBody>
+      </p:sp>
+      <p:sp>
+        <p:nvSpPr>
+          <p:cNvPr id="13" name="TextBox 12"/>
+          <p:cNvSpPr txBox="1"/>
+          <p:nvPr/>
+        </p:nvSpPr>
+        <p:spPr>
+          <a:xfrm>
+            <a:off x="877824" y="4466844"/>
+            <a:ext cx="2190673" cy="749808"/>
+          </a:xfrm>
+          <a:prstGeom prst="rect">
+            <a:avLst/>
+          </a:prstGeom>
+          <a:noFill/>
+        </p:spPr>
+        <p:txBody>
+          <a:bodyPr wrap="square" anchor="t" lIns="0" rIns="0" tIns="0" bIns="0">
+            <a:spAutoFit/>
+          </a:bodyPr>
+          <a:lstStyle/>
+          <a:p>
+            <a:pPr algn="ctr">
+              <a:lnSpc>
+                <a:spcPct val="110000"/>
+              </a:lnSpc>
+            </a:pPr>
+            <a:r>
+              <a:rPr sz="1100" b="0" i="0">
+                <a:solidFill>
+                  <a:srgbClr val="566577"/>
+                </a:solidFill>
+                <a:latin typeface="Segoe UI"/>
+              </a:rPr>
+              <a:t>dos quais ~5,5 s são a varredura. Não é duração de aula: é o intervalo entre ligar o kit e a ferramenta responder</a:t>
             </a:r>
           </a:p>
         </p:txBody>
@@ -16066,8 +15243,8 @@
         </p:nvSpPr>
         <p:spPr>
           <a:xfrm>
-            <a:off x="6233007" y="2103120"/>
-            <a:ext cx="5245455" cy="3429000"/>
+            <a:off x="3461689" y="2839212"/>
+            <a:ext cx="2519857" cy="2468880"/>
           </a:xfrm>
           <a:prstGeom prst="roundRect">
             <a:avLst>
@@ -16112,8 +15289,8 @@
         </p:nvSpPr>
         <p:spPr>
           <a:xfrm>
-            <a:off x="6507327" y="2304288"/>
-            <a:ext cx="4696815" cy="3063240"/>
+            <a:off x="3553129" y="3095244"/>
+            <a:ext cx="2336977" cy="640080"/>
           </a:xfrm>
           <a:prstGeom prst="rect">
             <a:avLst/>
@@ -16126,61 +15303,48 @@
           </a:bodyPr>
           <a:lstStyle/>
           <a:p>
-            <a:pPr algn="l">
+            <a:pPr algn="ctr">
               <a:lnSpc>
-                <a:spcPct val="135000"/>
+                <a:spcPct val="100000"/>
               </a:lnSpc>
             </a:pPr>
             <a:r>
-              <a:rPr sz="1300" b="0" i="0">
-                <a:solidFill>
-                  <a:srgbClr val="566577"/>
-                </a:solidFill>
-                <a:latin typeface="Segoe UI"/>
-              </a:rPr>
-              <a:t>▪  alvo </a:t>
-            </a:r>
-            <a:r>
-              <a:rPr sz="1300" b="0" i="0">
-                <a:solidFill>
-                  <a:srgbClr val="566577"/>
+              <a:rPr sz="3000" b="1" i="0">
+                <a:solidFill>
+                  <a:srgbClr val="0093D0"/>
                 </a:solidFill>
                 <a:latin typeface="Consolas"/>
               </a:rPr>
-              <a:t>/ns</a:t>
-            </a:r>
-            <a:r>
-              <a:rPr sz="1300" b="0" i="0">
-                <a:solidFill>
-                  <a:srgbClr val="566577"/>
-                </a:solidFill>
-                <a:latin typeface="Segoe UI"/>
-              </a:rPr>
-              <a:t>: build com </a:t>
-            </a:r>
-            <a:r>
-              <a:rPr sz="1300" b="1" i="0">
-                <a:solidFill>
-                  <a:srgbClr val="0B1B2B"/>
-                </a:solidFill>
-                <a:latin typeface="Segoe UI"/>
-              </a:rPr>
-              <a:t>TF-M</a:t>
-            </a:r>
-            <a:r>
-              <a:rPr sz="1300" b="0" i="0">
-                <a:solidFill>
-                  <a:srgbClr val="566577"/>
-                </a:solidFill>
-                <a:latin typeface="Segoe UI"/>
-              </a:rPr>
-              <a:t> e certificado provisionado na Trust Zone</a:t>
-            </a:r>
-          </a:p>
-          <a:p>
-            <a:pPr algn="l">
+              <a:t>21 → 16</a:t>
+            </a:r>
+          </a:p>
+        </p:txBody>
+      </p:sp>
+      <p:sp>
+        <p:nvSpPr>
+          <p:cNvPr id="16" name="TextBox 15"/>
+          <p:cNvSpPr txBox="1"/>
+          <p:nvPr/>
+        </p:nvSpPr>
+        <p:spPr>
+          <a:xfrm>
+            <a:off x="3461689" y="3735324"/>
+            <a:ext cx="2519857" cy="274320"/>
+          </a:xfrm>
+          <a:prstGeom prst="rect">
+            <a:avLst/>
+          </a:prstGeom>
+          <a:noFill/>
+        </p:spPr>
+        <p:txBody>
+          <a:bodyPr wrap="square" anchor="t" lIns="0" rIns="0" tIns="0" bIns="0">
+            <a:spAutoFit/>
+          </a:bodyPr>
+          <a:lstStyle/>
+          <a:p>
+            <a:pPr algn="ctr">
               <a:lnSpc>
-                <a:spcPct val="135000"/>
+                <a:spcPct val="100000"/>
               </a:lnSpc>
             </a:pPr>
             <a:r>
@@ -16188,113 +15352,163 @@
                 <a:solidFill>
                   <a:srgbClr val="566577"/>
                 </a:solidFill>
-                <a:latin typeface="Segoe UI"/>
-              </a:rPr>
-              <a:t>▪  </a:t>
-            </a:r>
-            <a:r>
-              <a:rPr sz="1300" b="1" i="0">
-                <a:solidFill>
-                  <a:srgbClr val="0B1B2B"/>
-                </a:solidFill>
-                <a:latin typeface="Segoe UI"/>
-              </a:rPr>
-              <a:t>onboarding</a:t>
-            </a:r>
-            <a:r>
-              <a:rPr sz="1300" b="0" i="0">
-                <a:solidFill>
-                  <a:srgbClr val="566577"/>
-                </a:solidFill>
-                <a:latin typeface="Segoe UI"/>
-              </a:rPr>
-              <a:t> que associa cada dispositivo físico à conta na nuvem</a:t>
-            </a:r>
-          </a:p>
-          <a:p>
-            <a:pPr algn="l">
+                <a:latin typeface="Consolas"/>
+              </a:rPr>
+              <a:t>APs varridos → usados</a:t>
+            </a:r>
+          </a:p>
+        </p:txBody>
+      </p:sp>
+      <p:sp>
+        <p:nvSpPr>
+          <p:cNvPr id="17" name="TextBox 16"/>
+          <p:cNvSpPr txBox="1"/>
+          <p:nvPr/>
+        </p:nvSpPr>
+        <p:spPr>
+          <a:xfrm>
+            <a:off x="3598849" y="4119372"/>
+            <a:ext cx="2245537" cy="320040"/>
+          </a:xfrm>
+          <a:prstGeom prst="rect">
+            <a:avLst/>
+          </a:prstGeom>
+          <a:noFill/>
+        </p:spPr>
+        <p:txBody>
+          <a:bodyPr wrap="square" anchor="t" lIns="0" rIns="0" tIns="0" bIns="0">
+            <a:spAutoFit/>
+          </a:bodyPr>
+          <a:lstStyle/>
+          <a:p>
+            <a:pPr algn="ctr">
               <a:lnSpc>
-                <a:spcPct val="135000"/>
+                <a:spcPct val="100000"/>
               </a:lnSpc>
             </a:pPr>
             <a:r>
-              <a:rPr sz="1300" b="0" i="0">
-                <a:solidFill>
-                  <a:srgbClr val="566577"/>
-                </a:solidFill>
-                <a:latin typeface="Segoe UI"/>
-              </a:rPr>
-              <a:t>▪  o próprio dispositivo fala com o nRF Cloud por CoAP ou MQTT, continuamente (</a:t>
-            </a:r>
-            <a:r>
-              <a:rPr sz="1300" b="0" i="0">
-                <a:solidFill>
-                  <a:srgbClr val="566577"/>
-                </a:solidFill>
-                <a:latin typeface="Consolas"/>
-              </a:rPr>
-              <a:t>lib_location</a:t>
-            </a:r>
-            <a:r>
-              <a:rPr sz="1300" b="0" i="0">
-                <a:solidFill>
-                  <a:srgbClr val="566577"/>
-                </a:solidFill>
-                <a:latin typeface="Segoe UI"/>
-              </a:rPr>
-              <a:t>)</a:t>
-            </a:r>
-          </a:p>
-          <a:p>
-            <a:pPr algn="l">
+              <a:rPr sz="1400" b="1" i="0">
+                <a:solidFill>
+                  <a:srgbClr val="0B1B2B"/>
+                </a:solidFill>
+                <a:latin typeface="Segoe UI"/>
+              </a:rPr>
+              <a:t>por que sumiram cinco</a:t>
+            </a:r>
+          </a:p>
+        </p:txBody>
+      </p:sp>
+      <p:sp>
+        <p:nvSpPr>
+          <p:cNvPr id="18" name="TextBox 17"/>
+          <p:cNvSpPr txBox="1"/>
+          <p:nvPr/>
+        </p:nvSpPr>
+        <p:spPr>
+          <a:xfrm>
+            <a:off x="3626281" y="4466844"/>
+            <a:ext cx="2190673" cy="749808"/>
+          </a:xfrm>
+          <a:prstGeom prst="rect">
+            <a:avLst/>
+          </a:prstGeom>
+          <a:noFill/>
+        </p:spPr>
+        <p:txBody>
+          <a:bodyPr wrap="square" anchor="t" lIns="0" rIns="0" tIns="0" bIns="0">
+            <a:spAutoFit/>
+          </a:bodyPr>
+          <a:lstStyle/>
+          <a:p>
+            <a:pPr algn="ctr">
               <a:lnSpc>
-                <a:spcPct val="135000"/>
+                <a:spcPct val="110000"/>
               </a:lnSpc>
             </a:pPr>
             <a:r>
-              <a:rPr sz="1300" b="0" i="0">
+              <a:rPr sz="1100" b="0" i="0">
                 <a:solidFill>
                   <a:srgbClr val="566577"/>
                 </a:solidFill>
                 <a:latin typeface="Segoe UI"/>
               </a:rPr>
-              <a:t>▪  sem script de PC no meio — é como um produto embarca isso</a:t>
-            </a:r>
-          </a:p>
-          <a:p>
-            <a:pPr algn="l">
-              <a:lnSpc>
-                <a:spcPct val="135000"/>
-              </a:lnSpc>
-            </a:pPr>
-            <a:r>
-              <a:rPr sz="1300" b="0" i="0">
+              <a:t>MACs administrados localmente (</a:t>
+            </a:r>
+            <a:r>
+              <a:rPr sz="1100" b="0" i="0">
                 <a:solidFill>
                   <a:srgbClr val="566577"/>
                 </a:solidFill>
-                <a:latin typeface="Segoe UI"/>
-              </a:rPr>
-              <a:t>▪  fica como referência escrita e demo, se houver tempo</a:t>
-            </a:r>
-          </a:p>
-        </p:txBody>
-      </p:sp>
-      <p:sp>
-        <p:nvSpPr>
-          <p:cNvPr id="16" name="Rectangle 15"/>
+                <a:latin typeface="Consolas"/>
+              </a:rPr>
+              <a:t>02:</a:t>
+            </a:r>
+            <a:r>
+              <a:rPr sz="1100" b="0" i="0">
+                <a:solidFill>
+                  <a:srgbClr val="566577"/>
+                </a:solidFill>
+                <a:latin typeface="Segoe UI"/>
+              </a:rPr>
+              <a:t>, </a:t>
+            </a:r>
+            <a:r>
+              <a:rPr sz="1100" b="0" i="0">
+                <a:solidFill>
+                  <a:srgbClr val="566577"/>
+                </a:solidFill>
+                <a:latin typeface="Consolas"/>
+              </a:rPr>
+              <a:t>96:</a:t>
+            </a:r>
+            <a:r>
+              <a:rPr sz="1100" b="0" i="0">
+                <a:solidFill>
+                  <a:srgbClr val="566577"/>
+                </a:solidFill>
+                <a:latin typeface="Segoe UI"/>
+              </a:rPr>
+              <a:t>) não identificam um AP físico fixo. Descartados </a:t>
+            </a:r>
+            <a:r>
+              <a:rPr sz="1100" b="1" i="0">
+                <a:solidFill>
+                  <a:srgbClr val="566577"/>
+                </a:solidFill>
+                <a:latin typeface="Segoe UI"/>
+              </a:rPr>
+              <a:t>antes</a:t>
+            </a:r>
+            <a:r>
+              <a:rPr sz="1100" b="0" i="0">
+                <a:solidFill>
+                  <a:srgbClr val="566577"/>
+                </a:solidFill>
+                <a:latin typeface="Segoe UI"/>
+              </a:rPr>
+              <a:t> da chamada, que é paga</a:t>
+            </a:r>
+          </a:p>
+        </p:txBody>
+      </p:sp>
+      <p:sp>
+        <p:nvSpPr>
+          <p:cNvPr id="19" name="Rounded Rectangle 18"/>
           <p:cNvSpPr/>
           <p:nvPr/>
         </p:nvSpPr>
         <p:spPr>
           <a:xfrm>
-            <a:off x="713232" y="5641848"/>
-            <a:ext cx="50800" cy="384048"/>
-          </a:xfrm>
-          <a:prstGeom prst="rect">
-            <a:avLst/>
+            <a:off x="6210147" y="2839212"/>
+            <a:ext cx="2519857" cy="2468880"/>
+          </a:xfrm>
+          <a:prstGeom prst="roundRect">
+            <a:avLst>
+              <a:gd name="adj" fmla="val 7000"/>
+            </a:avLst>
           </a:prstGeom>
           <a:solidFill>
-            <a:srgbClr val="0093D0"/>
+            <a:srgbClr val="EDF3F8"/>
           </a:solidFill>
           <a:ln>
             <a:noFill/>
@@ -16325,14 +15539,14 @@
       </p:sp>
       <p:sp>
         <p:nvSpPr>
-          <p:cNvPr id="17" name="TextBox 16"/>
+          <p:cNvPr id="20" name="TextBox 19"/>
           <p:cNvSpPr txBox="1"/>
           <p:nvPr/>
         </p:nvSpPr>
         <p:spPr>
           <a:xfrm>
-            <a:off x="896112" y="5641848"/>
-            <a:ext cx="10490911" cy="411480"/>
+            <a:off x="6301587" y="3095244"/>
+            <a:ext cx="2336977" cy="640080"/>
           </a:xfrm>
           <a:prstGeom prst="rect">
             <a:avLst/>
@@ -16340,24 +15554,343 @@
           <a:noFill/>
         </p:spPr>
         <p:txBody>
-          <a:bodyPr wrap="square" anchor="ctr" lIns="0" rIns="0" tIns="0" bIns="0">
+          <a:bodyPr wrap="square" anchor="t" lIns="0" rIns="0" tIns="0" bIns="0">
             <a:spAutoFit/>
           </a:bodyPr>
           <a:lstStyle/>
           <a:p>
-            <a:pPr algn="l">
+            <a:pPr algn="ctr">
               <a:lnSpc>
                 <a:spcPct val="100000"/>
               </a:lnSpc>
             </a:pPr>
             <a:r>
-              <a:rPr sz="1300" b="1" i="0">
+              <a:rPr sz="3000" b="1" i="0">
+                <a:solidFill>
+                  <a:srgbClr val="0093D0"/>
+                </a:solidFill>
+                <a:latin typeface="Consolas"/>
+              </a:rPr>
+              <a:t>13,4 m</a:t>
+            </a:r>
+          </a:p>
+        </p:txBody>
+      </p:sp>
+      <p:sp>
+        <p:nvSpPr>
+          <p:cNvPr id="21" name="TextBox 20"/>
+          <p:cNvSpPr txBox="1"/>
+          <p:nvPr/>
+        </p:nvSpPr>
+        <p:spPr>
+          <a:xfrm>
+            <a:off x="6210147" y="3735324"/>
+            <a:ext cx="2519857" cy="274320"/>
+          </a:xfrm>
+          <a:prstGeom prst="rect">
+            <a:avLst/>
+          </a:prstGeom>
+          <a:noFill/>
+        </p:spPr>
+        <p:txBody>
+          <a:bodyPr wrap="square" anchor="t" lIns="0" rIns="0" tIns="0" bIns="0">
+            <a:spAutoFit/>
+          </a:bodyPr>
+          <a:lstStyle/>
+          <a:p>
+            <a:pPr algn="ctr">
+              <a:lnSpc>
+                <a:spcPct val="100000"/>
+              </a:lnSpc>
+            </a:pPr>
+            <a:r>
+              <a:rPr sz="1300" b="0" i="0">
+                <a:solidFill>
+                  <a:srgbClr val="566577"/>
+                </a:solidFill>
+                <a:latin typeface="Consolas"/>
+              </a:rPr>
+              <a:t>de incerteza</a:t>
+            </a:r>
+          </a:p>
+        </p:txBody>
+      </p:sp>
+      <p:sp>
+        <p:nvSpPr>
+          <p:cNvPr id="22" name="TextBox 21"/>
+          <p:cNvSpPr txBox="1"/>
+          <p:nvPr/>
+        </p:nvSpPr>
+        <p:spPr>
+          <a:xfrm>
+            <a:off x="6347307" y="4119372"/>
+            <a:ext cx="2245537" cy="320040"/>
+          </a:xfrm>
+          <a:prstGeom prst="rect">
+            <a:avLst/>
+          </a:prstGeom>
+          <a:noFill/>
+        </p:spPr>
+        <p:txBody>
+          <a:bodyPr wrap="square" anchor="t" lIns="0" rIns="0" tIns="0" bIns="0">
+            <a:spAutoFit/>
+          </a:bodyPr>
+          <a:lstStyle/>
+          <a:p>
+            <a:pPr algn="ctr">
+              <a:lnSpc>
+                <a:spcPct val="100000"/>
+              </a:lnSpc>
+            </a:pPr>
+            <a:r>
+              <a:rPr sz="1400" b="1" i="0">
                 <a:solidFill>
                   <a:srgbClr val="0B1B2B"/>
                 </a:solidFill>
                 <a:latin typeface="Segoe UI"/>
               </a:rPr>
-              <a:t>O princípio é o mesmo nos dois: a localização está no banco de dados de quem mapeou os APs, não no dispositivo.</a:t>
+              <a:t>com 16 APs</a:t>
+            </a:r>
+          </a:p>
+        </p:txBody>
+      </p:sp>
+      <p:sp>
+        <p:nvSpPr>
+          <p:cNvPr id="23" name="TextBox 22"/>
+          <p:cNvSpPr txBox="1"/>
+          <p:nvPr/>
+        </p:nvSpPr>
+        <p:spPr>
+          <a:xfrm>
+            <a:off x="6374739" y="4466844"/>
+            <a:ext cx="2190673" cy="749808"/>
+          </a:xfrm>
+          <a:prstGeom prst="rect">
+            <a:avLst/>
+          </a:prstGeom>
+          <a:noFill/>
+        </p:spPr>
+        <p:txBody>
+          <a:bodyPr wrap="square" anchor="t" lIns="0" rIns="0" tIns="0" bIns="0">
+            <a:spAutoFit/>
+          </a:bodyPr>
+          <a:lstStyle/>
+          <a:p>
+            <a:pPr algn="ctr">
+              <a:lnSpc>
+                <a:spcPct val="110000"/>
+              </a:lnSpc>
+            </a:pPr>
+            <a:r>
+              <a:rPr sz="1100" b="0" i="0">
+                <a:solidFill>
+                  <a:srgbClr val="566577"/>
+                </a:solidFill>
+                <a:latin typeface="Segoe UI"/>
+              </a:rPr>
+              <a:t>contra 14,1 m com só cinco. Mais vizinhos ajudam, mas o ganho satura rápido — dá para medir na hora</a:t>
+            </a:r>
+          </a:p>
+        </p:txBody>
+      </p:sp>
+      <p:sp>
+        <p:nvSpPr>
+          <p:cNvPr id="24" name="Rounded Rectangle 23"/>
+          <p:cNvSpPr/>
+          <p:nvPr/>
+        </p:nvSpPr>
+        <p:spPr>
+          <a:xfrm>
+            <a:off x="8958605" y="2839212"/>
+            <a:ext cx="2519857" cy="2468880"/>
+          </a:xfrm>
+          <a:prstGeom prst="roundRect">
+            <a:avLst>
+              <a:gd name="adj" fmla="val 7000"/>
+            </a:avLst>
+          </a:prstGeom>
+          <a:solidFill>
+            <a:srgbClr val="EDF3F8"/>
+          </a:solidFill>
+          <a:ln>
+            <a:noFill/>
+          </a:ln>
+          <a:effectLst/>
+        </p:spPr>
+        <p:style>
+          <a:lnRef idx="1">
+            <a:schemeClr val="accent1"/>
+          </a:lnRef>
+          <a:fillRef idx="3">
+            <a:schemeClr val="accent1"/>
+          </a:fillRef>
+          <a:effectRef idx="2">
+            <a:schemeClr val="accent1"/>
+          </a:effectRef>
+          <a:fontRef idx="minor">
+            <a:schemeClr val="lt1"/>
+          </a:fontRef>
+        </p:style>
+        <p:txBody>
+          <a:bodyPr rtlCol="0" anchor="ctr"/>
+          <a:lstStyle/>
+          <a:p>
+            <a:pPr algn="ctr"/>
+          </a:p>
+        </p:txBody>
+      </p:sp>
+      <p:sp>
+        <p:nvSpPr>
+          <p:cNvPr id="25" name="TextBox 24"/>
+          <p:cNvSpPr txBox="1"/>
+          <p:nvPr/>
+        </p:nvSpPr>
+        <p:spPr>
+          <a:xfrm>
+            <a:off x="9050045" y="3095244"/>
+            <a:ext cx="2336977" cy="640080"/>
+          </a:xfrm>
+          <a:prstGeom prst="rect">
+            <a:avLst/>
+          </a:prstGeom>
+          <a:noFill/>
+        </p:spPr>
+        <p:txBody>
+          <a:bodyPr wrap="square" anchor="t" lIns="0" rIns="0" tIns="0" bIns="0">
+            <a:spAutoFit/>
+          </a:bodyPr>
+          <a:lstStyle/>
+          <a:p>
+            <a:pPr algn="ctr">
+              <a:lnSpc>
+                <a:spcPct val="100000"/>
+              </a:lnSpc>
+            </a:pPr>
+            <a:r>
+              <a:rPr sz="3000" b="1" i="0">
+                <a:solidFill>
+                  <a:srgbClr val="0093D0"/>
+                </a:solidFill>
+                <a:latin typeface="Consolas"/>
+              </a:rPr>
+              <a:t>OAT</a:t>
+            </a:r>
+          </a:p>
+        </p:txBody>
+      </p:sp>
+      <p:sp>
+        <p:nvSpPr>
+          <p:cNvPr id="26" name="TextBox 25"/>
+          <p:cNvSpPr txBox="1"/>
+          <p:nvPr/>
+        </p:nvSpPr>
+        <p:spPr>
+          <a:xfrm>
+            <a:off x="8958605" y="3735324"/>
+            <a:ext cx="2519857" cy="274320"/>
+          </a:xfrm>
+          <a:prstGeom prst="rect">
+            <a:avLst/>
+          </a:prstGeom>
+          <a:noFill/>
+        </p:spPr>
+        <p:txBody>
+          <a:bodyPr wrap="square" anchor="t" lIns="0" rIns="0" tIns="0" bIns="0">
+            <a:spAutoFit/>
+          </a:bodyPr>
+          <a:lstStyle/>
+          <a:p>
+            <a:pPr algn="ctr">
+              <a:lnSpc>
+                <a:spcPct val="100000"/>
+              </a:lnSpc>
+            </a:pPr>
+            <a:r>
+              <a:rPr sz="1300" b="0" i="0">
+                <a:solidFill>
+                  <a:srgbClr val="566577"/>
+                </a:solidFill>
+                <a:latin typeface="Consolas"/>
+              </a:rPr>
+              <a:t>não a API key</a:t>
+            </a:r>
+          </a:p>
+        </p:txBody>
+      </p:sp>
+      <p:sp>
+        <p:nvSpPr>
+          <p:cNvPr id="27" name="TextBox 26"/>
+          <p:cNvSpPr txBox="1"/>
+          <p:nvPr/>
+        </p:nvSpPr>
+        <p:spPr>
+          <a:xfrm>
+            <a:off x="9095765" y="4119372"/>
+            <a:ext cx="2245537" cy="320040"/>
+          </a:xfrm>
+          <a:prstGeom prst="rect">
+            <a:avLst/>
+          </a:prstGeom>
+          <a:noFill/>
+        </p:spPr>
+        <p:txBody>
+          <a:bodyPr wrap="square" anchor="t" lIns="0" rIns="0" tIns="0" bIns="0">
+            <a:spAutoFit/>
+          </a:bodyPr>
+          <a:lstStyle/>
+          <a:p>
+            <a:pPr algn="ctr">
+              <a:lnSpc>
+                <a:spcPct val="100000"/>
+              </a:lnSpc>
+            </a:pPr>
+            <a:r>
+              <a:rPr sz="1400" b="1" i="0">
+                <a:solidFill>
+                  <a:srgbClr val="0B1B2B"/>
+                </a:solidFill>
+                <a:latin typeface="Consolas"/>
+              </a:rPr>
+              <a:t>401 malformed</a:t>
+            </a:r>
+          </a:p>
+        </p:txBody>
+      </p:sp>
+      <p:sp>
+        <p:nvSpPr>
+          <p:cNvPr id="28" name="TextBox 27"/>
+          <p:cNvSpPr txBox="1"/>
+          <p:nvPr/>
+        </p:nvSpPr>
+        <p:spPr>
+          <a:xfrm>
+            <a:off x="9123197" y="4466844"/>
+            <a:ext cx="2190673" cy="749808"/>
+          </a:xfrm>
+          <a:prstGeom prst="rect">
+            <a:avLst/>
+          </a:prstGeom>
+          <a:noFill/>
+        </p:spPr>
+        <p:txBody>
+          <a:bodyPr wrap="square" anchor="t" lIns="0" rIns="0" tIns="0" bIns="0">
+            <a:spAutoFit/>
+          </a:bodyPr>
+          <a:lstStyle/>
+          <a:p>
+            <a:pPr algn="ctr">
+              <a:lnSpc>
+                <a:spcPct val="110000"/>
+              </a:lnSpc>
+            </a:pPr>
+            <a:r>
+              <a:rPr sz="1100" b="0" i="0">
+                <a:solidFill>
+                  <a:srgbClr val="566577"/>
+                </a:solidFill>
+                <a:latin typeface="Segoe UI"/>
+              </a:rPr>
+              <a:t>só o Organization Auth Token serve para Location Services. Exportado no ambiente do PC, nunca em arquivo</a:t>
             </a:r>
           </a:p>
         </p:txBody>
@@ -16394,6 +15927,963 @@
           <a:prstGeom prst="rect">
             <a:avLst/>
           </a:prstGeom>
+          <a:solidFill>
+            <a:srgbClr val="FFFFFF"/>
+          </a:solidFill>
+          <a:ln>
+            <a:noFill/>
+          </a:ln>
+          <a:effectLst/>
+        </p:spPr>
+        <p:style>
+          <a:lnRef idx="1">
+            <a:schemeClr val="accent1"/>
+          </a:lnRef>
+          <a:fillRef idx="3">
+            <a:schemeClr val="accent1"/>
+          </a:fillRef>
+          <a:effectRef idx="2">
+            <a:schemeClr val="accent1"/>
+          </a:effectRef>
+          <a:fontRef idx="minor">
+            <a:schemeClr val="lt1"/>
+          </a:fontRef>
+        </p:style>
+        <p:txBody>
+          <a:bodyPr rtlCol="0" anchor="ctr"/>
+          <a:lstStyle/>
+          <a:p>
+            <a:pPr algn="ctr"/>
+          </a:p>
+        </p:txBody>
+      </p:sp>
+      <p:sp>
+        <p:nvSpPr>
+          <p:cNvPr id="3" name="TextBox 2"/>
+          <p:cNvSpPr txBox="1"/>
+          <p:nvPr/>
+        </p:nvSpPr>
+        <p:spPr>
+          <a:xfrm>
+            <a:off x="713232" y="274320"/>
+            <a:ext cx="10765231" cy="274320"/>
+          </a:xfrm>
+          <a:prstGeom prst="rect">
+            <a:avLst/>
+          </a:prstGeom>
+          <a:noFill/>
+        </p:spPr>
+        <p:txBody>
+          <a:bodyPr wrap="square" anchor="t" lIns="0" rIns="0" tIns="0" bIns="0">
+            <a:spAutoFit/>
+          </a:bodyPr>
+          <a:lstStyle/>
+          <a:p>
+            <a:pPr algn="l">
+              <a:lnSpc>
+                <a:spcPct val="100000"/>
+              </a:lnSpc>
+            </a:pPr>
+            <a:r>
+              <a:rPr sz="1200" b="1" i="0" spc="140">
+                <a:solidFill>
+                  <a:srgbClr val="0093D0"/>
+                </a:solidFill>
+                <a:latin typeface="Segoe UI"/>
+              </a:rPr>
+              <a:t>LAB 13 · LOCATIONING</a:t>
+            </a:r>
+          </a:p>
+        </p:txBody>
+      </p:sp>
+      <p:sp>
+        <p:nvSpPr>
+          <p:cNvPr id="4" name="TextBox 3"/>
+          <p:cNvSpPr txBox="1"/>
+          <p:nvPr/>
+        </p:nvSpPr>
+        <p:spPr>
+          <a:xfrm>
+            <a:off x="713232" y="585216"/>
+            <a:ext cx="10765231" cy="566928"/>
+          </a:xfrm>
+          <a:prstGeom prst="rect">
+            <a:avLst/>
+          </a:prstGeom>
+          <a:noFill/>
+        </p:spPr>
+        <p:txBody>
+          <a:bodyPr wrap="square" anchor="t" lIns="0" rIns="0" tIns="0" bIns="0">
+            <a:spAutoFit/>
+          </a:bodyPr>
+          <a:lstStyle/>
+          <a:p>
+            <a:pPr algn="l">
+              <a:lnSpc>
+                <a:spcPct val="100000"/>
+              </a:lnSpc>
+            </a:pPr>
+            <a:r>
+              <a:rPr sz="3200" b="1" i="0">
+                <a:solidFill>
+                  <a:srgbClr val="0B1B2B"/>
+                </a:solidFill>
+                <a:latin typeface="Segoe UI"/>
+              </a:rPr>
+              <a:t>Curso × produção</a:t>
+            </a:r>
+          </a:p>
+        </p:txBody>
+      </p:sp>
+      <p:sp>
+        <p:nvSpPr>
+          <p:cNvPr id="5" name="Oval 4"/>
+          <p:cNvSpPr/>
+          <p:nvPr/>
+        </p:nvSpPr>
+        <p:spPr>
+          <a:xfrm>
+            <a:off x="713232" y="6492240"/>
+            <a:ext cx="82296" cy="82296"/>
+          </a:xfrm>
+          <a:prstGeom prst="ellipse">
+            <a:avLst/>
+          </a:prstGeom>
+          <a:solidFill>
+            <a:srgbClr val="22C3E6"/>
+          </a:solidFill>
+          <a:ln>
+            <a:noFill/>
+          </a:ln>
+          <a:effectLst/>
+        </p:spPr>
+        <p:style>
+          <a:lnRef idx="1">
+            <a:schemeClr val="accent1"/>
+          </a:lnRef>
+          <a:fillRef idx="3">
+            <a:schemeClr val="accent1"/>
+          </a:fillRef>
+          <a:effectRef idx="2">
+            <a:schemeClr val="accent1"/>
+          </a:effectRef>
+          <a:fontRef idx="minor">
+            <a:schemeClr val="lt1"/>
+          </a:fontRef>
+        </p:style>
+        <p:txBody>
+          <a:bodyPr rtlCol="0" anchor="ctr"/>
+          <a:lstStyle/>
+          <a:p>
+            <a:pPr algn="ctr"/>
+          </a:p>
+        </p:txBody>
+      </p:sp>
+      <p:sp>
+        <p:nvSpPr>
+          <p:cNvPr id="6" name="TextBox 5"/>
+          <p:cNvSpPr txBox="1"/>
+          <p:nvPr/>
+        </p:nvSpPr>
+        <p:spPr>
+          <a:xfrm>
+            <a:off x="877824" y="6400800"/>
+            <a:ext cx="8229600" cy="274320"/>
+          </a:xfrm>
+          <a:prstGeom prst="rect">
+            <a:avLst/>
+          </a:prstGeom>
+          <a:noFill/>
+        </p:spPr>
+        <p:txBody>
+          <a:bodyPr wrap="square" anchor="t" lIns="0" rIns="0" tIns="0" bIns="0">
+            <a:spAutoFit/>
+          </a:bodyPr>
+          <a:lstStyle/>
+          <a:p>
+            <a:pPr algn="l">
+              <a:lnSpc>
+                <a:spcPct val="100000"/>
+              </a:lnSpc>
+            </a:pPr>
+            <a:r>
+              <a:rPr sz="1000" b="1" i="0">
+                <a:solidFill>
+                  <a:srgbClr val="0B1B2B"/>
+                </a:solidFill>
+                <a:latin typeface="Segoe UI"/>
+              </a:rPr>
+              <a:t>M2</a:t>
+            </a:r>
+            <a:r>
+              <a:rPr sz="1000" b="0" i="0">
+                <a:solidFill>
+                  <a:srgbClr val="566577"/>
+                </a:solidFill>
+                <a:latin typeface="Segoe UI"/>
+              </a:rPr>
+              <a:t> · IA EMBARCADA &amp; CONECTIVIDADE</a:t>
+            </a:r>
+          </a:p>
+        </p:txBody>
+      </p:sp>
+      <p:sp>
+        <p:nvSpPr>
+          <p:cNvPr id="7" name="TextBox 6"/>
+          <p:cNvSpPr txBox="1"/>
+          <p:nvPr/>
+        </p:nvSpPr>
+        <p:spPr>
+          <a:xfrm>
+            <a:off x="10972800" y="6400800"/>
+            <a:ext cx="502920" cy="274320"/>
+          </a:xfrm>
+          <a:prstGeom prst="rect">
+            <a:avLst/>
+          </a:prstGeom>
+          <a:noFill/>
+        </p:spPr>
+        <p:txBody>
+          <a:bodyPr wrap="square" anchor="t" lIns="0" rIns="0" tIns="0" bIns="0">
+            <a:spAutoFit/>
+          </a:bodyPr>
+          <a:lstStyle/>
+          <a:p>
+            <a:pPr algn="r">
+              <a:lnSpc>
+                <a:spcPct val="100000"/>
+              </a:lnSpc>
+            </a:pPr>
+            <a:r>
+              <a:rPr sz="1000" b="0" i="0">
+                <a:solidFill>
+                  <a:srgbClr val="566577"/>
+                </a:solidFill>
+                <a:latin typeface="Segoe UI"/>
+              </a:rPr>
+              <a:t>22</a:t>
+            </a:r>
+          </a:p>
+        </p:txBody>
+      </p:sp>
+      <p:sp>
+        <p:nvSpPr>
+          <p:cNvPr id="8" name="Rounded Rectangle 7"/>
+          <p:cNvSpPr/>
+          <p:nvPr/>
+        </p:nvSpPr>
+        <p:spPr>
+          <a:xfrm>
+            <a:off x="713232" y="1554480"/>
+            <a:ext cx="5245455" cy="457200"/>
+          </a:xfrm>
+          <a:prstGeom prst="roundRect">
+            <a:avLst>
+              <a:gd name="adj" fmla="val 30000"/>
+            </a:avLst>
+          </a:prstGeom>
+          <a:solidFill>
+            <a:srgbClr val="00224E"/>
+          </a:solidFill>
+          <a:ln>
+            <a:noFill/>
+          </a:ln>
+          <a:effectLst/>
+        </p:spPr>
+        <p:style>
+          <a:lnRef idx="1">
+            <a:schemeClr val="accent1"/>
+          </a:lnRef>
+          <a:fillRef idx="3">
+            <a:schemeClr val="accent1"/>
+          </a:fillRef>
+          <a:effectRef idx="2">
+            <a:schemeClr val="accent1"/>
+          </a:effectRef>
+          <a:fontRef idx="minor">
+            <a:schemeClr val="lt1"/>
+          </a:fontRef>
+        </p:style>
+        <p:txBody>
+          <a:bodyPr rtlCol="0" anchor="ctr"/>
+          <a:lstStyle/>
+          <a:p>
+            <a:pPr algn="ctr"/>
+          </a:p>
+        </p:txBody>
+      </p:sp>
+      <p:sp>
+        <p:nvSpPr>
+          <p:cNvPr id="9" name="TextBox 8"/>
+          <p:cNvSpPr txBox="1"/>
+          <p:nvPr/>
+        </p:nvSpPr>
+        <p:spPr>
+          <a:xfrm>
+            <a:off x="713232" y="1636776"/>
+            <a:ext cx="5245455" cy="320040"/>
+          </a:xfrm>
+          <a:prstGeom prst="rect">
+            <a:avLst/>
+          </a:prstGeom>
+          <a:noFill/>
+        </p:spPr>
+        <p:txBody>
+          <a:bodyPr wrap="square" anchor="t" lIns="0" rIns="0" tIns="0" bIns="0">
+            <a:spAutoFit/>
+          </a:bodyPr>
+          <a:lstStyle/>
+          <a:p>
+            <a:pPr algn="ctr">
+              <a:lnSpc>
+                <a:spcPct val="100000"/>
+              </a:lnSpc>
+            </a:pPr>
+            <a:r>
+              <a:rPr sz="1500" b="1" i="0">
+                <a:solidFill>
+                  <a:srgbClr val="FFFFFF"/>
+                </a:solidFill>
+                <a:latin typeface="Segoe UI"/>
+              </a:rPr>
+              <a:t>o curso: scan no kit, resolução no PC</a:t>
+            </a:r>
+          </a:p>
+        </p:txBody>
+      </p:sp>
+      <p:sp>
+        <p:nvSpPr>
+          <p:cNvPr id="10" name="Rounded Rectangle 9"/>
+          <p:cNvSpPr/>
+          <p:nvPr/>
+        </p:nvSpPr>
+        <p:spPr>
+          <a:xfrm>
+            <a:off x="713232" y="2103120"/>
+            <a:ext cx="5245455" cy="3429000"/>
+          </a:xfrm>
+          <a:prstGeom prst="roundRect">
+            <a:avLst>
+              <a:gd name="adj" fmla="val 7000"/>
+            </a:avLst>
+          </a:prstGeom>
+          <a:solidFill>
+            <a:srgbClr val="EDF3F8"/>
+          </a:solidFill>
+          <a:ln>
+            <a:noFill/>
+          </a:ln>
+          <a:effectLst/>
+        </p:spPr>
+        <p:style>
+          <a:lnRef idx="1">
+            <a:schemeClr val="accent1"/>
+          </a:lnRef>
+          <a:fillRef idx="3">
+            <a:schemeClr val="accent1"/>
+          </a:fillRef>
+          <a:effectRef idx="2">
+            <a:schemeClr val="accent1"/>
+          </a:effectRef>
+          <a:fontRef idx="minor">
+            <a:schemeClr val="lt1"/>
+          </a:fontRef>
+        </p:style>
+        <p:txBody>
+          <a:bodyPr rtlCol="0" anchor="ctr"/>
+          <a:lstStyle/>
+          <a:p>
+            <a:pPr algn="ctr"/>
+          </a:p>
+        </p:txBody>
+      </p:sp>
+      <p:sp>
+        <p:nvSpPr>
+          <p:cNvPr id="11" name="TextBox 10"/>
+          <p:cNvSpPr txBox="1"/>
+          <p:nvPr/>
+        </p:nvSpPr>
+        <p:spPr>
+          <a:xfrm>
+            <a:off x="987552" y="2304288"/>
+            <a:ext cx="4696815" cy="3063240"/>
+          </a:xfrm>
+          <a:prstGeom prst="rect">
+            <a:avLst/>
+          </a:prstGeom>
+          <a:noFill/>
+        </p:spPr>
+        <p:txBody>
+          <a:bodyPr wrap="square" anchor="t" lIns="0" rIns="0" tIns="0" bIns="0">
+            <a:spAutoFit/>
+          </a:bodyPr>
+          <a:lstStyle/>
+          <a:p>
+            <a:pPr algn="l">
+              <a:lnSpc>
+                <a:spcPct val="135000"/>
+              </a:lnSpc>
+            </a:pPr>
+            <a:r>
+              <a:rPr sz="1300" b="0" i="0">
+                <a:solidFill>
+                  <a:srgbClr val="566577"/>
+                </a:solidFill>
+                <a:latin typeface="Segoe UI"/>
+              </a:rPr>
+              <a:t>▪  </a:t>
+            </a:r>
+            <a:r>
+              <a:rPr sz="1300" b="0" i="0">
+                <a:solidFill>
+                  <a:srgbClr val="566577"/>
+                </a:solidFill>
+                <a:latin typeface="Consolas"/>
+              </a:rPr>
+              <a:t>cpuapp</a:t>
+            </a:r>
+            <a:r>
+              <a:rPr sz="1300" b="0" i="0">
+                <a:solidFill>
+                  <a:srgbClr val="566577"/>
+                </a:solidFill>
+                <a:latin typeface="Segoe UI"/>
+              </a:rPr>
+              <a:t> normal, sem TF-M</a:t>
+            </a:r>
+          </a:p>
+          <a:p>
+            <a:pPr algn="l">
+              <a:lnSpc>
+                <a:spcPct val="135000"/>
+              </a:lnSpc>
+            </a:pPr>
+            <a:r>
+              <a:rPr sz="1300" b="0" i="0">
+                <a:solidFill>
+                  <a:srgbClr val="566577"/>
+                </a:solidFill>
+                <a:latin typeface="Segoe UI"/>
+              </a:rPr>
+              <a:t>▪  uma chave OAT, no PC do instrutor — nenhum onboarding de dispositivo</a:t>
+            </a:r>
+          </a:p>
+          <a:p>
+            <a:pPr algn="l">
+              <a:lnSpc>
+                <a:spcPct val="135000"/>
+              </a:lnSpc>
+            </a:pPr>
+            <a:r>
+              <a:rPr sz="1300" b="0" i="0">
+                <a:solidFill>
+                  <a:srgbClr val="566577"/>
+                </a:solidFill>
+                <a:latin typeface="Segoe UI"/>
+              </a:rPr>
+              <a:t>▪  internet </a:t>
+            </a:r>
+            <a:r>
+              <a:rPr sz="1300" b="1" i="0">
+                <a:solidFill>
+                  <a:srgbClr val="0B1B2B"/>
+                </a:solidFill>
+                <a:latin typeface="Segoe UI"/>
+              </a:rPr>
+              <a:t>só no PC</a:t>
+            </a:r>
+            <a:r>
+              <a:rPr sz="1300" b="0" i="0">
+                <a:solidFill>
+                  <a:srgbClr val="566577"/>
+                </a:solidFill>
+                <a:latin typeface="Segoe UI"/>
+              </a:rPr>
+              <a:t>; o kit só precisa da rede da sala</a:t>
+            </a:r>
+          </a:p>
+          <a:p>
+            <a:pPr algn="l">
+              <a:lnSpc>
+                <a:spcPct val="135000"/>
+              </a:lnSpc>
+            </a:pPr>
+            <a:r>
+              <a:rPr sz="1300" b="0" i="0">
+                <a:solidFill>
+                  <a:srgbClr val="566577"/>
+                </a:solidFill>
+                <a:latin typeface="Segoe UI"/>
+              </a:rPr>
+              <a:t>▪  o aluno vê a lista de BSSIDs </a:t>
+            </a:r>
+            <a:r>
+              <a:rPr sz="1300" b="1" i="0">
+                <a:solidFill>
+                  <a:srgbClr val="0B1B2B"/>
+                </a:solidFill>
+                <a:latin typeface="Segoe UI"/>
+              </a:rPr>
+              <a:t>e</a:t>
+            </a:r>
+            <a:r>
+              <a:rPr sz="1300" b="0" i="0">
+                <a:solidFill>
+                  <a:srgbClr val="566577"/>
+                </a:solidFill>
+                <a:latin typeface="Segoe UI"/>
+              </a:rPr>
+              <a:t> a coordenada: o mecanismo fica visível</a:t>
+            </a:r>
+          </a:p>
+          <a:p>
+            <a:pPr algn="l">
+              <a:lnSpc>
+                <a:spcPct val="135000"/>
+              </a:lnSpc>
+            </a:pPr>
+            <a:r>
+              <a:rPr sz="1300" b="0" i="0">
+                <a:solidFill>
+                  <a:srgbClr val="566577"/>
+                </a:solidFill>
+                <a:latin typeface="Segoe UI"/>
+              </a:rPr>
+              <a:t>▪  reaproveita o lab 9; 553520 B de FLASH, 187256 B de RAM</a:t>
+            </a:r>
+          </a:p>
+        </p:txBody>
+      </p:sp>
+      <p:sp>
+        <p:nvSpPr>
+          <p:cNvPr id="12" name="Rounded Rectangle 11"/>
+          <p:cNvSpPr/>
+          <p:nvPr/>
+        </p:nvSpPr>
+        <p:spPr>
+          <a:xfrm>
+            <a:off x="6233007" y="1554480"/>
+            <a:ext cx="5245455" cy="457200"/>
+          </a:xfrm>
+          <a:prstGeom prst="roundRect">
+            <a:avLst>
+              <a:gd name="adj" fmla="val 30000"/>
+            </a:avLst>
+          </a:prstGeom>
+          <a:solidFill>
+            <a:srgbClr val="0093D0"/>
+          </a:solidFill>
+          <a:ln>
+            <a:noFill/>
+          </a:ln>
+          <a:effectLst/>
+        </p:spPr>
+        <p:style>
+          <a:lnRef idx="1">
+            <a:schemeClr val="accent1"/>
+          </a:lnRef>
+          <a:fillRef idx="3">
+            <a:schemeClr val="accent1"/>
+          </a:fillRef>
+          <a:effectRef idx="2">
+            <a:schemeClr val="accent1"/>
+          </a:effectRef>
+          <a:fontRef idx="minor">
+            <a:schemeClr val="lt1"/>
+          </a:fontRef>
+        </p:style>
+        <p:txBody>
+          <a:bodyPr rtlCol="0" anchor="ctr"/>
+          <a:lstStyle/>
+          <a:p>
+            <a:pPr algn="ctr"/>
+          </a:p>
+        </p:txBody>
+      </p:sp>
+      <p:sp>
+        <p:nvSpPr>
+          <p:cNvPr id="13" name="TextBox 12"/>
+          <p:cNvSpPr txBox="1"/>
+          <p:nvPr/>
+        </p:nvSpPr>
+        <p:spPr>
+          <a:xfrm>
+            <a:off x="6233007" y="1636776"/>
+            <a:ext cx="5245455" cy="320040"/>
+          </a:xfrm>
+          <a:prstGeom prst="rect">
+            <a:avLst/>
+          </a:prstGeom>
+          <a:noFill/>
+        </p:spPr>
+        <p:txBody>
+          <a:bodyPr wrap="square" anchor="t" lIns="0" rIns="0" tIns="0" bIns="0">
+            <a:spAutoFit/>
+          </a:bodyPr>
+          <a:lstStyle/>
+          <a:p>
+            <a:pPr algn="ctr">
+              <a:lnSpc>
+                <a:spcPct val="100000"/>
+              </a:lnSpc>
+            </a:pPr>
+            <a:r>
+              <a:rPr sz="1500" b="1" i="0">
+                <a:solidFill>
+                  <a:srgbClr val="FFFFFF"/>
+                </a:solidFill>
+                <a:latin typeface="Segoe UI"/>
+              </a:rPr>
+              <a:t>produção: </a:t>
+            </a:r>
+            <a:r>
+              <a:rPr sz="1500" b="1" i="0">
+                <a:solidFill>
+                  <a:srgbClr val="FFFFFF"/>
+                </a:solidFill>
+                <a:latin typeface="Consolas"/>
+              </a:rPr>
+              <a:t>nrf/samples/wifi/nrf_cloud</a:t>
+            </a:r>
+          </a:p>
+        </p:txBody>
+      </p:sp>
+      <p:sp>
+        <p:nvSpPr>
+          <p:cNvPr id="14" name="Rounded Rectangle 13"/>
+          <p:cNvSpPr/>
+          <p:nvPr/>
+        </p:nvSpPr>
+        <p:spPr>
+          <a:xfrm>
+            <a:off x="6233007" y="2103120"/>
+            <a:ext cx="5245455" cy="3429000"/>
+          </a:xfrm>
+          <a:prstGeom prst="roundRect">
+            <a:avLst>
+              <a:gd name="adj" fmla="val 7000"/>
+            </a:avLst>
+          </a:prstGeom>
+          <a:solidFill>
+            <a:srgbClr val="EDF3F8"/>
+          </a:solidFill>
+          <a:ln>
+            <a:noFill/>
+          </a:ln>
+          <a:effectLst/>
+        </p:spPr>
+        <p:style>
+          <a:lnRef idx="1">
+            <a:schemeClr val="accent1"/>
+          </a:lnRef>
+          <a:fillRef idx="3">
+            <a:schemeClr val="accent1"/>
+          </a:fillRef>
+          <a:effectRef idx="2">
+            <a:schemeClr val="accent1"/>
+          </a:effectRef>
+          <a:fontRef idx="minor">
+            <a:schemeClr val="lt1"/>
+          </a:fontRef>
+        </p:style>
+        <p:txBody>
+          <a:bodyPr rtlCol="0" anchor="ctr"/>
+          <a:lstStyle/>
+          <a:p>
+            <a:pPr algn="ctr"/>
+          </a:p>
+        </p:txBody>
+      </p:sp>
+      <p:sp>
+        <p:nvSpPr>
+          <p:cNvPr id="15" name="TextBox 14"/>
+          <p:cNvSpPr txBox="1"/>
+          <p:nvPr/>
+        </p:nvSpPr>
+        <p:spPr>
+          <a:xfrm>
+            <a:off x="6507327" y="2304288"/>
+            <a:ext cx="4696815" cy="3063240"/>
+          </a:xfrm>
+          <a:prstGeom prst="rect">
+            <a:avLst/>
+          </a:prstGeom>
+          <a:noFill/>
+        </p:spPr>
+        <p:txBody>
+          <a:bodyPr wrap="square" anchor="t" lIns="0" rIns="0" tIns="0" bIns="0">
+            <a:spAutoFit/>
+          </a:bodyPr>
+          <a:lstStyle/>
+          <a:p>
+            <a:pPr algn="l">
+              <a:lnSpc>
+                <a:spcPct val="135000"/>
+              </a:lnSpc>
+            </a:pPr>
+            <a:r>
+              <a:rPr sz="1300" b="0" i="0">
+                <a:solidFill>
+                  <a:srgbClr val="566577"/>
+                </a:solidFill>
+                <a:latin typeface="Segoe UI"/>
+              </a:rPr>
+              <a:t>▪  alvo </a:t>
+            </a:r>
+            <a:r>
+              <a:rPr sz="1300" b="0" i="0">
+                <a:solidFill>
+                  <a:srgbClr val="566577"/>
+                </a:solidFill>
+                <a:latin typeface="Consolas"/>
+              </a:rPr>
+              <a:t>/ns</a:t>
+            </a:r>
+            <a:r>
+              <a:rPr sz="1300" b="0" i="0">
+                <a:solidFill>
+                  <a:srgbClr val="566577"/>
+                </a:solidFill>
+                <a:latin typeface="Segoe UI"/>
+              </a:rPr>
+              <a:t>: build com </a:t>
+            </a:r>
+            <a:r>
+              <a:rPr sz="1300" b="1" i="0">
+                <a:solidFill>
+                  <a:srgbClr val="0B1B2B"/>
+                </a:solidFill>
+                <a:latin typeface="Segoe UI"/>
+              </a:rPr>
+              <a:t>TF-M</a:t>
+            </a:r>
+            <a:r>
+              <a:rPr sz="1300" b="0" i="0">
+                <a:solidFill>
+                  <a:srgbClr val="566577"/>
+                </a:solidFill>
+                <a:latin typeface="Segoe UI"/>
+              </a:rPr>
+              <a:t> e certificado provisionado na Trust Zone</a:t>
+            </a:r>
+          </a:p>
+          <a:p>
+            <a:pPr algn="l">
+              <a:lnSpc>
+                <a:spcPct val="135000"/>
+              </a:lnSpc>
+            </a:pPr>
+            <a:r>
+              <a:rPr sz="1300" b="0" i="0">
+                <a:solidFill>
+                  <a:srgbClr val="566577"/>
+                </a:solidFill>
+                <a:latin typeface="Segoe UI"/>
+              </a:rPr>
+              <a:t>▪  </a:t>
+            </a:r>
+            <a:r>
+              <a:rPr sz="1300" b="1" i="0">
+                <a:solidFill>
+                  <a:srgbClr val="0B1B2B"/>
+                </a:solidFill>
+                <a:latin typeface="Segoe UI"/>
+              </a:rPr>
+              <a:t>onboarding</a:t>
+            </a:r>
+            <a:r>
+              <a:rPr sz="1300" b="0" i="0">
+                <a:solidFill>
+                  <a:srgbClr val="566577"/>
+                </a:solidFill>
+                <a:latin typeface="Segoe UI"/>
+              </a:rPr>
+              <a:t> que associa cada dispositivo físico à conta na nuvem</a:t>
+            </a:r>
+          </a:p>
+          <a:p>
+            <a:pPr algn="l">
+              <a:lnSpc>
+                <a:spcPct val="135000"/>
+              </a:lnSpc>
+            </a:pPr>
+            <a:r>
+              <a:rPr sz="1300" b="0" i="0">
+                <a:solidFill>
+                  <a:srgbClr val="566577"/>
+                </a:solidFill>
+                <a:latin typeface="Segoe UI"/>
+              </a:rPr>
+              <a:t>▪  o próprio dispositivo fala com o nRF Cloud por CoAP ou MQTT, continuamente (</a:t>
+            </a:r>
+            <a:r>
+              <a:rPr sz="1300" b="0" i="0">
+                <a:solidFill>
+                  <a:srgbClr val="566577"/>
+                </a:solidFill>
+                <a:latin typeface="Consolas"/>
+              </a:rPr>
+              <a:t>lib_location</a:t>
+            </a:r>
+            <a:r>
+              <a:rPr sz="1300" b="0" i="0">
+                <a:solidFill>
+                  <a:srgbClr val="566577"/>
+                </a:solidFill>
+                <a:latin typeface="Segoe UI"/>
+              </a:rPr>
+              <a:t>)</a:t>
+            </a:r>
+          </a:p>
+          <a:p>
+            <a:pPr algn="l">
+              <a:lnSpc>
+                <a:spcPct val="135000"/>
+              </a:lnSpc>
+            </a:pPr>
+            <a:r>
+              <a:rPr sz="1300" b="0" i="0">
+                <a:solidFill>
+                  <a:srgbClr val="566577"/>
+                </a:solidFill>
+                <a:latin typeface="Segoe UI"/>
+              </a:rPr>
+              <a:t>▪  sem script de PC no meio — é como um produto embarca isso</a:t>
+            </a:r>
+          </a:p>
+          <a:p>
+            <a:pPr algn="l">
+              <a:lnSpc>
+                <a:spcPct val="135000"/>
+              </a:lnSpc>
+            </a:pPr>
+            <a:r>
+              <a:rPr sz="1300" b="0" i="0">
+                <a:solidFill>
+                  <a:srgbClr val="566577"/>
+                </a:solidFill>
+                <a:latin typeface="Segoe UI"/>
+              </a:rPr>
+              <a:t>▪  fica como referência escrita e demo, se houver tempo</a:t>
+            </a:r>
+          </a:p>
+        </p:txBody>
+      </p:sp>
+      <p:sp>
+        <p:nvSpPr>
+          <p:cNvPr id="16" name="Rectangle 15"/>
+          <p:cNvSpPr/>
+          <p:nvPr/>
+        </p:nvSpPr>
+        <p:spPr>
+          <a:xfrm>
+            <a:off x="713232" y="5641848"/>
+            <a:ext cx="50800" cy="384048"/>
+          </a:xfrm>
+          <a:prstGeom prst="rect">
+            <a:avLst/>
+          </a:prstGeom>
+          <a:solidFill>
+            <a:srgbClr val="0093D0"/>
+          </a:solidFill>
+          <a:ln>
+            <a:noFill/>
+          </a:ln>
+          <a:effectLst/>
+        </p:spPr>
+        <p:style>
+          <a:lnRef idx="1">
+            <a:schemeClr val="accent1"/>
+          </a:lnRef>
+          <a:fillRef idx="3">
+            <a:schemeClr val="accent1"/>
+          </a:fillRef>
+          <a:effectRef idx="2">
+            <a:schemeClr val="accent1"/>
+          </a:effectRef>
+          <a:fontRef idx="minor">
+            <a:schemeClr val="lt1"/>
+          </a:fontRef>
+        </p:style>
+        <p:txBody>
+          <a:bodyPr rtlCol="0" anchor="ctr"/>
+          <a:lstStyle/>
+          <a:p>
+            <a:pPr algn="ctr"/>
+          </a:p>
+        </p:txBody>
+      </p:sp>
+      <p:sp>
+        <p:nvSpPr>
+          <p:cNvPr id="17" name="TextBox 16"/>
+          <p:cNvSpPr txBox="1"/>
+          <p:nvPr/>
+        </p:nvSpPr>
+        <p:spPr>
+          <a:xfrm>
+            <a:off x="896112" y="5641848"/>
+            <a:ext cx="10490911" cy="411480"/>
+          </a:xfrm>
+          <a:prstGeom prst="rect">
+            <a:avLst/>
+          </a:prstGeom>
+          <a:noFill/>
+        </p:spPr>
+        <p:txBody>
+          <a:bodyPr wrap="square" anchor="ctr" lIns="0" rIns="0" tIns="0" bIns="0">
+            <a:spAutoFit/>
+          </a:bodyPr>
+          <a:lstStyle/>
+          <a:p>
+            <a:pPr algn="l">
+              <a:lnSpc>
+                <a:spcPct val="100000"/>
+              </a:lnSpc>
+            </a:pPr>
+            <a:r>
+              <a:rPr sz="1300" b="1" i="0">
+                <a:solidFill>
+                  <a:srgbClr val="0B1B2B"/>
+                </a:solidFill>
+                <a:latin typeface="Segoe UI"/>
+              </a:rPr>
+              <a:t>O princípio é o mesmo nos dois: a localização está no banco de dados de quem mapeou os APs, não no dispositivo.</a:t>
+            </a:r>
+          </a:p>
+        </p:txBody>
+      </p:sp>
+    </p:spTree>
+  </p:cSld>
+  <p:clrMapOvr>
+    <a:masterClrMapping/>
+  </p:clrMapOvr>
+</p:sld>
+</file>
+
+<file path=ppt/slides/slide23.xml><?xml version="1.0" encoding="utf-8"?>
+<p:sld xmlns:a="http://schemas.openxmlformats.org/drawingml/2006/main" xmlns:p="http://schemas.openxmlformats.org/presentationml/2006/main" xmlns:r="http://schemas.openxmlformats.org/officeDocument/2006/relationships">
+  <p:cSld>
+    <p:spTree>
+      <p:nvGrpSpPr>
+        <p:cNvPr id="1" name=""/>
+        <p:cNvGrpSpPr/>
+        <p:nvPr/>
+      </p:nvGrpSpPr>
+      <p:grpSpPr/>
+      <p:sp>
+        <p:nvSpPr>
+          <p:cNvPr id="2" name="Rectangle 1"/>
+          <p:cNvSpPr/>
+          <p:nvPr/>
+        </p:nvSpPr>
+        <p:spPr>
+          <a:xfrm>
+            <a:off x="0" y="0"/>
+            <a:ext cx="12191695" cy="6858000"/>
+          </a:xfrm>
+          <a:prstGeom prst="rect">
+            <a:avLst/>
+          </a:prstGeom>
           <a:gradFill rotWithShape="1">
             <a:gsLst>
               <a:gs pos="0">
@@ -16636,7 +17126,7 @@
                 </a:solidFill>
                 <a:latin typeface="Segoe UI"/>
               </a:rPr>
-              <a:t>22</a:t>
+              <a:t>23</a:t>
             </a:r>
           </a:p>
         </p:txBody>
@@ -19234,7 +19724,7 @@
                 </a:solidFill>
                 <a:latin typeface="Consolas"/>
               </a:rPr>
-              <a:t># degrau 3: so se o AP negociar</a:t>
+              <a:t># degrau 3: o AP da sala aceita</a:t>
             </a:r>
           </a:p>
         </p:txBody>
